--- a/260424_nanostring/manuscript/figures/FigS22_NanoString_composite_native_editable.pptx
+++ b/260424_nanostring/manuscript/figures/FigS22_NanoString_composite_native_editable.pptx
@@ -3193,8 +3193,8 @@
         </p:nvSpPr>
         <p:spPr>
           <a:xfrm>
-            <a:off x="457200" y="137160"/>
-            <a:ext cx="8229600" cy="274320"/>
+            <a:off x="274320" y="137160"/>
+            <a:ext cx="8595360" cy="274320"/>
           </a:xfrm>
           <a:prstGeom prst="rect">
             <a:avLst/>
@@ -3216,7 +3216,7 @@
                 </a:solidFill>
                 <a:latin typeface="Arial"/>
               </a:rPr>
-              <a:t>A  Pre/post/Δ composite heatmap (good − bad)</a:t>
+              <a:t>A  Pre/post/Δ composite heatmap (good − bad) + directional evidence per timepoint</a:t>
             </a:r>
           </a:p>
         </p:txBody>
@@ -3229,8 +3229,8 @@
         </p:nvSpPr>
         <p:spPr>
           <a:xfrm>
-            <a:off x="457200" y="457200"/>
-            <a:ext cx="8229600" cy="228600"/>
+            <a:off x="274320" y="457200"/>
+            <a:ext cx="8595360" cy="228600"/>
           </a:xfrm>
           <a:prstGeom prst="rect">
             <a:avLst/>
@@ -3252,7 +3252,7 @@
                 </a:solidFill>
                 <a:latin typeface="Arial"/>
               </a:rPr>
-              <a:t>Star ★ = one-sided MW P ≤ 0.05 (ceiling at n=3 vs 3). Dot · = P ≤ 0.10.</a:t>
+              <a:t>Left: good − bad composite z (star ★ = one-sided MW P ≤ 0.05 ceiling, dot · = P ≤ 0.10). Right: -log₁₀ P per timepoint; dashed red = P = 0.05.</a:t>
             </a:r>
           </a:p>
         </p:txBody>
@@ -3265,8 +3265,8 @@
         </p:nvSpPr>
         <p:spPr>
           <a:xfrm>
-            <a:off x="3108960" y="594359"/>
-            <a:ext cx="731520" cy="228600"/>
+            <a:off x="2377440" y="594359"/>
+            <a:ext cx="502920" cy="228600"/>
           </a:xfrm>
           <a:prstGeom prst="rect">
             <a:avLst/>
@@ -3301,8 +3301,8 @@
         </p:nvSpPr>
         <p:spPr>
           <a:xfrm>
-            <a:off x="3840480" y="594359"/>
-            <a:ext cx="731520" cy="228600"/>
+            <a:off x="2880360" y="594359"/>
+            <a:ext cx="502920" cy="228600"/>
           </a:xfrm>
           <a:prstGeom prst="rect">
             <a:avLst/>
@@ -3337,8 +3337,8 @@
         </p:nvSpPr>
         <p:spPr>
           <a:xfrm>
-            <a:off x="4572000" y="594359"/>
-            <a:ext cx="731520" cy="228600"/>
+            <a:off x="3383280" y="594359"/>
+            <a:ext cx="502920" cy="228600"/>
           </a:xfrm>
           <a:prstGeom prst="rect">
             <a:avLst/>
@@ -3373,8 +3373,8 @@
         </p:nvSpPr>
         <p:spPr>
           <a:xfrm>
-            <a:off x="640079" y="850392"/>
-            <a:ext cx="2377440" cy="201167"/>
+            <a:off x="274320" y="850392"/>
+            <a:ext cx="2011680" cy="201167"/>
           </a:xfrm>
           <a:prstGeom prst="rect">
             <a:avLst/>
@@ -3409,8 +3409,8 @@
         </p:nvSpPr>
         <p:spPr>
           <a:xfrm>
-            <a:off x="3108960" y="868680"/>
-            <a:ext cx="731520" cy="182879"/>
+            <a:off x="2377440" y="868680"/>
+            <a:ext cx="502920" cy="182879"/>
           </a:xfrm>
           <a:prstGeom prst="rect">
             <a:avLst/>
@@ -3455,8 +3455,8 @@
         </p:nvSpPr>
         <p:spPr>
           <a:xfrm>
-            <a:off x="3108960" y="868680"/>
-            <a:ext cx="731520" cy="182879"/>
+            <a:off x="2377440" y="868680"/>
+            <a:ext cx="502920" cy="182879"/>
           </a:xfrm>
           <a:prstGeom prst="rect">
             <a:avLst/>
@@ -3472,13 +3472,13 @@
           <a:p>
             <a:pPr algn="ctr"/>
             <a:r>
-              <a:rPr sz="600" b="0" i="0">
+              <a:rPr sz="550" b="0" i="0">
                 <a:solidFill>
                   <a:srgbClr val="222222"/>
                 </a:solidFill>
                 <a:latin typeface="Arial"/>
               </a:rPr>
-              <a:t>+0.88 ★</a:t>
+              <a:t>+0.88★</a:t>
             </a:r>
           </a:p>
         </p:txBody>
@@ -3491,8 +3491,8 @@
         </p:nvSpPr>
         <p:spPr>
           <a:xfrm>
-            <a:off x="3840480" y="868680"/>
-            <a:ext cx="731520" cy="182879"/>
+            <a:off x="2880360" y="868680"/>
+            <a:ext cx="502920" cy="182879"/>
           </a:xfrm>
           <a:prstGeom prst="rect">
             <a:avLst/>
@@ -3537,8 +3537,8 @@
         </p:nvSpPr>
         <p:spPr>
           <a:xfrm>
-            <a:off x="3840480" y="868680"/>
-            <a:ext cx="731520" cy="182879"/>
+            <a:off x="2880360" y="868680"/>
+            <a:ext cx="502920" cy="182879"/>
           </a:xfrm>
           <a:prstGeom prst="rect">
             <a:avLst/>
@@ -3554,7 +3554,7 @@
           <a:p>
             <a:pPr algn="ctr"/>
             <a:r>
-              <a:rPr sz="600" b="0" i="0">
+              <a:rPr sz="550" b="0" i="0">
                 <a:solidFill>
                   <a:srgbClr val="222222"/>
                 </a:solidFill>
@@ -3573,8 +3573,8 @@
         </p:nvSpPr>
         <p:spPr>
           <a:xfrm>
-            <a:off x="4572000" y="868680"/>
-            <a:ext cx="731520" cy="182879"/>
+            <a:off x="3383280" y="868680"/>
+            <a:ext cx="502920" cy="182879"/>
           </a:xfrm>
           <a:prstGeom prst="rect">
             <a:avLst/>
@@ -3619,8 +3619,8 @@
         </p:nvSpPr>
         <p:spPr>
           <a:xfrm>
-            <a:off x="4572000" y="868680"/>
-            <a:ext cx="731520" cy="182879"/>
+            <a:off x="3383280" y="868680"/>
+            <a:ext cx="502920" cy="182879"/>
           </a:xfrm>
           <a:prstGeom prst="rect">
             <a:avLst/>
@@ -3636,7 +3636,7 @@
           <a:p>
             <a:pPr algn="ctr"/>
             <a:r>
-              <a:rPr sz="600" b="0" i="0">
+              <a:rPr sz="550" b="0" i="0">
                 <a:solidFill>
                   <a:srgbClr val="222222"/>
                 </a:solidFill>
@@ -3655,8 +3655,8 @@
         </p:nvSpPr>
         <p:spPr>
           <a:xfrm>
-            <a:off x="640079" y="1033271"/>
-            <a:ext cx="2377440" cy="201167"/>
+            <a:off x="274320" y="1033271"/>
+            <a:ext cx="2011680" cy="201167"/>
           </a:xfrm>
           <a:prstGeom prst="rect">
             <a:avLst/>
@@ -3691,8 +3691,8 @@
         </p:nvSpPr>
         <p:spPr>
           <a:xfrm>
-            <a:off x="3108960" y="1051560"/>
-            <a:ext cx="731520" cy="182879"/>
+            <a:off x="2377440" y="1051560"/>
+            <a:ext cx="502920" cy="182879"/>
           </a:xfrm>
           <a:prstGeom prst="rect">
             <a:avLst/>
@@ -3737,8 +3737,8 @@
         </p:nvSpPr>
         <p:spPr>
           <a:xfrm>
-            <a:off x="3108960" y="1051560"/>
-            <a:ext cx="731520" cy="182879"/>
+            <a:off x="2377440" y="1051560"/>
+            <a:ext cx="502920" cy="182879"/>
           </a:xfrm>
           <a:prstGeom prst="rect">
             <a:avLst/>
@@ -3754,13 +3754,13 @@
           <a:p>
             <a:pPr algn="ctr"/>
             <a:r>
-              <a:rPr sz="600" b="0" i="0">
+              <a:rPr sz="550" b="0" i="0">
                 <a:solidFill>
                   <a:srgbClr val="222222"/>
                 </a:solidFill>
                 <a:latin typeface="Arial"/>
               </a:rPr>
-              <a:t>+0.86 ★</a:t>
+              <a:t>+0.86★</a:t>
             </a:r>
           </a:p>
         </p:txBody>
@@ -3773,8 +3773,8 @@
         </p:nvSpPr>
         <p:spPr>
           <a:xfrm>
-            <a:off x="3840480" y="1051560"/>
-            <a:ext cx="731520" cy="182879"/>
+            <a:off x="2880360" y="1051560"/>
+            <a:ext cx="502920" cy="182879"/>
           </a:xfrm>
           <a:prstGeom prst="rect">
             <a:avLst/>
@@ -3819,8 +3819,8 @@
         </p:nvSpPr>
         <p:spPr>
           <a:xfrm>
-            <a:off x="3840480" y="1051560"/>
-            <a:ext cx="731520" cy="182879"/>
+            <a:off x="2880360" y="1051560"/>
+            <a:ext cx="502920" cy="182879"/>
           </a:xfrm>
           <a:prstGeom prst="rect">
             <a:avLst/>
@@ -3836,13 +3836,13 @@
           <a:p>
             <a:pPr algn="ctr"/>
             <a:r>
-              <a:rPr sz="600" b="0" i="0">
+              <a:rPr sz="550" b="0" i="0">
                 <a:solidFill>
                   <a:srgbClr val="FFFFFF"/>
                 </a:solidFill>
                 <a:latin typeface="Arial"/>
               </a:rPr>
-              <a:t>+1.40 ★</a:t>
+              <a:t>+1.40★</a:t>
             </a:r>
           </a:p>
         </p:txBody>
@@ -3855,8 +3855,8 @@
         </p:nvSpPr>
         <p:spPr>
           <a:xfrm>
-            <a:off x="4572000" y="1051560"/>
-            <a:ext cx="731520" cy="182879"/>
+            <a:off x="3383280" y="1051560"/>
+            <a:ext cx="502920" cy="182879"/>
           </a:xfrm>
           <a:prstGeom prst="rect">
             <a:avLst/>
@@ -3901,8 +3901,8 @@
         </p:nvSpPr>
         <p:spPr>
           <a:xfrm>
-            <a:off x="4572000" y="1051560"/>
-            <a:ext cx="731520" cy="182879"/>
+            <a:off x="3383280" y="1051560"/>
+            <a:ext cx="502920" cy="182879"/>
           </a:xfrm>
           <a:prstGeom prst="rect">
             <a:avLst/>
@@ -3918,13 +3918,13 @@
           <a:p>
             <a:pPr algn="ctr"/>
             <a:r>
-              <a:rPr sz="600" b="0" i="0">
+              <a:rPr sz="550" b="0" i="0">
                 <a:solidFill>
                   <a:srgbClr val="222222"/>
                 </a:solidFill>
                 <a:latin typeface="Arial"/>
               </a:rPr>
-              <a:t>+0.53 ·</a:t>
+              <a:t>+0.53·</a:t>
             </a:r>
           </a:p>
         </p:txBody>
@@ -3937,8 +3937,8 @@
         </p:nvSpPr>
         <p:spPr>
           <a:xfrm>
-            <a:off x="640079" y="1216151"/>
-            <a:ext cx="2377440" cy="201167"/>
+            <a:off x="274320" y="1216151"/>
+            <a:ext cx="2011680" cy="201167"/>
           </a:xfrm>
           <a:prstGeom prst="rect">
             <a:avLst/>
@@ -3973,8 +3973,8 @@
         </p:nvSpPr>
         <p:spPr>
           <a:xfrm>
-            <a:off x="3108960" y="1234439"/>
-            <a:ext cx="731520" cy="182879"/>
+            <a:off x="2377440" y="1234439"/>
+            <a:ext cx="502920" cy="182879"/>
           </a:xfrm>
           <a:prstGeom prst="rect">
             <a:avLst/>
@@ -4019,8 +4019,8 @@
         </p:nvSpPr>
         <p:spPr>
           <a:xfrm>
-            <a:off x="3108960" y="1234439"/>
-            <a:ext cx="731520" cy="182879"/>
+            <a:off x="2377440" y="1234439"/>
+            <a:ext cx="502920" cy="182879"/>
           </a:xfrm>
           <a:prstGeom prst="rect">
             <a:avLst/>
@@ -4036,13 +4036,13 @@
           <a:p>
             <a:pPr algn="ctr"/>
             <a:r>
-              <a:rPr sz="600" b="0" i="0">
+              <a:rPr sz="550" b="0" i="0">
                 <a:solidFill>
                   <a:srgbClr val="222222"/>
                 </a:solidFill>
                 <a:latin typeface="Arial"/>
               </a:rPr>
-              <a:t>+0.78 ★</a:t>
+              <a:t>+0.78★</a:t>
             </a:r>
           </a:p>
         </p:txBody>
@@ -4055,8 +4055,8 @@
         </p:nvSpPr>
         <p:spPr>
           <a:xfrm>
-            <a:off x="3840480" y="1234439"/>
-            <a:ext cx="731520" cy="182879"/>
+            <a:off x="2880360" y="1234439"/>
+            <a:ext cx="502920" cy="182879"/>
           </a:xfrm>
           <a:prstGeom prst="rect">
             <a:avLst/>
@@ -4101,8 +4101,8 @@
         </p:nvSpPr>
         <p:spPr>
           <a:xfrm>
-            <a:off x="3840480" y="1234439"/>
-            <a:ext cx="731520" cy="182879"/>
+            <a:off x="2880360" y="1234439"/>
+            <a:ext cx="502920" cy="182879"/>
           </a:xfrm>
           <a:prstGeom prst="rect">
             <a:avLst/>
@@ -4118,13 +4118,13 @@
           <a:p>
             <a:pPr algn="ctr"/>
             <a:r>
-              <a:rPr sz="600" b="0" i="0">
+              <a:rPr sz="550" b="0" i="0">
                 <a:solidFill>
                   <a:srgbClr val="222222"/>
                 </a:solidFill>
                 <a:latin typeface="Arial"/>
               </a:rPr>
-              <a:t>+0.90 ·</a:t>
+              <a:t>+0.90·</a:t>
             </a:r>
           </a:p>
         </p:txBody>
@@ -4137,8 +4137,8 @@
         </p:nvSpPr>
         <p:spPr>
           <a:xfrm>
-            <a:off x="4572000" y="1234439"/>
-            <a:ext cx="731520" cy="182879"/>
+            <a:off x="3383280" y="1234439"/>
+            <a:ext cx="502920" cy="182879"/>
           </a:xfrm>
           <a:prstGeom prst="rect">
             <a:avLst/>
@@ -4183,8 +4183,8 @@
         </p:nvSpPr>
         <p:spPr>
           <a:xfrm>
-            <a:off x="4572000" y="1234439"/>
-            <a:ext cx="731520" cy="182879"/>
+            <a:off x="3383280" y="1234439"/>
+            <a:ext cx="502920" cy="182879"/>
           </a:xfrm>
           <a:prstGeom prst="rect">
             <a:avLst/>
@@ -4200,7 +4200,7 @@
           <a:p>
             <a:pPr algn="ctr"/>
             <a:r>
-              <a:rPr sz="600" b="0" i="0">
+              <a:rPr sz="550" b="0" i="0">
                 <a:solidFill>
                   <a:srgbClr val="222222"/>
                 </a:solidFill>
@@ -4219,8 +4219,8 @@
         </p:nvSpPr>
         <p:spPr>
           <a:xfrm>
-            <a:off x="640079" y="1399031"/>
-            <a:ext cx="2377440" cy="201167"/>
+            <a:off x="274320" y="1399031"/>
+            <a:ext cx="2011680" cy="201167"/>
           </a:xfrm>
           <a:prstGeom prst="rect">
             <a:avLst/>
@@ -4255,8 +4255,8 @@
         </p:nvSpPr>
         <p:spPr>
           <a:xfrm>
-            <a:off x="3108960" y="1417319"/>
-            <a:ext cx="731520" cy="182879"/>
+            <a:off x="2377440" y="1417319"/>
+            <a:ext cx="502920" cy="182879"/>
           </a:xfrm>
           <a:prstGeom prst="rect">
             <a:avLst/>
@@ -4301,8 +4301,8 @@
         </p:nvSpPr>
         <p:spPr>
           <a:xfrm>
-            <a:off x="3108960" y="1417319"/>
-            <a:ext cx="731520" cy="182879"/>
+            <a:off x="2377440" y="1417319"/>
+            <a:ext cx="502920" cy="182879"/>
           </a:xfrm>
           <a:prstGeom prst="rect">
             <a:avLst/>
@@ -4318,13 +4318,13 @@
           <a:p>
             <a:pPr algn="ctr"/>
             <a:r>
-              <a:rPr sz="600" b="0" i="0">
+              <a:rPr sz="550" b="0" i="0">
                 <a:solidFill>
                   <a:srgbClr val="FFFFFF"/>
                 </a:solidFill>
                 <a:latin typeface="Arial"/>
               </a:rPr>
-              <a:t>+0.98 ★</a:t>
+              <a:t>+0.98★</a:t>
             </a:r>
           </a:p>
         </p:txBody>
@@ -4337,8 +4337,8 @@
         </p:nvSpPr>
         <p:spPr>
           <a:xfrm>
-            <a:off x="3840480" y="1417319"/>
-            <a:ext cx="731520" cy="182879"/>
+            <a:off x="2880360" y="1417319"/>
+            <a:ext cx="502920" cy="182879"/>
           </a:xfrm>
           <a:prstGeom prst="rect">
             <a:avLst/>
@@ -4383,8 +4383,8 @@
         </p:nvSpPr>
         <p:spPr>
           <a:xfrm>
-            <a:off x="3840480" y="1417319"/>
-            <a:ext cx="731520" cy="182879"/>
+            <a:off x="2880360" y="1417319"/>
+            <a:ext cx="502920" cy="182879"/>
           </a:xfrm>
           <a:prstGeom prst="rect">
             <a:avLst/>
@@ -4400,13 +4400,13 @@
           <a:p>
             <a:pPr algn="ctr"/>
             <a:r>
-              <a:rPr sz="600" b="0" i="0">
+              <a:rPr sz="550" b="0" i="0">
                 <a:solidFill>
                   <a:srgbClr val="FFFFFF"/>
                 </a:solidFill>
                 <a:latin typeface="Arial"/>
               </a:rPr>
-              <a:t>+1.52 ★</a:t>
+              <a:t>+1.52★</a:t>
             </a:r>
           </a:p>
         </p:txBody>
@@ -4419,8 +4419,8 @@
         </p:nvSpPr>
         <p:spPr>
           <a:xfrm>
-            <a:off x="4572000" y="1417319"/>
-            <a:ext cx="731520" cy="182879"/>
+            <a:off x="3383280" y="1417319"/>
+            <a:ext cx="502920" cy="182879"/>
           </a:xfrm>
           <a:prstGeom prst="rect">
             <a:avLst/>
@@ -4465,8 +4465,8 @@
         </p:nvSpPr>
         <p:spPr>
           <a:xfrm>
-            <a:off x="4572000" y="1417319"/>
-            <a:ext cx="731520" cy="182879"/>
+            <a:off x="3383280" y="1417319"/>
+            <a:ext cx="502920" cy="182879"/>
           </a:xfrm>
           <a:prstGeom prst="rect">
             <a:avLst/>
@@ -4482,7 +4482,7 @@
           <a:p>
             <a:pPr algn="ctr"/>
             <a:r>
-              <a:rPr sz="600" b="0" i="0">
+              <a:rPr sz="550" b="0" i="0">
                 <a:solidFill>
                   <a:srgbClr val="222222"/>
                 </a:solidFill>
@@ -4501,8 +4501,8 @@
         </p:nvSpPr>
         <p:spPr>
           <a:xfrm>
-            <a:off x="640079" y="1581912"/>
-            <a:ext cx="2377440" cy="201167"/>
+            <a:off x="274320" y="1581912"/>
+            <a:ext cx="2011680" cy="201167"/>
           </a:xfrm>
           <a:prstGeom prst="rect">
             <a:avLst/>
@@ -4537,8 +4537,8 @@
         </p:nvSpPr>
         <p:spPr>
           <a:xfrm>
-            <a:off x="3108960" y="1600200"/>
-            <a:ext cx="731520" cy="182879"/>
+            <a:off x="2377440" y="1600200"/>
+            <a:ext cx="502920" cy="182879"/>
           </a:xfrm>
           <a:prstGeom prst="rect">
             <a:avLst/>
@@ -4583,8 +4583,8 @@
         </p:nvSpPr>
         <p:spPr>
           <a:xfrm>
-            <a:off x="3108960" y="1600200"/>
-            <a:ext cx="731520" cy="182879"/>
+            <a:off x="2377440" y="1600200"/>
+            <a:ext cx="502920" cy="182879"/>
           </a:xfrm>
           <a:prstGeom prst="rect">
             <a:avLst/>
@@ -4600,13 +4600,13 @@
           <a:p>
             <a:pPr algn="ctr"/>
             <a:r>
-              <a:rPr sz="600" b="0" i="0">
+              <a:rPr sz="550" b="0" i="0">
                 <a:solidFill>
                   <a:srgbClr val="222222"/>
                 </a:solidFill>
                 <a:latin typeface="Arial"/>
               </a:rPr>
-              <a:t>+0.73 ★</a:t>
+              <a:t>+0.73★</a:t>
             </a:r>
           </a:p>
         </p:txBody>
@@ -4619,8 +4619,8 @@
         </p:nvSpPr>
         <p:spPr>
           <a:xfrm>
-            <a:off x="3840480" y="1600200"/>
-            <a:ext cx="731520" cy="182879"/>
+            <a:off x="2880360" y="1600200"/>
+            <a:ext cx="502920" cy="182879"/>
           </a:xfrm>
           <a:prstGeom prst="rect">
             <a:avLst/>
@@ -4665,8 +4665,8 @@
         </p:nvSpPr>
         <p:spPr>
           <a:xfrm>
-            <a:off x="3840480" y="1600200"/>
-            <a:ext cx="731520" cy="182879"/>
+            <a:off x="2880360" y="1600200"/>
+            <a:ext cx="502920" cy="182879"/>
           </a:xfrm>
           <a:prstGeom prst="rect">
             <a:avLst/>
@@ -4682,13 +4682,13 @@
           <a:p>
             <a:pPr algn="ctr"/>
             <a:r>
-              <a:rPr sz="600" b="0" i="0">
+              <a:rPr sz="550" b="0" i="0">
                 <a:solidFill>
                   <a:srgbClr val="FFFFFF"/>
                 </a:solidFill>
                 <a:latin typeface="Arial"/>
               </a:rPr>
-              <a:t>+0.97 ·</a:t>
+              <a:t>+0.97·</a:t>
             </a:r>
           </a:p>
         </p:txBody>
@@ -4701,8 +4701,8 @@
         </p:nvSpPr>
         <p:spPr>
           <a:xfrm>
-            <a:off x="4572000" y="1600200"/>
-            <a:ext cx="731520" cy="182879"/>
+            <a:off x="3383280" y="1600200"/>
+            <a:ext cx="502920" cy="182879"/>
           </a:xfrm>
           <a:prstGeom prst="rect">
             <a:avLst/>
@@ -4747,8 +4747,8 @@
         </p:nvSpPr>
         <p:spPr>
           <a:xfrm>
-            <a:off x="4572000" y="1600200"/>
-            <a:ext cx="731520" cy="182879"/>
+            <a:off x="3383280" y="1600200"/>
+            <a:ext cx="502920" cy="182879"/>
           </a:xfrm>
           <a:prstGeom prst="rect">
             <a:avLst/>
@@ -4764,7 +4764,7 @@
           <a:p>
             <a:pPr algn="ctr"/>
             <a:r>
-              <a:rPr sz="600" b="0" i="0">
+              <a:rPr sz="550" b="0" i="0">
                 <a:solidFill>
                   <a:srgbClr val="222222"/>
                 </a:solidFill>
@@ -4783,8 +4783,8 @@
         </p:nvSpPr>
         <p:spPr>
           <a:xfrm>
-            <a:off x="640079" y="1764791"/>
-            <a:ext cx="2377440" cy="201167"/>
+            <a:off x="274320" y="1764791"/>
+            <a:ext cx="2011680" cy="201167"/>
           </a:xfrm>
           <a:prstGeom prst="rect">
             <a:avLst/>
@@ -4819,8 +4819,8 @@
         </p:nvSpPr>
         <p:spPr>
           <a:xfrm>
-            <a:off x="3108960" y="1783079"/>
-            <a:ext cx="731520" cy="182879"/>
+            <a:off x="2377440" y="1783079"/>
+            <a:ext cx="502920" cy="182879"/>
           </a:xfrm>
           <a:prstGeom prst="rect">
             <a:avLst/>
@@ -4865,8 +4865,8 @@
         </p:nvSpPr>
         <p:spPr>
           <a:xfrm>
-            <a:off x="3108960" y="1783079"/>
-            <a:ext cx="731520" cy="182879"/>
+            <a:off x="2377440" y="1783079"/>
+            <a:ext cx="502920" cy="182879"/>
           </a:xfrm>
           <a:prstGeom prst="rect">
             <a:avLst/>
@@ -4882,13 +4882,13 @@
           <a:p>
             <a:pPr algn="ctr"/>
             <a:r>
-              <a:rPr sz="600" b="0" i="0">
+              <a:rPr sz="550" b="0" i="0">
                 <a:solidFill>
                   <a:srgbClr val="222222"/>
                 </a:solidFill>
                 <a:latin typeface="Arial"/>
               </a:rPr>
-              <a:t>+0.52 ★</a:t>
+              <a:t>+0.52★</a:t>
             </a:r>
           </a:p>
         </p:txBody>
@@ -4901,8 +4901,8 @@
         </p:nvSpPr>
         <p:spPr>
           <a:xfrm>
-            <a:off x="3840480" y="1783079"/>
-            <a:ext cx="731520" cy="182879"/>
+            <a:off x="2880360" y="1783079"/>
+            <a:ext cx="502920" cy="182879"/>
           </a:xfrm>
           <a:prstGeom prst="rect">
             <a:avLst/>
@@ -4947,8 +4947,8 @@
         </p:nvSpPr>
         <p:spPr>
           <a:xfrm>
-            <a:off x="3840480" y="1783079"/>
-            <a:ext cx="731520" cy="182879"/>
+            <a:off x="2880360" y="1783079"/>
+            <a:ext cx="502920" cy="182879"/>
           </a:xfrm>
           <a:prstGeom prst="rect">
             <a:avLst/>
@@ -4964,7 +4964,7 @@
           <a:p>
             <a:pPr algn="ctr"/>
             <a:r>
-              <a:rPr sz="600" b="0" i="0">
+              <a:rPr sz="550" b="0" i="0">
                 <a:solidFill>
                   <a:srgbClr val="222222"/>
                 </a:solidFill>
@@ -4983,8 +4983,8 @@
         </p:nvSpPr>
         <p:spPr>
           <a:xfrm>
-            <a:off x="4572000" y="1783079"/>
-            <a:ext cx="731520" cy="182879"/>
+            <a:off x="3383280" y="1783079"/>
+            <a:ext cx="502920" cy="182879"/>
           </a:xfrm>
           <a:prstGeom prst="rect">
             <a:avLst/>
@@ -5029,8 +5029,8 @@
         </p:nvSpPr>
         <p:spPr>
           <a:xfrm>
-            <a:off x="4572000" y="1783079"/>
-            <a:ext cx="731520" cy="182879"/>
+            <a:off x="3383280" y="1783079"/>
+            <a:ext cx="502920" cy="182879"/>
           </a:xfrm>
           <a:prstGeom prst="rect">
             <a:avLst/>
@@ -5046,7 +5046,7 @@
           <a:p>
             <a:pPr algn="ctr"/>
             <a:r>
-              <a:rPr sz="600" b="0" i="0">
+              <a:rPr sz="550" b="0" i="0">
                 <a:solidFill>
                   <a:srgbClr val="222222"/>
                 </a:solidFill>
@@ -5065,8 +5065,8 @@
         </p:nvSpPr>
         <p:spPr>
           <a:xfrm>
-            <a:off x="640079" y="1947672"/>
-            <a:ext cx="2377440" cy="201167"/>
+            <a:off x="274320" y="1947672"/>
+            <a:ext cx="2011680" cy="201167"/>
           </a:xfrm>
           <a:prstGeom prst="rect">
             <a:avLst/>
@@ -5101,8 +5101,8 @@
         </p:nvSpPr>
         <p:spPr>
           <a:xfrm>
-            <a:off x="3108960" y="1965960"/>
-            <a:ext cx="731520" cy="182879"/>
+            <a:off x="2377440" y="1965960"/>
+            <a:ext cx="502920" cy="182879"/>
           </a:xfrm>
           <a:prstGeom prst="rect">
             <a:avLst/>
@@ -5147,8 +5147,8 @@
         </p:nvSpPr>
         <p:spPr>
           <a:xfrm>
-            <a:off x="3108960" y="1965960"/>
-            <a:ext cx="731520" cy="182879"/>
+            <a:off x="2377440" y="1965960"/>
+            <a:ext cx="502920" cy="182879"/>
           </a:xfrm>
           <a:prstGeom prst="rect">
             <a:avLst/>
@@ -5164,13 +5164,13 @@
           <a:p>
             <a:pPr algn="ctr"/>
             <a:r>
-              <a:rPr sz="600" b="0" i="0">
+              <a:rPr sz="550" b="0" i="0">
                 <a:solidFill>
                   <a:srgbClr val="222222"/>
                 </a:solidFill>
                 <a:latin typeface="Arial"/>
               </a:rPr>
-              <a:t>+0.75 ·</a:t>
+              <a:t>+0.75·</a:t>
             </a:r>
           </a:p>
         </p:txBody>
@@ -5183,8 +5183,8 @@
         </p:nvSpPr>
         <p:spPr>
           <a:xfrm>
-            <a:off x="3840480" y="1965960"/>
-            <a:ext cx="731520" cy="182879"/>
+            <a:off x="2880360" y="1965960"/>
+            <a:ext cx="502920" cy="182879"/>
           </a:xfrm>
           <a:prstGeom prst="rect">
             <a:avLst/>
@@ -5229,8 +5229,8 @@
         </p:nvSpPr>
         <p:spPr>
           <a:xfrm>
-            <a:off x="3840480" y="1965960"/>
-            <a:ext cx="731520" cy="182879"/>
+            <a:off x="2880360" y="1965960"/>
+            <a:ext cx="502920" cy="182879"/>
           </a:xfrm>
           <a:prstGeom prst="rect">
             <a:avLst/>
@@ -5246,7 +5246,7 @@
           <a:p>
             <a:pPr algn="ctr"/>
             <a:r>
-              <a:rPr sz="600" b="0" i="0">
+              <a:rPr sz="550" b="0" i="0">
                 <a:solidFill>
                   <a:srgbClr val="222222"/>
                 </a:solidFill>
@@ -5265,8 +5265,8 @@
         </p:nvSpPr>
         <p:spPr>
           <a:xfrm>
-            <a:off x="4572000" y="1965960"/>
-            <a:ext cx="731520" cy="182879"/>
+            <a:off x="3383280" y="1965960"/>
+            <a:ext cx="502920" cy="182879"/>
           </a:xfrm>
           <a:prstGeom prst="rect">
             <a:avLst/>
@@ -5311,8 +5311,8 @@
         </p:nvSpPr>
         <p:spPr>
           <a:xfrm>
-            <a:off x="4572000" y="1965960"/>
-            <a:ext cx="731520" cy="182879"/>
+            <a:off x="3383280" y="1965960"/>
+            <a:ext cx="502920" cy="182879"/>
           </a:xfrm>
           <a:prstGeom prst="rect">
             <a:avLst/>
@@ -5328,7 +5328,7 @@
           <a:p>
             <a:pPr algn="ctr"/>
             <a:r>
-              <a:rPr sz="600" b="0" i="0">
+              <a:rPr sz="550" b="0" i="0">
                 <a:solidFill>
                   <a:srgbClr val="222222"/>
                 </a:solidFill>
@@ -5347,8 +5347,8 @@
         </p:nvSpPr>
         <p:spPr>
           <a:xfrm>
-            <a:off x="640079" y="2130551"/>
-            <a:ext cx="2377440" cy="201167"/>
+            <a:off x="274320" y="2130551"/>
+            <a:ext cx="2011680" cy="201167"/>
           </a:xfrm>
           <a:prstGeom prst="rect">
             <a:avLst/>
@@ -5383,8 +5383,8 @@
         </p:nvSpPr>
         <p:spPr>
           <a:xfrm>
-            <a:off x="3108960" y="2148839"/>
-            <a:ext cx="731520" cy="182879"/>
+            <a:off x="2377440" y="2148839"/>
+            <a:ext cx="502920" cy="182879"/>
           </a:xfrm>
           <a:prstGeom prst="rect">
             <a:avLst/>
@@ -5429,8 +5429,8 @@
         </p:nvSpPr>
         <p:spPr>
           <a:xfrm>
-            <a:off x="3108960" y="2148839"/>
-            <a:ext cx="731520" cy="182879"/>
+            <a:off x="2377440" y="2148839"/>
+            <a:ext cx="502920" cy="182879"/>
           </a:xfrm>
           <a:prstGeom prst="rect">
             <a:avLst/>
@@ -5446,13 +5446,13 @@
           <a:p>
             <a:pPr algn="ctr"/>
             <a:r>
-              <a:rPr sz="600" b="0" i="0">
+              <a:rPr sz="550" b="0" i="0">
                 <a:solidFill>
                   <a:srgbClr val="222222"/>
                 </a:solidFill>
                 <a:latin typeface="Arial"/>
               </a:rPr>
-              <a:t>+0.87 ·</a:t>
+              <a:t>+0.87·</a:t>
             </a:r>
           </a:p>
         </p:txBody>
@@ -5465,8 +5465,8 @@
         </p:nvSpPr>
         <p:spPr>
           <a:xfrm>
-            <a:off x="3840480" y="2148839"/>
-            <a:ext cx="731520" cy="182879"/>
+            <a:off x="2880360" y="2148839"/>
+            <a:ext cx="502920" cy="182879"/>
           </a:xfrm>
           <a:prstGeom prst="rect">
             <a:avLst/>
@@ -5511,8 +5511,8 @@
         </p:nvSpPr>
         <p:spPr>
           <a:xfrm>
-            <a:off x="3840480" y="2148839"/>
-            <a:ext cx="731520" cy="182879"/>
+            <a:off x="2880360" y="2148839"/>
+            <a:ext cx="502920" cy="182879"/>
           </a:xfrm>
           <a:prstGeom prst="rect">
             <a:avLst/>
@@ -5528,13 +5528,13 @@
           <a:p>
             <a:pPr algn="ctr"/>
             <a:r>
-              <a:rPr sz="600" b="0" i="0">
+              <a:rPr sz="550" b="0" i="0">
                 <a:solidFill>
                   <a:srgbClr val="FFFFFF"/>
                 </a:solidFill>
                 <a:latin typeface="Arial"/>
               </a:rPr>
-              <a:t>+1.13 ★</a:t>
+              <a:t>+1.13★</a:t>
             </a:r>
           </a:p>
         </p:txBody>
@@ -5547,8 +5547,8 @@
         </p:nvSpPr>
         <p:spPr>
           <a:xfrm>
-            <a:off x="4572000" y="2148839"/>
-            <a:ext cx="731520" cy="182879"/>
+            <a:off x="3383280" y="2148839"/>
+            <a:ext cx="502920" cy="182879"/>
           </a:xfrm>
           <a:prstGeom prst="rect">
             <a:avLst/>
@@ -5593,8 +5593,8 @@
         </p:nvSpPr>
         <p:spPr>
           <a:xfrm>
-            <a:off x="4572000" y="2148839"/>
-            <a:ext cx="731520" cy="182879"/>
+            <a:off x="3383280" y="2148839"/>
+            <a:ext cx="502920" cy="182879"/>
           </a:xfrm>
           <a:prstGeom prst="rect">
             <a:avLst/>
@@ -5610,7 +5610,7 @@
           <a:p>
             <a:pPr algn="ctr"/>
             <a:r>
-              <a:rPr sz="600" b="0" i="0">
+              <a:rPr sz="550" b="0" i="0">
                 <a:solidFill>
                   <a:srgbClr val="222222"/>
                 </a:solidFill>
@@ -5629,8 +5629,8 @@
         </p:nvSpPr>
         <p:spPr>
           <a:xfrm>
-            <a:off x="640079" y="2313432"/>
-            <a:ext cx="2377440" cy="201167"/>
+            <a:off x="274320" y="2313432"/>
+            <a:ext cx="2011680" cy="201167"/>
           </a:xfrm>
           <a:prstGeom prst="rect">
             <a:avLst/>
@@ -5665,8 +5665,8 @@
         </p:nvSpPr>
         <p:spPr>
           <a:xfrm>
-            <a:off x="3108960" y="2331720"/>
-            <a:ext cx="731520" cy="182879"/>
+            <a:off x="2377440" y="2331720"/>
+            <a:ext cx="502920" cy="182879"/>
           </a:xfrm>
           <a:prstGeom prst="rect">
             <a:avLst/>
@@ -5711,8 +5711,8 @@
         </p:nvSpPr>
         <p:spPr>
           <a:xfrm>
-            <a:off x="3108960" y="2331720"/>
-            <a:ext cx="731520" cy="182879"/>
+            <a:off x="2377440" y="2331720"/>
+            <a:ext cx="502920" cy="182879"/>
           </a:xfrm>
           <a:prstGeom prst="rect">
             <a:avLst/>
@@ -5728,13 +5728,13 @@
           <a:p>
             <a:pPr algn="ctr"/>
             <a:r>
-              <a:rPr sz="600" b="0" i="0">
+              <a:rPr sz="550" b="0" i="0">
                 <a:solidFill>
                   <a:srgbClr val="222222"/>
                 </a:solidFill>
                 <a:latin typeface="Arial"/>
               </a:rPr>
-              <a:t>+0.87 ·</a:t>
+              <a:t>+0.87·</a:t>
             </a:r>
           </a:p>
         </p:txBody>
@@ -5747,8 +5747,8 @@
         </p:nvSpPr>
         <p:spPr>
           <a:xfrm>
-            <a:off x="3840480" y="2331720"/>
-            <a:ext cx="731520" cy="182879"/>
+            <a:off x="2880360" y="2331720"/>
+            <a:ext cx="502920" cy="182879"/>
           </a:xfrm>
           <a:prstGeom prst="rect">
             <a:avLst/>
@@ -5793,8 +5793,8 @@
         </p:nvSpPr>
         <p:spPr>
           <a:xfrm>
-            <a:off x="3840480" y="2331720"/>
-            <a:ext cx="731520" cy="182879"/>
+            <a:off x="2880360" y="2331720"/>
+            <a:ext cx="502920" cy="182879"/>
           </a:xfrm>
           <a:prstGeom prst="rect">
             <a:avLst/>
@@ -5810,13 +5810,13 @@
           <a:p>
             <a:pPr algn="ctr"/>
             <a:r>
-              <a:rPr sz="600" b="0" i="0">
+              <a:rPr sz="550" b="0" i="0">
                 <a:solidFill>
                   <a:srgbClr val="FFFFFF"/>
                 </a:solidFill>
                 <a:latin typeface="Arial"/>
               </a:rPr>
-              <a:t>+1.13 ★</a:t>
+              <a:t>+1.13★</a:t>
             </a:r>
           </a:p>
         </p:txBody>
@@ -5829,8 +5829,8 @@
         </p:nvSpPr>
         <p:spPr>
           <a:xfrm>
-            <a:off x="4572000" y="2331720"/>
-            <a:ext cx="731520" cy="182879"/>
+            <a:off x="3383280" y="2331720"/>
+            <a:ext cx="502920" cy="182879"/>
           </a:xfrm>
           <a:prstGeom prst="rect">
             <a:avLst/>
@@ -5875,8 +5875,8 @@
         </p:nvSpPr>
         <p:spPr>
           <a:xfrm>
-            <a:off x="4572000" y="2331720"/>
-            <a:ext cx="731520" cy="182879"/>
+            <a:off x="3383280" y="2331720"/>
+            <a:ext cx="502920" cy="182879"/>
           </a:xfrm>
           <a:prstGeom prst="rect">
             <a:avLst/>
@@ -5892,7 +5892,7 @@
           <a:p>
             <a:pPr algn="ctr"/>
             <a:r>
-              <a:rPr sz="600" b="0" i="0">
+              <a:rPr sz="550" b="0" i="0">
                 <a:solidFill>
                   <a:srgbClr val="222222"/>
                 </a:solidFill>
@@ -5911,8 +5911,8 @@
         </p:nvSpPr>
         <p:spPr>
           <a:xfrm>
-            <a:off x="640079" y="2496312"/>
-            <a:ext cx="2377440" cy="201167"/>
+            <a:off x="274320" y="2496312"/>
+            <a:ext cx="2011680" cy="201167"/>
           </a:xfrm>
           <a:prstGeom prst="rect">
             <a:avLst/>
@@ -5947,8 +5947,8 @@
         </p:nvSpPr>
         <p:spPr>
           <a:xfrm>
-            <a:off x="3108960" y="2514600"/>
-            <a:ext cx="731520" cy="182879"/>
+            <a:off x="2377440" y="2514600"/>
+            <a:ext cx="502920" cy="182879"/>
           </a:xfrm>
           <a:prstGeom prst="rect">
             <a:avLst/>
@@ -5993,8 +5993,8 @@
         </p:nvSpPr>
         <p:spPr>
           <a:xfrm>
-            <a:off x="3108960" y="2514600"/>
-            <a:ext cx="731520" cy="182879"/>
+            <a:off x="2377440" y="2514600"/>
+            <a:ext cx="502920" cy="182879"/>
           </a:xfrm>
           <a:prstGeom prst="rect">
             <a:avLst/>
@@ -6010,13 +6010,13 @@
           <a:p>
             <a:pPr algn="ctr"/>
             <a:r>
-              <a:rPr sz="600" b="0" i="0">
+              <a:rPr sz="550" b="0" i="0">
                 <a:solidFill>
                   <a:srgbClr val="222222"/>
                 </a:solidFill>
                 <a:latin typeface="Arial"/>
               </a:rPr>
-              <a:t>+0.70 ·</a:t>
+              <a:t>+0.70·</a:t>
             </a:r>
           </a:p>
         </p:txBody>
@@ -6029,8 +6029,8 @@
         </p:nvSpPr>
         <p:spPr>
           <a:xfrm>
-            <a:off x="3840480" y="2514600"/>
-            <a:ext cx="731520" cy="182879"/>
+            <a:off x="2880360" y="2514600"/>
+            <a:ext cx="502920" cy="182879"/>
           </a:xfrm>
           <a:prstGeom prst="rect">
             <a:avLst/>
@@ -6075,8 +6075,8 @@
         </p:nvSpPr>
         <p:spPr>
           <a:xfrm>
-            <a:off x="3840480" y="2514600"/>
-            <a:ext cx="731520" cy="182879"/>
+            <a:off x="2880360" y="2514600"/>
+            <a:ext cx="502920" cy="182879"/>
           </a:xfrm>
           <a:prstGeom prst="rect">
             <a:avLst/>
@@ -6092,7 +6092,7 @@
           <a:p>
             <a:pPr algn="ctr"/>
             <a:r>
-              <a:rPr sz="600" b="0" i="0">
+              <a:rPr sz="550" b="0" i="0">
                 <a:solidFill>
                   <a:srgbClr val="222222"/>
                 </a:solidFill>
@@ -6111,8 +6111,8 @@
         </p:nvSpPr>
         <p:spPr>
           <a:xfrm>
-            <a:off x="4572000" y="2514600"/>
-            <a:ext cx="731520" cy="182879"/>
+            <a:off x="3383280" y="2514600"/>
+            <a:ext cx="502920" cy="182879"/>
           </a:xfrm>
           <a:prstGeom prst="rect">
             <a:avLst/>
@@ -6157,8 +6157,8 @@
         </p:nvSpPr>
         <p:spPr>
           <a:xfrm>
-            <a:off x="4572000" y="2514600"/>
-            <a:ext cx="731520" cy="182879"/>
+            <a:off x="3383280" y="2514600"/>
+            <a:ext cx="502920" cy="182879"/>
           </a:xfrm>
           <a:prstGeom prst="rect">
             <a:avLst/>
@@ -6174,7 +6174,7 @@
           <a:p>
             <a:pPr algn="ctr"/>
             <a:r>
-              <a:rPr sz="600" b="0" i="0">
+              <a:rPr sz="550" b="0" i="0">
                 <a:solidFill>
                   <a:srgbClr val="222222"/>
                 </a:solidFill>
@@ -6193,8 +6193,8 @@
         </p:nvSpPr>
         <p:spPr>
           <a:xfrm>
-            <a:off x="640079" y="2679191"/>
-            <a:ext cx="2377440" cy="201167"/>
+            <a:off x="274320" y="2679191"/>
+            <a:ext cx="2011680" cy="201167"/>
           </a:xfrm>
           <a:prstGeom prst="rect">
             <a:avLst/>
@@ -6229,8 +6229,8 @@
         </p:nvSpPr>
         <p:spPr>
           <a:xfrm>
-            <a:off x="3108960" y="2697479"/>
-            <a:ext cx="731520" cy="182879"/>
+            <a:off x="2377440" y="2697479"/>
+            <a:ext cx="502920" cy="182879"/>
           </a:xfrm>
           <a:prstGeom prst="rect">
             <a:avLst/>
@@ -6275,8 +6275,8 @@
         </p:nvSpPr>
         <p:spPr>
           <a:xfrm>
-            <a:off x="3108960" y="2697479"/>
-            <a:ext cx="731520" cy="182879"/>
+            <a:off x="2377440" y="2697479"/>
+            <a:ext cx="502920" cy="182879"/>
           </a:xfrm>
           <a:prstGeom prst="rect">
             <a:avLst/>
@@ -6292,13 +6292,13 @@
           <a:p>
             <a:pPr algn="ctr"/>
             <a:r>
-              <a:rPr sz="600" b="0" i="0">
+              <a:rPr sz="550" b="0" i="0">
                 <a:solidFill>
                   <a:srgbClr val="222222"/>
                 </a:solidFill>
                 <a:latin typeface="Arial"/>
               </a:rPr>
-              <a:t>+0.61 ·</a:t>
+              <a:t>+0.61·</a:t>
             </a:r>
           </a:p>
         </p:txBody>
@@ -6311,8 +6311,8 @@
         </p:nvSpPr>
         <p:spPr>
           <a:xfrm>
-            <a:off x="3840480" y="2697479"/>
-            <a:ext cx="731520" cy="182879"/>
+            <a:off x="2880360" y="2697479"/>
+            <a:ext cx="502920" cy="182879"/>
           </a:xfrm>
           <a:prstGeom prst="rect">
             <a:avLst/>
@@ -6357,8 +6357,8 @@
         </p:nvSpPr>
         <p:spPr>
           <a:xfrm>
-            <a:off x="3840480" y="2697479"/>
-            <a:ext cx="731520" cy="182879"/>
+            <a:off x="2880360" y="2697479"/>
+            <a:ext cx="502920" cy="182879"/>
           </a:xfrm>
           <a:prstGeom prst="rect">
             <a:avLst/>
@@ -6374,13 +6374,13 @@
           <a:p>
             <a:pPr algn="ctr"/>
             <a:r>
-              <a:rPr sz="600" b="0" i="0">
+              <a:rPr sz="550" b="0" i="0">
                 <a:solidFill>
                   <a:srgbClr val="FFFFFF"/>
                 </a:solidFill>
                 <a:latin typeface="Arial"/>
               </a:rPr>
-              <a:t>+0.98 ·</a:t>
+              <a:t>+0.98·</a:t>
             </a:r>
           </a:p>
         </p:txBody>
@@ -6393,8 +6393,8 @@
         </p:nvSpPr>
         <p:spPr>
           <a:xfrm>
-            <a:off x="4572000" y="2697479"/>
-            <a:ext cx="731520" cy="182879"/>
+            <a:off x="3383280" y="2697479"/>
+            <a:ext cx="502920" cy="182879"/>
           </a:xfrm>
           <a:prstGeom prst="rect">
             <a:avLst/>
@@ -6439,8 +6439,8 @@
         </p:nvSpPr>
         <p:spPr>
           <a:xfrm>
-            <a:off x="4572000" y="2697479"/>
-            <a:ext cx="731520" cy="182879"/>
+            <a:off x="3383280" y="2697479"/>
+            <a:ext cx="502920" cy="182879"/>
           </a:xfrm>
           <a:prstGeom prst="rect">
             <a:avLst/>
@@ -6456,7 +6456,7 @@
           <a:p>
             <a:pPr algn="ctr"/>
             <a:r>
-              <a:rPr sz="600" b="0" i="0">
+              <a:rPr sz="550" b="0" i="0">
                 <a:solidFill>
                   <a:srgbClr val="222222"/>
                 </a:solidFill>
@@ -6475,8 +6475,8 @@
         </p:nvSpPr>
         <p:spPr>
           <a:xfrm>
-            <a:off x="640079" y="2862071"/>
-            <a:ext cx="2377440" cy="201167"/>
+            <a:off x="274320" y="2862071"/>
+            <a:ext cx="2011680" cy="201167"/>
           </a:xfrm>
           <a:prstGeom prst="rect">
             <a:avLst/>
@@ -6511,8 +6511,8 @@
         </p:nvSpPr>
         <p:spPr>
           <a:xfrm>
-            <a:off x="3108960" y="2880359"/>
-            <a:ext cx="731520" cy="182879"/>
+            <a:off x="2377440" y="2880359"/>
+            <a:ext cx="502920" cy="182879"/>
           </a:xfrm>
           <a:prstGeom prst="rect">
             <a:avLst/>
@@ -6557,8 +6557,8 @@
         </p:nvSpPr>
         <p:spPr>
           <a:xfrm>
-            <a:off x="3108960" y="2880359"/>
-            <a:ext cx="731520" cy="182879"/>
+            <a:off x="2377440" y="2880359"/>
+            <a:ext cx="502920" cy="182879"/>
           </a:xfrm>
           <a:prstGeom prst="rect">
             <a:avLst/>
@@ -6574,7 +6574,7 @@
           <a:p>
             <a:pPr algn="ctr"/>
             <a:r>
-              <a:rPr sz="600" b="0" i="0">
+              <a:rPr sz="550" b="0" i="0">
                 <a:solidFill>
                   <a:srgbClr val="222222"/>
                 </a:solidFill>
@@ -6593,8 +6593,8 @@
         </p:nvSpPr>
         <p:spPr>
           <a:xfrm>
-            <a:off x="3840480" y="2880359"/>
-            <a:ext cx="731520" cy="182879"/>
+            <a:off x="2880360" y="2880359"/>
+            <a:ext cx="502920" cy="182879"/>
           </a:xfrm>
           <a:prstGeom prst="rect">
             <a:avLst/>
@@ -6639,8 +6639,8 @@
         </p:nvSpPr>
         <p:spPr>
           <a:xfrm>
-            <a:off x="3840480" y="2880359"/>
-            <a:ext cx="731520" cy="182879"/>
+            <a:off x="2880360" y="2880359"/>
+            <a:ext cx="502920" cy="182879"/>
           </a:xfrm>
           <a:prstGeom prst="rect">
             <a:avLst/>
@@ -6656,13 +6656,13 @@
           <a:p>
             <a:pPr algn="ctr"/>
             <a:r>
-              <a:rPr sz="600" b="0" i="0">
+              <a:rPr sz="550" b="0" i="0">
                 <a:solidFill>
                   <a:srgbClr val="222222"/>
                 </a:solidFill>
                 <a:latin typeface="Arial"/>
               </a:rPr>
-              <a:t>+0.90 ·</a:t>
+              <a:t>+0.90·</a:t>
             </a:r>
           </a:p>
         </p:txBody>
@@ -6675,8 +6675,8 @@
         </p:nvSpPr>
         <p:spPr>
           <a:xfrm>
-            <a:off x="4572000" y="2880359"/>
-            <a:ext cx="731520" cy="182879"/>
+            <a:off x="3383280" y="2880359"/>
+            <a:ext cx="502920" cy="182879"/>
           </a:xfrm>
           <a:prstGeom prst="rect">
             <a:avLst/>
@@ -6721,8 +6721,8 @@
         </p:nvSpPr>
         <p:spPr>
           <a:xfrm>
-            <a:off x="4572000" y="2880359"/>
-            <a:ext cx="731520" cy="182879"/>
+            <a:off x="3383280" y="2880359"/>
+            <a:ext cx="502920" cy="182879"/>
           </a:xfrm>
           <a:prstGeom prst="rect">
             <a:avLst/>
@@ -6738,7 +6738,7 @@
           <a:p>
             <a:pPr algn="ctr"/>
             <a:r>
-              <a:rPr sz="600" b="0" i="0">
+              <a:rPr sz="550" b="0" i="0">
                 <a:solidFill>
                   <a:srgbClr val="222222"/>
                 </a:solidFill>
@@ -6757,8 +6757,8 @@
         </p:nvSpPr>
         <p:spPr>
           <a:xfrm>
-            <a:off x="640079" y="3044951"/>
-            <a:ext cx="2377440" cy="201167"/>
+            <a:off x="274320" y="3044951"/>
+            <a:ext cx="2011680" cy="201167"/>
           </a:xfrm>
           <a:prstGeom prst="rect">
             <a:avLst/>
@@ -6793,8 +6793,8 @@
         </p:nvSpPr>
         <p:spPr>
           <a:xfrm>
-            <a:off x="3108960" y="3063239"/>
-            <a:ext cx="731520" cy="182879"/>
+            <a:off x="2377440" y="3063239"/>
+            <a:ext cx="502920" cy="182879"/>
           </a:xfrm>
           <a:prstGeom prst="rect">
             <a:avLst/>
@@ -6839,8 +6839,8 @@
         </p:nvSpPr>
         <p:spPr>
           <a:xfrm>
-            <a:off x="3108960" y="3063239"/>
-            <a:ext cx="731520" cy="182879"/>
+            <a:off x="2377440" y="3063239"/>
+            <a:ext cx="502920" cy="182879"/>
           </a:xfrm>
           <a:prstGeom prst="rect">
             <a:avLst/>
@@ -6856,7 +6856,7 @@
           <a:p>
             <a:pPr algn="ctr"/>
             <a:r>
-              <a:rPr sz="600" b="0" i="0">
+              <a:rPr sz="550" b="0" i="0">
                 <a:solidFill>
                   <a:srgbClr val="222222"/>
                 </a:solidFill>
@@ -6875,8 +6875,8 @@
         </p:nvSpPr>
         <p:spPr>
           <a:xfrm>
-            <a:off x="3840480" y="3063239"/>
-            <a:ext cx="731520" cy="182879"/>
+            <a:off x="2880360" y="3063239"/>
+            <a:ext cx="502920" cy="182879"/>
           </a:xfrm>
           <a:prstGeom prst="rect">
             <a:avLst/>
@@ -6921,8 +6921,8 @@
         </p:nvSpPr>
         <p:spPr>
           <a:xfrm>
-            <a:off x="3840480" y="3063239"/>
-            <a:ext cx="731520" cy="182879"/>
+            <a:off x="2880360" y="3063239"/>
+            <a:ext cx="502920" cy="182879"/>
           </a:xfrm>
           <a:prstGeom prst="rect">
             <a:avLst/>
@@ -6938,7 +6938,7 @@
           <a:p>
             <a:pPr algn="ctr"/>
             <a:r>
-              <a:rPr sz="600" b="0" i="0">
+              <a:rPr sz="550" b="0" i="0">
                 <a:solidFill>
                   <a:srgbClr val="222222"/>
                 </a:solidFill>
@@ -6957,8 +6957,8 @@
         </p:nvSpPr>
         <p:spPr>
           <a:xfrm>
-            <a:off x="4572000" y="3063239"/>
-            <a:ext cx="731520" cy="182879"/>
+            <a:off x="3383280" y="3063239"/>
+            <a:ext cx="502920" cy="182879"/>
           </a:xfrm>
           <a:prstGeom prst="rect">
             <a:avLst/>
@@ -7003,8 +7003,8 @@
         </p:nvSpPr>
         <p:spPr>
           <a:xfrm>
-            <a:off x="4572000" y="3063239"/>
-            <a:ext cx="731520" cy="182879"/>
+            <a:off x="3383280" y="3063239"/>
+            <a:ext cx="502920" cy="182879"/>
           </a:xfrm>
           <a:prstGeom prst="rect">
             <a:avLst/>
@@ -7020,7 +7020,7 @@
           <a:p>
             <a:pPr algn="ctr"/>
             <a:r>
-              <a:rPr sz="600" b="0" i="0">
+              <a:rPr sz="550" b="0" i="0">
                 <a:solidFill>
                   <a:srgbClr val="222222"/>
                 </a:solidFill>
@@ -7039,8 +7039,8 @@
         </p:nvSpPr>
         <p:spPr>
           <a:xfrm>
-            <a:off x="640079" y="3227832"/>
-            <a:ext cx="2377440" cy="201167"/>
+            <a:off x="274320" y="3227832"/>
+            <a:ext cx="2011680" cy="201167"/>
           </a:xfrm>
           <a:prstGeom prst="rect">
             <a:avLst/>
@@ -7075,8 +7075,8 @@
         </p:nvSpPr>
         <p:spPr>
           <a:xfrm>
-            <a:off x="3108960" y="3246120"/>
-            <a:ext cx="731520" cy="182879"/>
+            <a:off x="2377440" y="3246120"/>
+            <a:ext cx="502920" cy="182879"/>
           </a:xfrm>
           <a:prstGeom prst="rect">
             <a:avLst/>
@@ -7121,8 +7121,8 @@
         </p:nvSpPr>
         <p:spPr>
           <a:xfrm>
-            <a:off x="3108960" y="3246120"/>
-            <a:ext cx="731520" cy="182879"/>
+            <a:off x="2377440" y="3246120"/>
+            <a:ext cx="502920" cy="182879"/>
           </a:xfrm>
           <a:prstGeom prst="rect">
             <a:avLst/>
@@ -7138,7 +7138,7 @@
           <a:p>
             <a:pPr algn="ctr"/>
             <a:r>
-              <a:rPr sz="600" b="0" i="0">
+              <a:rPr sz="550" b="0" i="0">
                 <a:solidFill>
                   <a:srgbClr val="FFFFFF"/>
                 </a:solidFill>
@@ -7157,8 +7157,8 @@
         </p:nvSpPr>
         <p:spPr>
           <a:xfrm>
-            <a:off x="3840480" y="3246120"/>
-            <a:ext cx="731520" cy="182879"/>
+            <a:off x="2880360" y="3246120"/>
+            <a:ext cx="502920" cy="182879"/>
           </a:xfrm>
           <a:prstGeom prst="rect">
             <a:avLst/>
@@ -7203,8 +7203,8 @@
         </p:nvSpPr>
         <p:spPr>
           <a:xfrm>
-            <a:off x="3840480" y="3246120"/>
-            <a:ext cx="731520" cy="182879"/>
+            <a:off x="2880360" y="3246120"/>
+            <a:ext cx="502920" cy="182879"/>
           </a:xfrm>
           <a:prstGeom prst="rect">
             <a:avLst/>
@@ -7220,7 +7220,7 @@
           <a:p>
             <a:pPr algn="ctr"/>
             <a:r>
-              <a:rPr sz="600" b="0" i="0">
+              <a:rPr sz="550" b="0" i="0">
                 <a:solidFill>
                   <a:srgbClr val="FFFFFF"/>
                 </a:solidFill>
@@ -7239,8 +7239,8 @@
         </p:nvSpPr>
         <p:spPr>
           <a:xfrm>
-            <a:off x="4572000" y="3246120"/>
-            <a:ext cx="731520" cy="182879"/>
+            <a:off x="3383280" y="3246120"/>
+            <a:ext cx="502920" cy="182879"/>
           </a:xfrm>
           <a:prstGeom prst="rect">
             <a:avLst/>
@@ -7285,8 +7285,8 @@
         </p:nvSpPr>
         <p:spPr>
           <a:xfrm>
-            <a:off x="4572000" y="3246120"/>
-            <a:ext cx="731520" cy="182879"/>
+            <a:off x="3383280" y="3246120"/>
+            <a:ext cx="502920" cy="182879"/>
           </a:xfrm>
           <a:prstGeom prst="rect">
             <a:avLst/>
@@ -7302,7 +7302,7 @@
           <a:p>
             <a:pPr algn="ctr"/>
             <a:r>
-              <a:rPr sz="600" b="0" i="0">
+              <a:rPr sz="550" b="0" i="0">
                 <a:solidFill>
                   <a:srgbClr val="222222"/>
                 </a:solidFill>
@@ -7321,8 +7321,8 @@
         </p:nvSpPr>
         <p:spPr>
           <a:xfrm>
-            <a:off x="640079" y="3410712"/>
-            <a:ext cx="2377440" cy="201167"/>
+            <a:off x="274320" y="3410712"/>
+            <a:ext cx="2011680" cy="201167"/>
           </a:xfrm>
           <a:prstGeom prst="rect">
             <a:avLst/>
@@ -7357,8 +7357,8 @@
         </p:nvSpPr>
         <p:spPr>
           <a:xfrm>
-            <a:off x="3108960" y="3429000"/>
-            <a:ext cx="731520" cy="182879"/>
+            <a:off x="2377440" y="3429000"/>
+            <a:ext cx="502920" cy="182879"/>
           </a:xfrm>
           <a:prstGeom prst="rect">
             <a:avLst/>
@@ -7403,8 +7403,8 @@
         </p:nvSpPr>
         <p:spPr>
           <a:xfrm>
-            <a:off x="3108960" y="3429000"/>
-            <a:ext cx="731520" cy="182879"/>
+            <a:off x="2377440" y="3429000"/>
+            <a:ext cx="502920" cy="182879"/>
           </a:xfrm>
           <a:prstGeom prst="rect">
             <a:avLst/>
@@ -7420,7 +7420,7 @@
           <a:p>
             <a:pPr algn="ctr"/>
             <a:r>
-              <a:rPr sz="600" b="0" i="0">
+              <a:rPr sz="550" b="0" i="0">
                 <a:solidFill>
                   <a:srgbClr val="222222"/>
                 </a:solidFill>
@@ -7439,8 +7439,8 @@
         </p:nvSpPr>
         <p:spPr>
           <a:xfrm>
-            <a:off x="3840480" y="3429000"/>
-            <a:ext cx="731520" cy="182879"/>
+            <a:off x="2880360" y="3429000"/>
+            <a:ext cx="502920" cy="182879"/>
           </a:xfrm>
           <a:prstGeom prst="rect">
             <a:avLst/>
@@ -7485,8 +7485,8 @@
         </p:nvSpPr>
         <p:spPr>
           <a:xfrm>
-            <a:off x="3840480" y="3429000"/>
-            <a:ext cx="731520" cy="182879"/>
+            <a:off x="2880360" y="3429000"/>
+            <a:ext cx="502920" cy="182879"/>
           </a:xfrm>
           <a:prstGeom prst="rect">
             <a:avLst/>
@@ -7502,7 +7502,7 @@
           <a:p>
             <a:pPr algn="ctr"/>
             <a:r>
-              <a:rPr sz="600" b="0" i="0">
+              <a:rPr sz="550" b="0" i="0">
                 <a:solidFill>
                   <a:srgbClr val="222222"/>
                 </a:solidFill>
@@ -7521,8 +7521,8 @@
         </p:nvSpPr>
         <p:spPr>
           <a:xfrm>
-            <a:off x="4572000" y="3429000"/>
-            <a:ext cx="731520" cy="182879"/>
+            <a:off x="3383280" y="3429000"/>
+            <a:ext cx="502920" cy="182879"/>
           </a:xfrm>
           <a:prstGeom prst="rect">
             <a:avLst/>
@@ -7567,8 +7567,8 @@
         </p:nvSpPr>
         <p:spPr>
           <a:xfrm>
-            <a:off x="4572000" y="3429000"/>
-            <a:ext cx="731520" cy="182879"/>
+            <a:off x="3383280" y="3429000"/>
+            <a:ext cx="502920" cy="182879"/>
           </a:xfrm>
           <a:prstGeom prst="rect">
             <a:avLst/>
@@ -7584,7 +7584,7 @@
           <a:p>
             <a:pPr algn="ctr"/>
             <a:r>
-              <a:rPr sz="600" b="0" i="0">
+              <a:rPr sz="550" b="0" i="0">
                 <a:solidFill>
                   <a:srgbClr val="222222"/>
                 </a:solidFill>
@@ -7603,8 +7603,8 @@
         </p:nvSpPr>
         <p:spPr>
           <a:xfrm>
-            <a:off x="640079" y="3593591"/>
-            <a:ext cx="2377440" cy="201167"/>
+            <a:off x="274320" y="3593591"/>
+            <a:ext cx="2011680" cy="201167"/>
           </a:xfrm>
           <a:prstGeom prst="rect">
             <a:avLst/>
@@ -7639,8 +7639,8 @@
         </p:nvSpPr>
         <p:spPr>
           <a:xfrm>
-            <a:off x="3108960" y="3611879"/>
-            <a:ext cx="731520" cy="182879"/>
+            <a:off x="2377440" y="3611879"/>
+            <a:ext cx="502920" cy="182879"/>
           </a:xfrm>
           <a:prstGeom prst="rect">
             <a:avLst/>
@@ -7685,8 +7685,8 @@
         </p:nvSpPr>
         <p:spPr>
           <a:xfrm>
-            <a:off x="3108960" y="3611879"/>
-            <a:ext cx="731520" cy="182879"/>
+            <a:off x="2377440" y="3611879"/>
+            <a:ext cx="502920" cy="182879"/>
           </a:xfrm>
           <a:prstGeom prst="rect">
             <a:avLst/>
@@ -7702,7 +7702,7 @@
           <a:p>
             <a:pPr algn="ctr"/>
             <a:r>
-              <a:rPr sz="600" b="0" i="0">
+              <a:rPr sz="550" b="0" i="0">
                 <a:solidFill>
                   <a:srgbClr val="222222"/>
                 </a:solidFill>
@@ -7721,8 +7721,8 @@
         </p:nvSpPr>
         <p:spPr>
           <a:xfrm>
-            <a:off x="3840480" y="3611879"/>
-            <a:ext cx="731520" cy="182879"/>
+            <a:off x="2880360" y="3611879"/>
+            <a:ext cx="502920" cy="182879"/>
           </a:xfrm>
           <a:prstGeom prst="rect">
             <a:avLst/>
@@ -7767,8 +7767,8 @@
         </p:nvSpPr>
         <p:spPr>
           <a:xfrm>
-            <a:off x="3840480" y="3611879"/>
-            <a:ext cx="731520" cy="182879"/>
+            <a:off x="2880360" y="3611879"/>
+            <a:ext cx="502920" cy="182879"/>
           </a:xfrm>
           <a:prstGeom prst="rect">
             <a:avLst/>
@@ -7784,7 +7784,7 @@
           <a:p>
             <a:pPr algn="ctr"/>
             <a:r>
-              <a:rPr sz="600" b="0" i="0">
+              <a:rPr sz="550" b="0" i="0">
                 <a:solidFill>
                   <a:srgbClr val="222222"/>
                 </a:solidFill>
@@ -7803,8 +7803,8 @@
         </p:nvSpPr>
         <p:spPr>
           <a:xfrm>
-            <a:off x="4572000" y="3611879"/>
-            <a:ext cx="731520" cy="182879"/>
+            <a:off x="3383280" y="3611879"/>
+            <a:ext cx="502920" cy="182879"/>
           </a:xfrm>
           <a:prstGeom prst="rect">
             <a:avLst/>
@@ -7849,8 +7849,8 @@
         </p:nvSpPr>
         <p:spPr>
           <a:xfrm>
-            <a:off x="4572000" y="3611879"/>
-            <a:ext cx="731520" cy="182879"/>
+            <a:off x="3383280" y="3611879"/>
+            <a:ext cx="502920" cy="182879"/>
           </a:xfrm>
           <a:prstGeom prst="rect">
             <a:avLst/>
@@ -7866,7 +7866,7 @@
           <a:p>
             <a:pPr algn="ctr"/>
             <a:r>
-              <a:rPr sz="600" b="0" i="0">
+              <a:rPr sz="550" b="0" i="0">
                 <a:solidFill>
                   <a:srgbClr val="222222"/>
                 </a:solidFill>
@@ -7885,8 +7885,8 @@
         </p:nvSpPr>
         <p:spPr>
           <a:xfrm>
-            <a:off x="640079" y="3776472"/>
-            <a:ext cx="2377440" cy="201167"/>
+            <a:off x="274320" y="3776472"/>
+            <a:ext cx="2011680" cy="201167"/>
           </a:xfrm>
           <a:prstGeom prst="rect">
             <a:avLst/>
@@ -7921,8 +7921,8 @@
         </p:nvSpPr>
         <p:spPr>
           <a:xfrm>
-            <a:off x="3108960" y="3794759"/>
-            <a:ext cx="731520" cy="182879"/>
+            <a:off x="2377440" y="3794759"/>
+            <a:ext cx="502920" cy="182879"/>
           </a:xfrm>
           <a:prstGeom prst="rect">
             <a:avLst/>
@@ -7967,8 +7967,8 @@
         </p:nvSpPr>
         <p:spPr>
           <a:xfrm>
-            <a:off x="3108960" y="3794759"/>
-            <a:ext cx="731520" cy="182879"/>
+            <a:off x="2377440" y="3794759"/>
+            <a:ext cx="502920" cy="182879"/>
           </a:xfrm>
           <a:prstGeom prst="rect">
             <a:avLst/>
@@ -7984,7 +7984,7 @@
           <a:p>
             <a:pPr algn="ctr"/>
             <a:r>
-              <a:rPr sz="600" b="0" i="0">
+              <a:rPr sz="550" b="0" i="0">
                 <a:solidFill>
                   <a:srgbClr val="222222"/>
                 </a:solidFill>
@@ -8003,8 +8003,8 @@
         </p:nvSpPr>
         <p:spPr>
           <a:xfrm>
-            <a:off x="3840480" y="3794759"/>
-            <a:ext cx="731520" cy="182879"/>
+            <a:off x="2880360" y="3794759"/>
+            <a:ext cx="502920" cy="182879"/>
           </a:xfrm>
           <a:prstGeom prst="rect">
             <a:avLst/>
@@ -8049,8 +8049,8 @@
         </p:nvSpPr>
         <p:spPr>
           <a:xfrm>
-            <a:off x="3840480" y="3794759"/>
-            <a:ext cx="731520" cy="182879"/>
+            <a:off x="2880360" y="3794759"/>
+            <a:ext cx="502920" cy="182879"/>
           </a:xfrm>
           <a:prstGeom prst="rect">
             <a:avLst/>
@@ -8066,7 +8066,7 @@
           <a:p>
             <a:pPr algn="ctr"/>
             <a:r>
-              <a:rPr sz="600" b="0" i="0">
+              <a:rPr sz="550" b="0" i="0">
                 <a:solidFill>
                   <a:srgbClr val="222222"/>
                 </a:solidFill>
@@ -8085,8 +8085,8 @@
         </p:nvSpPr>
         <p:spPr>
           <a:xfrm>
-            <a:off x="4572000" y="3794759"/>
-            <a:ext cx="731520" cy="182879"/>
+            <a:off x="3383280" y="3794759"/>
+            <a:ext cx="502920" cy="182879"/>
           </a:xfrm>
           <a:prstGeom prst="rect">
             <a:avLst/>
@@ -8131,8 +8131,8 @@
         </p:nvSpPr>
         <p:spPr>
           <a:xfrm>
-            <a:off x="4572000" y="3794759"/>
-            <a:ext cx="731520" cy="182879"/>
+            <a:off x="3383280" y="3794759"/>
+            <a:ext cx="502920" cy="182879"/>
           </a:xfrm>
           <a:prstGeom prst="rect">
             <a:avLst/>
@@ -8148,7 +8148,7 @@
           <a:p>
             <a:pPr algn="ctr"/>
             <a:r>
-              <a:rPr sz="600" b="0" i="0">
+              <a:rPr sz="550" b="0" i="0">
                 <a:solidFill>
                   <a:srgbClr val="222222"/>
                 </a:solidFill>
@@ -8167,8 +8167,8 @@
         </p:nvSpPr>
         <p:spPr>
           <a:xfrm>
-            <a:off x="640079" y="3959352"/>
-            <a:ext cx="2377440" cy="201167"/>
+            <a:off x="274320" y="3959352"/>
+            <a:ext cx="2011680" cy="201167"/>
           </a:xfrm>
           <a:prstGeom prst="rect">
             <a:avLst/>
@@ -8203,8 +8203,8 @@
         </p:nvSpPr>
         <p:spPr>
           <a:xfrm>
-            <a:off x="3108960" y="3977639"/>
-            <a:ext cx="731520" cy="182879"/>
+            <a:off x="2377440" y="3977639"/>
+            <a:ext cx="502920" cy="182879"/>
           </a:xfrm>
           <a:prstGeom prst="rect">
             <a:avLst/>
@@ -8249,8 +8249,8 @@
         </p:nvSpPr>
         <p:spPr>
           <a:xfrm>
-            <a:off x="3108960" y="3977639"/>
-            <a:ext cx="731520" cy="182879"/>
+            <a:off x="2377440" y="3977639"/>
+            <a:ext cx="502920" cy="182879"/>
           </a:xfrm>
           <a:prstGeom prst="rect">
             <a:avLst/>
@@ -8266,7 +8266,7 @@
           <a:p>
             <a:pPr algn="ctr"/>
             <a:r>
-              <a:rPr sz="600" b="0" i="0">
+              <a:rPr sz="550" b="0" i="0">
                 <a:solidFill>
                   <a:srgbClr val="222222"/>
                 </a:solidFill>
@@ -8285,8 +8285,8 @@
         </p:nvSpPr>
         <p:spPr>
           <a:xfrm>
-            <a:off x="3840480" y="3977639"/>
-            <a:ext cx="731520" cy="182879"/>
+            <a:off x="2880360" y="3977639"/>
+            <a:ext cx="502920" cy="182879"/>
           </a:xfrm>
           <a:prstGeom prst="rect">
             <a:avLst/>
@@ -8331,8 +8331,8 @@
         </p:nvSpPr>
         <p:spPr>
           <a:xfrm>
-            <a:off x="3840480" y="3977639"/>
-            <a:ext cx="731520" cy="182879"/>
+            <a:off x="2880360" y="3977639"/>
+            <a:ext cx="502920" cy="182879"/>
           </a:xfrm>
           <a:prstGeom prst="rect">
             <a:avLst/>
@@ -8348,7 +8348,7 @@
           <a:p>
             <a:pPr algn="ctr"/>
             <a:r>
-              <a:rPr sz="600" b="0" i="0">
+              <a:rPr sz="550" b="0" i="0">
                 <a:solidFill>
                   <a:srgbClr val="222222"/>
                 </a:solidFill>
@@ -8367,8 +8367,8 @@
         </p:nvSpPr>
         <p:spPr>
           <a:xfrm>
-            <a:off x="4572000" y="3977639"/>
-            <a:ext cx="731520" cy="182879"/>
+            <a:off x="3383280" y="3977639"/>
+            <a:ext cx="502920" cy="182879"/>
           </a:xfrm>
           <a:prstGeom prst="rect">
             <a:avLst/>
@@ -8413,8 +8413,8 @@
         </p:nvSpPr>
         <p:spPr>
           <a:xfrm>
-            <a:off x="4572000" y="3977639"/>
-            <a:ext cx="731520" cy="182879"/>
+            <a:off x="3383280" y="3977639"/>
+            <a:ext cx="502920" cy="182879"/>
           </a:xfrm>
           <a:prstGeom prst="rect">
             <a:avLst/>
@@ -8430,7 +8430,7 @@
           <a:p>
             <a:pPr algn="ctr"/>
             <a:r>
-              <a:rPr sz="600" b="0" i="0">
+              <a:rPr sz="550" b="0" i="0">
                 <a:solidFill>
                   <a:srgbClr val="222222"/>
                 </a:solidFill>
@@ -8449,8 +8449,8 @@
         </p:nvSpPr>
         <p:spPr>
           <a:xfrm>
-            <a:off x="640079" y="4142232"/>
-            <a:ext cx="2377440" cy="201167"/>
+            <a:off x="274320" y="4142232"/>
+            <a:ext cx="2011680" cy="201167"/>
           </a:xfrm>
           <a:prstGeom prst="rect">
             <a:avLst/>
@@ -8485,8 +8485,8 @@
         </p:nvSpPr>
         <p:spPr>
           <a:xfrm>
-            <a:off x="3108960" y="4160520"/>
-            <a:ext cx="731520" cy="182879"/>
+            <a:off x="2377440" y="4160520"/>
+            <a:ext cx="502920" cy="182879"/>
           </a:xfrm>
           <a:prstGeom prst="rect">
             <a:avLst/>
@@ -8531,8 +8531,8 @@
         </p:nvSpPr>
         <p:spPr>
           <a:xfrm>
-            <a:off x="3108960" y="4160520"/>
-            <a:ext cx="731520" cy="182879"/>
+            <a:off x="2377440" y="4160520"/>
+            <a:ext cx="502920" cy="182879"/>
           </a:xfrm>
           <a:prstGeom prst="rect">
             <a:avLst/>
@@ -8548,7 +8548,7 @@
           <a:p>
             <a:pPr algn="ctr"/>
             <a:r>
-              <a:rPr sz="600" b="0" i="0">
+              <a:rPr sz="550" b="0" i="0">
                 <a:solidFill>
                   <a:srgbClr val="222222"/>
                 </a:solidFill>
@@ -8567,8 +8567,8 @@
         </p:nvSpPr>
         <p:spPr>
           <a:xfrm>
-            <a:off x="3840480" y="4160520"/>
-            <a:ext cx="731520" cy="182879"/>
+            <a:off x="2880360" y="4160520"/>
+            <a:ext cx="502920" cy="182879"/>
           </a:xfrm>
           <a:prstGeom prst="rect">
             <a:avLst/>
@@ -8613,8 +8613,8 @@
         </p:nvSpPr>
         <p:spPr>
           <a:xfrm>
-            <a:off x="3840480" y="4160520"/>
-            <a:ext cx="731520" cy="182879"/>
+            <a:off x="2880360" y="4160520"/>
+            <a:ext cx="502920" cy="182879"/>
           </a:xfrm>
           <a:prstGeom prst="rect">
             <a:avLst/>
@@ -8630,13 +8630,13 @@
           <a:p>
             <a:pPr algn="ctr"/>
             <a:r>
-              <a:rPr sz="600" b="0" i="0">
+              <a:rPr sz="550" b="0" i="0">
                 <a:solidFill>
                   <a:srgbClr val="FFFFFF"/>
                 </a:solidFill>
                 <a:latin typeface="Arial"/>
               </a:rPr>
-              <a:t>+1.06 ·</a:t>
+              <a:t>+1.06·</a:t>
             </a:r>
           </a:p>
         </p:txBody>
@@ -8649,8 +8649,8 @@
         </p:nvSpPr>
         <p:spPr>
           <a:xfrm>
-            <a:off x="4572000" y="4160520"/>
-            <a:ext cx="731520" cy="182879"/>
+            <a:off x="3383280" y="4160520"/>
+            <a:ext cx="502920" cy="182879"/>
           </a:xfrm>
           <a:prstGeom prst="rect">
             <a:avLst/>
@@ -8695,8 +8695,8 @@
         </p:nvSpPr>
         <p:spPr>
           <a:xfrm>
-            <a:off x="4572000" y="4160520"/>
-            <a:ext cx="731520" cy="182879"/>
+            <a:off x="3383280" y="4160520"/>
+            <a:ext cx="502920" cy="182879"/>
           </a:xfrm>
           <a:prstGeom prst="rect">
             <a:avLst/>
@@ -8712,7 +8712,7 @@
           <a:p>
             <a:pPr algn="ctr"/>
             <a:r>
-              <a:rPr sz="600" b="0" i="0">
+              <a:rPr sz="550" b="0" i="0">
                 <a:solidFill>
                   <a:srgbClr val="222222"/>
                 </a:solidFill>
@@ -8731,8 +8731,8 @@
         </p:nvSpPr>
         <p:spPr>
           <a:xfrm>
-            <a:off x="640079" y="4325112"/>
-            <a:ext cx="2377440" cy="201167"/>
+            <a:off x="274320" y="4325112"/>
+            <a:ext cx="2011680" cy="201167"/>
           </a:xfrm>
           <a:prstGeom prst="rect">
             <a:avLst/>
@@ -8767,8 +8767,8 @@
         </p:nvSpPr>
         <p:spPr>
           <a:xfrm>
-            <a:off x="3108960" y="4343400"/>
-            <a:ext cx="731520" cy="182879"/>
+            <a:off x="2377440" y="4343400"/>
+            <a:ext cx="502920" cy="182879"/>
           </a:xfrm>
           <a:prstGeom prst="rect">
             <a:avLst/>
@@ -8813,8 +8813,8 @@
         </p:nvSpPr>
         <p:spPr>
           <a:xfrm>
-            <a:off x="3108960" y="4343400"/>
-            <a:ext cx="731520" cy="182879"/>
+            <a:off x="2377440" y="4343400"/>
+            <a:ext cx="502920" cy="182879"/>
           </a:xfrm>
           <a:prstGeom prst="rect">
             <a:avLst/>
@@ -8830,7 +8830,7 @@
           <a:p>
             <a:pPr algn="ctr"/>
             <a:r>
-              <a:rPr sz="600" b="0" i="0">
+              <a:rPr sz="550" b="0" i="0">
                 <a:solidFill>
                   <a:srgbClr val="222222"/>
                 </a:solidFill>
@@ -8849,8 +8849,8 @@
         </p:nvSpPr>
         <p:spPr>
           <a:xfrm>
-            <a:off x="3840480" y="4343400"/>
-            <a:ext cx="731520" cy="182879"/>
+            <a:off x="2880360" y="4343400"/>
+            <a:ext cx="502920" cy="182879"/>
           </a:xfrm>
           <a:prstGeom prst="rect">
             <a:avLst/>
@@ -8895,8 +8895,8 @@
         </p:nvSpPr>
         <p:spPr>
           <a:xfrm>
-            <a:off x="3840480" y="4343400"/>
-            <a:ext cx="731520" cy="182879"/>
+            <a:off x="2880360" y="4343400"/>
+            <a:ext cx="502920" cy="182879"/>
           </a:xfrm>
           <a:prstGeom prst="rect">
             <a:avLst/>
@@ -8912,7 +8912,7 @@
           <a:p>
             <a:pPr algn="ctr"/>
             <a:r>
-              <a:rPr sz="600" b="0" i="0">
+              <a:rPr sz="550" b="0" i="0">
                 <a:solidFill>
                   <a:srgbClr val="222222"/>
                 </a:solidFill>
@@ -8931,8 +8931,8 @@
         </p:nvSpPr>
         <p:spPr>
           <a:xfrm>
-            <a:off x="4572000" y="4343400"/>
-            <a:ext cx="731520" cy="182879"/>
+            <a:off x="3383280" y="4343400"/>
+            <a:ext cx="502920" cy="182879"/>
           </a:xfrm>
           <a:prstGeom prst="rect">
             <a:avLst/>
@@ -8977,8 +8977,8 @@
         </p:nvSpPr>
         <p:spPr>
           <a:xfrm>
-            <a:off x="4572000" y="4343400"/>
-            <a:ext cx="731520" cy="182879"/>
+            <a:off x="3383280" y="4343400"/>
+            <a:ext cx="502920" cy="182879"/>
           </a:xfrm>
           <a:prstGeom prst="rect">
             <a:avLst/>
@@ -8994,7 +8994,7 @@
           <a:p>
             <a:pPr algn="ctr"/>
             <a:r>
-              <a:rPr sz="600" b="0" i="0">
+              <a:rPr sz="550" b="0" i="0">
                 <a:solidFill>
                   <a:srgbClr val="FFFFFF"/>
                 </a:solidFill>
@@ -9013,8 +9013,8 @@
         </p:nvSpPr>
         <p:spPr>
           <a:xfrm>
-            <a:off x="640079" y="4507992"/>
-            <a:ext cx="2377440" cy="201167"/>
+            <a:off x="274320" y="4507992"/>
+            <a:ext cx="2011680" cy="201167"/>
           </a:xfrm>
           <a:prstGeom prst="rect">
             <a:avLst/>
@@ -9049,8 +9049,8 @@
         </p:nvSpPr>
         <p:spPr>
           <a:xfrm>
-            <a:off x="3108960" y="4526279"/>
-            <a:ext cx="731520" cy="182879"/>
+            <a:off x="2377440" y="4526279"/>
+            <a:ext cx="502920" cy="182879"/>
           </a:xfrm>
           <a:prstGeom prst="rect">
             <a:avLst/>
@@ -9095,8 +9095,8 @@
         </p:nvSpPr>
         <p:spPr>
           <a:xfrm>
-            <a:off x="3108960" y="4526279"/>
-            <a:ext cx="731520" cy="182879"/>
+            <a:off x="2377440" y="4526279"/>
+            <a:ext cx="502920" cy="182879"/>
           </a:xfrm>
           <a:prstGeom prst="rect">
             <a:avLst/>
@@ -9112,7 +9112,7 @@
           <a:p>
             <a:pPr algn="ctr"/>
             <a:r>
-              <a:rPr sz="600" b="0" i="0">
+              <a:rPr sz="550" b="0" i="0">
                 <a:solidFill>
                   <a:srgbClr val="222222"/>
                 </a:solidFill>
@@ -9131,8 +9131,8 @@
         </p:nvSpPr>
         <p:spPr>
           <a:xfrm>
-            <a:off x="3840480" y="4526279"/>
-            <a:ext cx="731520" cy="182879"/>
+            <a:off x="2880360" y="4526279"/>
+            <a:ext cx="502920" cy="182879"/>
           </a:xfrm>
           <a:prstGeom prst="rect">
             <a:avLst/>
@@ -9177,8 +9177,8 @@
         </p:nvSpPr>
         <p:spPr>
           <a:xfrm>
-            <a:off x="3840480" y="4526279"/>
-            <a:ext cx="731520" cy="182879"/>
+            <a:off x="2880360" y="4526279"/>
+            <a:ext cx="502920" cy="182879"/>
           </a:xfrm>
           <a:prstGeom prst="rect">
             <a:avLst/>
@@ -9194,7 +9194,7 @@
           <a:p>
             <a:pPr algn="ctr"/>
             <a:r>
-              <a:rPr sz="600" b="0" i="0">
+              <a:rPr sz="550" b="0" i="0">
                 <a:solidFill>
                   <a:srgbClr val="222222"/>
                 </a:solidFill>
@@ -9213,8 +9213,8 @@
         </p:nvSpPr>
         <p:spPr>
           <a:xfrm>
-            <a:off x="4572000" y="4526279"/>
-            <a:ext cx="731520" cy="182879"/>
+            <a:off x="3383280" y="4526279"/>
+            <a:ext cx="502920" cy="182879"/>
           </a:xfrm>
           <a:prstGeom prst="rect">
             <a:avLst/>
@@ -9259,8 +9259,8 @@
         </p:nvSpPr>
         <p:spPr>
           <a:xfrm>
-            <a:off x="4572000" y="4526279"/>
-            <a:ext cx="731520" cy="182879"/>
+            <a:off x="3383280" y="4526279"/>
+            <a:ext cx="502920" cy="182879"/>
           </a:xfrm>
           <a:prstGeom prst="rect">
             <a:avLst/>
@@ -9276,7 +9276,7 @@
           <a:p>
             <a:pPr algn="ctr"/>
             <a:r>
-              <a:rPr sz="600" b="0" i="0">
+              <a:rPr sz="550" b="0" i="0">
                 <a:solidFill>
                   <a:srgbClr val="FFFFFF"/>
                 </a:solidFill>
@@ -9295,8 +9295,8 @@
         </p:nvSpPr>
         <p:spPr>
           <a:xfrm>
-            <a:off x="640079" y="4690872"/>
-            <a:ext cx="2377440" cy="201167"/>
+            <a:off x="274320" y="4690872"/>
+            <a:ext cx="2011680" cy="201167"/>
           </a:xfrm>
           <a:prstGeom prst="rect">
             <a:avLst/>
@@ -9331,8 +9331,8 @@
         </p:nvSpPr>
         <p:spPr>
           <a:xfrm>
-            <a:off x="3108960" y="4709159"/>
-            <a:ext cx="731520" cy="182879"/>
+            <a:off x="2377440" y="4709159"/>
+            <a:ext cx="502920" cy="182879"/>
           </a:xfrm>
           <a:prstGeom prst="rect">
             <a:avLst/>
@@ -9377,8 +9377,8 @@
         </p:nvSpPr>
         <p:spPr>
           <a:xfrm>
-            <a:off x="3108960" y="4709159"/>
-            <a:ext cx="731520" cy="182879"/>
+            <a:off x="2377440" y="4709159"/>
+            <a:ext cx="502920" cy="182879"/>
           </a:xfrm>
           <a:prstGeom prst="rect">
             <a:avLst/>
@@ -9394,7 +9394,7 @@
           <a:p>
             <a:pPr algn="ctr"/>
             <a:r>
-              <a:rPr sz="600" b="0" i="0">
+              <a:rPr sz="550" b="0" i="0">
                 <a:solidFill>
                   <a:srgbClr val="222222"/>
                 </a:solidFill>
@@ -9413,8 +9413,8 @@
         </p:nvSpPr>
         <p:spPr>
           <a:xfrm>
-            <a:off x="3840480" y="4709159"/>
-            <a:ext cx="731520" cy="182879"/>
+            <a:off x="2880360" y="4709159"/>
+            <a:ext cx="502920" cy="182879"/>
           </a:xfrm>
           <a:prstGeom prst="rect">
             <a:avLst/>
@@ -9459,8 +9459,8 @@
         </p:nvSpPr>
         <p:spPr>
           <a:xfrm>
-            <a:off x="3840480" y="4709159"/>
-            <a:ext cx="731520" cy="182879"/>
+            <a:off x="2880360" y="4709159"/>
+            <a:ext cx="502920" cy="182879"/>
           </a:xfrm>
           <a:prstGeom prst="rect">
             <a:avLst/>
@@ -9476,7 +9476,7 @@
           <a:p>
             <a:pPr algn="ctr"/>
             <a:r>
-              <a:rPr sz="600" b="0" i="0">
+              <a:rPr sz="550" b="0" i="0">
                 <a:solidFill>
                   <a:srgbClr val="FFFFFF"/>
                 </a:solidFill>
@@ -9495,8 +9495,8 @@
         </p:nvSpPr>
         <p:spPr>
           <a:xfrm>
-            <a:off x="4572000" y="4709159"/>
-            <a:ext cx="731520" cy="182879"/>
+            <a:off x="3383280" y="4709159"/>
+            <a:ext cx="502920" cy="182879"/>
           </a:xfrm>
           <a:prstGeom prst="rect">
             <a:avLst/>
@@ -9541,8 +9541,8 @@
         </p:nvSpPr>
         <p:spPr>
           <a:xfrm>
-            <a:off x="4572000" y="4709159"/>
-            <a:ext cx="731520" cy="182879"/>
+            <a:off x="3383280" y="4709159"/>
+            <a:ext cx="502920" cy="182879"/>
           </a:xfrm>
           <a:prstGeom prst="rect">
             <a:avLst/>
@@ -9558,7 +9558,7 @@
           <a:p>
             <a:pPr algn="ctr"/>
             <a:r>
-              <a:rPr sz="600" b="0" i="0">
+              <a:rPr sz="550" b="0" i="0">
                 <a:solidFill>
                   <a:srgbClr val="222222"/>
                 </a:solidFill>
@@ -9577,8 +9577,8 @@
         </p:nvSpPr>
         <p:spPr>
           <a:xfrm>
-            <a:off x="640079" y="4873752"/>
-            <a:ext cx="2377440" cy="201167"/>
+            <a:off x="274320" y="4873752"/>
+            <a:ext cx="2011680" cy="201167"/>
           </a:xfrm>
           <a:prstGeom prst="rect">
             <a:avLst/>
@@ -9613,8 +9613,8 @@
         </p:nvSpPr>
         <p:spPr>
           <a:xfrm>
-            <a:off x="3108960" y="4892040"/>
-            <a:ext cx="731520" cy="182879"/>
+            <a:off x="2377440" y="4892040"/>
+            <a:ext cx="502920" cy="182879"/>
           </a:xfrm>
           <a:prstGeom prst="rect">
             <a:avLst/>
@@ -9659,8 +9659,8 @@
         </p:nvSpPr>
         <p:spPr>
           <a:xfrm>
-            <a:off x="3108960" y="4892040"/>
-            <a:ext cx="731520" cy="182879"/>
+            <a:off x="2377440" y="4892040"/>
+            <a:ext cx="502920" cy="182879"/>
           </a:xfrm>
           <a:prstGeom prst="rect">
             <a:avLst/>
@@ -9676,7 +9676,7 @@
           <a:p>
             <a:pPr algn="ctr"/>
             <a:r>
-              <a:rPr sz="600" b="0" i="0">
+              <a:rPr sz="550" b="0" i="0">
                 <a:solidFill>
                   <a:srgbClr val="222222"/>
                 </a:solidFill>
@@ -9695,8 +9695,8 @@
         </p:nvSpPr>
         <p:spPr>
           <a:xfrm>
-            <a:off x="3840480" y="4892040"/>
-            <a:ext cx="731520" cy="182879"/>
+            <a:off x="2880360" y="4892040"/>
+            <a:ext cx="502920" cy="182879"/>
           </a:xfrm>
           <a:prstGeom prst="rect">
             <a:avLst/>
@@ -9741,8 +9741,8 @@
         </p:nvSpPr>
         <p:spPr>
           <a:xfrm>
-            <a:off x="3840480" y="4892040"/>
-            <a:ext cx="731520" cy="182879"/>
+            <a:off x="2880360" y="4892040"/>
+            <a:ext cx="502920" cy="182879"/>
           </a:xfrm>
           <a:prstGeom prst="rect">
             <a:avLst/>
@@ -9758,7 +9758,7 @@
           <a:p>
             <a:pPr algn="ctr"/>
             <a:r>
-              <a:rPr sz="600" b="0" i="0">
+              <a:rPr sz="550" b="0" i="0">
                 <a:solidFill>
                   <a:srgbClr val="222222"/>
                 </a:solidFill>
@@ -9777,8 +9777,8 @@
         </p:nvSpPr>
         <p:spPr>
           <a:xfrm>
-            <a:off x="4572000" y="4892040"/>
-            <a:ext cx="731520" cy="182879"/>
+            <a:off x="3383280" y="4892040"/>
+            <a:ext cx="502920" cy="182879"/>
           </a:xfrm>
           <a:prstGeom prst="rect">
             <a:avLst/>
@@ -9823,8 +9823,8 @@
         </p:nvSpPr>
         <p:spPr>
           <a:xfrm>
-            <a:off x="4572000" y="4892040"/>
-            <a:ext cx="731520" cy="182879"/>
+            <a:off x="3383280" y="4892040"/>
+            <a:ext cx="502920" cy="182879"/>
           </a:xfrm>
           <a:prstGeom prst="rect">
             <a:avLst/>
@@ -9840,7 +9840,7 @@
           <a:p>
             <a:pPr algn="ctr"/>
             <a:r>
-              <a:rPr sz="600" b="0" i="0">
+              <a:rPr sz="550" b="0" i="0">
                 <a:solidFill>
                   <a:srgbClr val="222222"/>
                 </a:solidFill>
@@ -9859,8 +9859,8 @@
         </p:nvSpPr>
         <p:spPr>
           <a:xfrm>
-            <a:off x="5669280" y="4969764"/>
-            <a:ext cx="228600" cy="105155"/>
+            <a:off x="4023360" y="4969764"/>
+            <a:ext cx="164592" cy="105155"/>
           </a:xfrm>
           <a:prstGeom prst="rect">
             <a:avLst/>
@@ -9903,8 +9903,8 @@
         </p:nvSpPr>
         <p:spPr>
           <a:xfrm>
-            <a:off x="5669280" y="4864608"/>
-            <a:ext cx="228600" cy="105155"/>
+            <a:off x="4023360" y="4864608"/>
+            <a:ext cx="164592" cy="105155"/>
           </a:xfrm>
           <a:prstGeom prst="rect">
             <a:avLst/>
@@ -9947,8 +9947,8 @@
         </p:nvSpPr>
         <p:spPr>
           <a:xfrm>
-            <a:off x="5669280" y="4759452"/>
-            <a:ext cx="228600" cy="105155"/>
+            <a:off x="4023360" y="4759452"/>
+            <a:ext cx="164592" cy="105155"/>
           </a:xfrm>
           <a:prstGeom prst="rect">
             <a:avLst/>
@@ -9991,8 +9991,8 @@
         </p:nvSpPr>
         <p:spPr>
           <a:xfrm>
-            <a:off x="5669280" y="4654296"/>
-            <a:ext cx="228600" cy="105155"/>
+            <a:off x="4023360" y="4654296"/>
+            <a:ext cx="164592" cy="105155"/>
           </a:xfrm>
           <a:prstGeom prst="rect">
             <a:avLst/>
@@ -10035,8 +10035,8 @@
         </p:nvSpPr>
         <p:spPr>
           <a:xfrm>
-            <a:off x="5669280" y="4549140"/>
-            <a:ext cx="228600" cy="105155"/>
+            <a:off x="4023360" y="4549140"/>
+            <a:ext cx="164592" cy="105155"/>
           </a:xfrm>
           <a:prstGeom prst="rect">
             <a:avLst/>
@@ -10079,8 +10079,8 @@
         </p:nvSpPr>
         <p:spPr>
           <a:xfrm>
-            <a:off x="5669280" y="4443983"/>
-            <a:ext cx="228600" cy="105155"/>
+            <a:off x="4023360" y="4443983"/>
+            <a:ext cx="164592" cy="105155"/>
           </a:xfrm>
           <a:prstGeom prst="rect">
             <a:avLst/>
@@ -10123,8 +10123,8 @@
         </p:nvSpPr>
         <p:spPr>
           <a:xfrm>
-            <a:off x="5669280" y="4338828"/>
-            <a:ext cx="228600" cy="105155"/>
+            <a:off x="4023360" y="4338828"/>
+            <a:ext cx="164592" cy="105155"/>
           </a:xfrm>
           <a:prstGeom prst="rect">
             <a:avLst/>
@@ -10167,8 +10167,8 @@
         </p:nvSpPr>
         <p:spPr>
           <a:xfrm>
-            <a:off x="5669280" y="4233672"/>
-            <a:ext cx="228600" cy="105155"/>
+            <a:off x="4023360" y="4233672"/>
+            <a:ext cx="164592" cy="105155"/>
           </a:xfrm>
           <a:prstGeom prst="rect">
             <a:avLst/>
@@ -10211,8 +10211,8 @@
         </p:nvSpPr>
         <p:spPr>
           <a:xfrm>
-            <a:off x="5669280" y="4128515"/>
-            <a:ext cx="228600" cy="105155"/>
+            <a:off x="4023360" y="4128515"/>
+            <a:ext cx="164592" cy="105155"/>
           </a:xfrm>
           <a:prstGeom prst="rect">
             <a:avLst/>
@@ -10255,8 +10255,8 @@
         </p:nvSpPr>
         <p:spPr>
           <a:xfrm>
-            <a:off x="5669280" y="4023360"/>
-            <a:ext cx="228600" cy="105155"/>
+            <a:off x="4023360" y="4023360"/>
+            <a:ext cx="164592" cy="105155"/>
           </a:xfrm>
           <a:prstGeom prst="rect">
             <a:avLst/>
@@ -10299,8 +10299,8 @@
         </p:nvSpPr>
         <p:spPr>
           <a:xfrm>
-            <a:off x="5669280" y="3918204"/>
-            <a:ext cx="228600" cy="105155"/>
+            <a:off x="4023360" y="3918204"/>
+            <a:ext cx="164592" cy="105155"/>
           </a:xfrm>
           <a:prstGeom prst="rect">
             <a:avLst/>
@@ -10343,8 +10343,8 @@
         </p:nvSpPr>
         <p:spPr>
           <a:xfrm>
-            <a:off x="5669280" y="3813048"/>
-            <a:ext cx="228600" cy="105155"/>
+            <a:off x="4023360" y="3813048"/>
+            <a:ext cx="164592" cy="105155"/>
           </a:xfrm>
           <a:prstGeom prst="rect">
             <a:avLst/>
@@ -10387,8 +10387,8 @@
         </p:nvSpPr>
         <p:spPr>
           <a:xfrm>
-            <a:off x="5669280" y="3707891"/>
-            <a:ext cx="228600" cy="105155"/>
+            <a:off x="4023360" y="3707891"/>
+            <a:ext cx="164592" cy="105155"/>
           </a:xfrm>
           <a:prstGeom prst="rect">
             <a:avLst/>
@@ -10431,8 +10431,8 @@
         </p:nvSpPr>
         <p:spPr>
           <a:xfrm>
-            <a:off x="5669280" y="3602736"/>
-            <a:ext cx="228600" cy="105155"/>
+            <a:off x="4023360" y="3602736"/>
+            <a:ext cx="164592" cy="105155"/>
           </a:xfrm>
           <a:prstGeom prst="rect">
             <a:avLst/>
@@ -10475,8 +10475,8 @@
         </p:nvSpPr>
         <p:spPr>
           <a:xfrm>
-            <a:off x="5669280" y="3497579"/>
-            <a:ext cx="228600" cy="105155"/>
+            <a:off x="4023360" y="3497579"/>
+            <a:ext cx="164592" cy="105155"/>
           </a:xfrm>
           <a:prstGeom prst="rect">
             <a:avLst/>
@@ -10519,8 +10519,8 @@
         </p:nvSpPr>
         <p:spPr>
           <a:xfrm>
-            <a:off x="5669280" y="3392424"/>
-            <a:ext cx="228600" cy="105155"/>
+            <a:off x="4023360" y="3392424"/>
+            <a:ext cx="164592" cy="105155"/>
           </a:xfrm>
           <a:prstGeom prst="rect">
             <a:avLst/>
@@ -10563,8 +10563,8 @@
         </p:nvSpPr>
         <p:spPr>
           <a:xfrm>
-            <a:off x="5669280" y="3287268"/>
-            <a:ext cx="228600" cy="105155"/>
+            <a:off x="4023360" y="3287268"/>
+            <a:ext cx="164592" cy="105155"/>
           </a:xfrm>
           <a:prstGeom prst="rect">
             <a:avLst/>
@@ -10607,8 +10607,8 @@
         </p:nvSpPr>
         <p:spPr>
           <a:xfrm>
-            <a:off x="5669280" y="3182112"/>
-            <a:ext cx="228600" cy="105155"/>
+            <a:off x="4023360" y="3182112"/>
+            <a:ext cx="164592" cy="105155"/>
           </a:xfrm>
           <a:prstGeom prst="rect">
             <a:avLst/>
@@ -10651,8 +10651,8 @@
         </p:nvSpPr>
         <p:spPr>
           <a:xfrm>
-            <a:off x="5669280" y="3076956"/>
-            <a:ext cx="228600" cy="105155"/>
+            <a:off x="4023360" y="3076956"/>
+            <a:ext cx="164592" cy="105155"/>
           </a:xfrm>
           <a:prstGeom prst="rect">
             <a:avLst/>
@@ -10695,8 +10695,8 @@
         </p:nvSpPr>
         <p:spPr>
           <a:xfrm>
-            <a:off x="5669280" y="2971800"/>
-            <a:ext cx="228600" cy="105155"/>
+            <a:off x="4023360" y="2971800"/>
+            <a:ext cx="164592" cy="105155"/>
           </a:xfrm>
           <a:prstGeom prst="rect">
             <a:avLst/>
@@ -10739,8 +10739,8 @@
         </p:nvSpPr>
         <p:spPr>
           <a:xfrm>
-            <a:off x="5669280" y="2866644"/>
-            <a:ext cx="228600" cy="105155"/>
+            <a:off x="4023360" y="2866644"/>
+            <a:ext cx="164592" cy="105155"/>
           </a:xfrm>
           <a:prstGeom prst="rect">
             <a:avLst/>
@@ -10783,8 +10783,8 @@
         </p:nvSpPr>
         <p:spPr>
           <a:xfrm>
-            <a:off x="5669280" y="2761488"/>
-            <a:ext cx="228600" cy="105155"/>
+            <a:off x="4023360" y="2761488"/>
+            <a:ext cx="164592" cy="105155"/>
           </a:xfrm>
           <a:prstGeom prst="rect">
             <a:avLst/>
@@ -10827,8 +10827,8 @@
         </p:nvSpPr>
         <p:spPr>
           <a:xfrm>
-            <a:off x="5669280" y="2656332"/>
-            <a:ext cx="228600" cy="105155"/>
+            <a:off x="4023360" y="2656332"/>
+            <a:ext cx="164592" cy="105155"/>
           </a:xfrm>
           <a:prstGeom prst="rect">
             <a:avLst/>
@@ -10871,8 +10871,8 @@
         </p:nvSpPr>
         <p:spPr>
           <a:xfrm>
-            <a:off x="5669280" y="2551176"/>
-            <a:ext cx="228600" cy="105155"/>
+            <a:off x="4023360" y="2551176"/>
+            <a:ext cx="164592" cy="105155"/>
           </a:xfrm>
           <a:prstGeom prst="rect">
             <a:avLst/>
@@ -10915,8 +10915,8 @@
         </p:nvSpPr>
         <p:spPr>
           <a:xfrm>
-            <a:off x="5669280" y="2446020"/>
-            <a:ext cx="228600" cy="105155"/>
+            <a:off x="4023360" y="2446020"/>
+            <a:ext cx="164592" cy="105155"/>
           </a:xfrm>
           <a:prstGeom prst="rect">
             <a:avLst/>
@@ -10959,8 +10959,8 @@
         </p:nvSpPr>
         <p:spPr>
           <a:xfrm>
-            <a:off x="5669280" y="2340864"/>
-            <a:ext cx="228600" cy="105155"/>
+            <a:off x="4023360" y="2340864"/>
+            <a:ext cx="164592" cy="105155"/>
           </a:xfrm>
           <a:prstGeom prst="rect">
             <a:avLst/>
@@ -11003,8 +11003,8 @@
         </p:nvSpPr>
         <p:spPr>
           <a:xfrm>
-            <a:off x="5669280" y="2235708"/>
-            <a:ext cx="228600" cy="105155"/>
+            <a:off x="4023360" y="2235708"/>
+            <a:ext cx="164592" cy="105155"/>
           </a:xfrm>
           <a:prstGeom prst="rect">
             <a:avLst/>
@@ -11047,8 +11047,8 @@
         </p:nvSpPr>
         <p:spPr>
           <a:xfrm>
-            <a:off x="5669280" y="2130552"/>
-            <a:ext cx="228600" cy="105155"/>
+            <a:off x="4023360" y="2130552"/>
+            <a:ext cx="164592" cy="105155"/>
           </a:xfrm>
           <a:prstGeom prst="rect">
             <a:avLst/>
@@ -11091,8 +11091,8 @@
         </p:nvSpPr>
         <p:spPr>
           <a:xfrm>
-            <a:off x="5669280" y="2025396"/>
-            <a:ext cx="228600" cy="105155"/>
+            <a:off x="4023360" y="2025396"/>
+            <a:ext cx="164592" cy="105155"/>
           </a:xfrm>
           <a:prstGeom prst="rect">
             <a:avLst/>
@@ -11135,8 +11135,8 @@
         </p:nvSpPr>
         <p:spPr>
           <a:xfrm>
-            <a:off x="5669280" y="1920239"/>
-            <a:ext cx="228600" cy="105155"/>
+            <a:off x="4023360" y="1920239"/>
+            <a:ext cx="164592" cy="105155"/>
           </a:xfrm>
           <a:prstGeom prst="rect">
             <a:avLst/>
@@ -11179,8 +11179,8 @@
         </p:nvSpPr>
         <p:spPr>
           <a:xfrm>
-            <a:off x="5669280" y="1815084"/>
-            <a:ext cx="228600" cy="105155"/>
+            <a:off x="4023360" y="1815084"/>
+            <a:ext cx="164592" cy="105155"/>
           </a:xfrm>
           <a:prstGeom prst="rect">
             <a:avLst/>
@@ -11223,8 +11223,8 @@
         </p:nvSpPr>
         <p:spPr>
           <a:xfrm>
-            <a:off x="5669280" y="1709928"/>
-            <a:ext cx="228600" cy="105155"/>
+            <a:off x="4023360" y="1709928"/>
+            <a:ext cx="164592" cy="105155"/>
           </a:xfrm>
           <a:prstGeom prst="rect">
             <a:avLst/>
@@ -11267,8 +11267,8 @@
         </p:nvSpPr>
         <p:spPr>
           <a:xfrm>
-            <a:off x="5669280" y="1604772"/>
-            <a:ext cx="228600" cy="105155"/>
+            <a:off x="4023360" y="1604772"/>
+            <a:ext cx="164592" cy="105155"/>
           </a:xfrm>
           <a:prstGeom prst="rect">
             <a:avLst/>
@@ -11311,8 +11311,8 @@
         </p:nvSpPr>
         <p:spPr>
           <a:xfrm>
-            <a:off x="5669280" y="1499616"/>
-            <a:ext cx="228600" cy="105155"/>
+            <a:off x="4023360" y="1499616"/>
+            <a:ext cx="164592" cy="105155"/>
           </a:xfrm>
           <a:prstGeom prst="rect">
             <a:avLst/>
@@ -11355,8 +11355,8 @@
         </p:nvSpPr>
         <p:spPr>
           <a:xfrm>
-            <a:off x="5669280" y="1394459"/>
-            <a:ext cx="228600" cy="105155"/>
+            <a:off x="4023360" y="1394459"/>
+            <a:ext cx="164592" cy="105155"/>
           </a:xfrm>
           <a:prstGeom prst="rect">
             <a:avLst/>
@@ -11399,8 +11399,8 @@
         </p:nvSpPr>
         <p:spPr>
           <a:xfrm>
-            <a:off x="5669280" y="1289304"/>
-            <a:ext cx="228600" cy="105155"/>
+            <a:off x="4023360" y="1289304"/>
+            <a:ext cx="164592" cy="105155"/>
           </a:xfrm>
           <a:prstGeom prst="rect">
             <a:avLst/>
@@ -11443,8 +11443,8 @@
         </p:nvSpPr>
         <p:spPr>
           <a:xfrm>
-            <a:off x="5669280" y="1184148"/>
-            <a:ext cx="228600" cy="105155"/>
+            <a:off x="4023360" y="1184148"/>
+            <a:ext cx="164592" cy="105155"/>
           </a:xfrm>
           <a:prstGeom prst="rect">
             <a:avLst/>
@@ -11487,8 +11487,8 @@
         </p:nvSpPr>
         <p:spPr>
           <a:xfrm>
-            <a:off x="5669280" y="1078992"/>
-            <a:ext cx="228600" cy="105155"/>
+            <a:off x="4023360" y="1078992"/>
+            <a:ext cx="164592" cy="105155"/>
           </a:xfrm>
           <a:prstGeom prst="rect">
             <a:avLst/>
@@ -11531,8 +11531,8 @@
         </p:nvSpPr>
         <p:spPr>
           <a:xfrm>
-            <a:off x="5669280" y="973836"/>
-            <a:ext cx="228600" cy="105155"/>
+            <a:off x="4023360" y="973836"/>
+            <a:ext cx="164592" cy="105155"/>
           </a:xfrm>
           <a:prstGeom prst="rect">
             <a:avLst/>
@@ -11575,8 +11575,8 @@
         </p:nvSpPr>
         <p:spPr>
           <a:xfrm>
-            <a:off x="5669280" y="868680"/>
-            <a:ext cx="228600" cy="105155"/>
+            <a:off x="4023360" y="868680"/>
+            <a:ext cx="164592" cy="105155"/>
           </a:xfrm>
           <a:prstGeom prst="rect">
             <a:avLst/>
@@ -11619,8 +11619,8 @@
         </p:nvSpPr>
         <p:spPr>
           <a:xfrm>
-            <a:off x="5669280" y="594359"/>
-            <a:ext cx="777240" cy="228600"/>
+            <a:off x="3886200" y="667512"/>
+            <a:ext cx="621792" cy="164592"/>
           </a:xfrm>
           <a:prstGeom prst="rect">
             <a:avLst/>
@@ -11634,9 +11634,9 @@
           </a:bodyPr>
           <a:lstStyle/>
           <a:p>
-            <a:pPr algn="l"/>
-            <a:r>
-              <a:rPr sz="700" b="0" i="0">
+            <a:pPr algn="ctr"/>
+            <a:r>
+              <a:rPr sz="600" b="0" i="0">
                 <a:solidFill>
                   <a:srgbClr val="888888"/>
                 </a:solidFill>
@@ -11655,8 +11655,8 @@
         </p:nvSpPr>
         <p:spPr>
           <a:xfrm>
-            <a:off x="5669280" y="5111496"/>
-            <a:ext cx="777240" cy="228600"/>
+            <a:off x="3886200" y="5093207"/>
+            <a:ext cx="621792" cy="164592"/>
           </a:xfrm>
           <a:prstGeom prst="rect">
             <a:avLst/>
@@ -11670,9 +11670,9 @@
           </a:bodyPr>
           <a:lstStyle/>
           <a:p>
-            <a:pPr algn="l"/>
-            <a:r>
-              <a:rPr sz="700" b="0" i="0">
+            <a:pPr algn="ctr"/>
+            <a:r>
+              <a:rPr sz="600" b="0" i="0">
                 <a:solidFill>
                   <a:srgbClr val="888888"/>
                 </a:solidFill>
@@ -11683,16 +11683,125 @@
           </a:p>
         </p:txBody>
       </p:sp>
-      <p:sp>
-        <p:nvSpPr>
-          <p:cNvPr id="210" name="TextBox 209"/>
+      <p:cxnSp>
+        <p:nvCxnSpPr>
+          <p:cNvPr id="210" name="Connector 209"/>
+          <p:cNvCxnSpPr/>
+          <p:nvPr/>
+        </p:nvCxnSpPr>
+        <p:spPr>
+          <a:xfrm>
+            <a:off x="4553712" y="822959"/>
+            <a:ext cx="0" cy="4297681"/>
+          </a:xfrm>
+          <a:prstGeom prst="line">
+            <a:avLst/>
+          </a:prstGeom>
+          <a:ln w="7620">
+            <a:solidFill>
+              <a:srgbClr val="333333"/>
+            </a:solidFill>
+          </a:ln>
+          <a:effectLst/>
+        </p:spPr>
+        <p:style>
+          <a:lnRef idx="2">
+            <a:schemeClr val="accent1"/>
+          </a:lnRef>
+          <a:fillRef idx="0">
+            <a:schemeClr val="accent1"/>
+          </a:fillRef>
+          <a:effectRef idx="1">
+            <a:schemeClr val="accent1"/>
+          </a:effectRef>
+          <a:fontRef idx="minor">
+            <a:schemeClr val="tx1"/>
+          </a:fontRef>
+        </p:style>
+      </p:cxnSp>
+      <p:cxnSp>
+        <p:nvCxnSpPr>
+          <p:cNvPr id="211" name="Connector 210"/>
+          <p:cNvCxnSpPr/>
+          <p:nvPr/>
+        </p:nvCxnSpPr>
+        <p:spPr>
+          <a:xfrm>
+            <a:off x="4553712" y="5074920"/>
+            <a:ext cx="3108960" cy="0"/>
+          </a:xfrm>
+          <a:prstGeom prst="line">
+            <a:avLst/>
+          </a:prstGeom>
+          <a:ln w="7620">
+            <a:solidFill>
+              <a:srgbClr val="333333"/>
+            </a:solidFill>
+          </a:ln>
+          <a:effectLst/>
+        </p:spPr>
+        <p:style>
+          <a:lnRef idx="2">
+            <a:schemeClr val="accent1"/>
+          </a:lnRef>
+          <a:fillRef idx="0">
+            <a:schemeClr val="accent1"/>
+          </a:fillRef>
+          <a:effectRef idx="1">
+            <a:schemeClr val="accent1"/>
+          </a:effectRef>
+          <a:fontRef idx="minor">
+            <a:schemeClr val="tx1"/>
+          </a:fontRef>
+        </p:style>
+      </p:cxnSp>
+      <p:cxnSp>
+        <p:nvCxnSpPr>
+          <p:cNvPr id="212" name="Connector 211"/>
+          <p:cNvCxnSpPr/>
+          <p:nvPr/>
+        </p:nvCxnSpPr>
+        <p:spPr>
+          <a:xfrm>
+            <a:off x="7250216" y="822959"/>
+            <a:ext cx="0" cy="4297681"/>
+          </a:xfrm>
+          <a:prstGeom prst="line">
+            <a:avLst/>
+          </a:prstGeom>
+          <a:ln w="7620">
+            <a:solidFill>
+              <a:srgbClr val="C53E1F"/>
+            </a:solidFill>
+            <a:prstDash val="dash"/>
+          </a:ln>
+          <a:effectLst/>
+        </p:spPr>
+        <p:style>
+          <a:lnRef idx="2">
+            <a:schemeClr val="accent1"/>
+          </a:lnRef>
+          <a:fillRef idx="0">
+            <a:schemeClr val="accent1"/>
+          </a:fillRef>
+          <a:effectRef idx="1">
+            <a:schemeClr val="accent1"/>
+          </a:effectRef>
+          <a:fontRef idx="minor">
+            <a:schemeClr val="tx1"/>
+          </a:fontRef>
+        </p:style>
+      </p:cxnSp>
+      <p:sp>
+        <p:nvSpPr>
+          <p:cNvPr id="213" name="TextBox 212"/>
           <p:cNvSpPr txBox="1"/>
           <p:nvPr/>
         </p:nvSpPr>
         <p:spPr>
           <a:xfrm>
-            <a:off x="5989320" y="2862072"/>
-            <a:ext cx="914400" cy="228600"/>
+            <a:off x="6838736" y="640080"/>
+            <a:ext cx="822960" cy="164592"/>
           </a:xfrm>
           <a:prstGeom prst="rect">
             <a:avLst/>
@@ -11706,9 +11815,3645 @@
           </a:bodyPr>
           <a:lstStyle/>
           <a:p>
+            <a:pPr algn="ctr"/>
+            <a:r>
+              <a:rPr sz="600" b="0" i="1">
+                <a:solidFill>
+                  <a:srgbClr val="C53E1F"/>
+                </a:solidFill>
+                <a:latin typeface="Arial"/>
+              </a:rPr>
+              <a:t>P = 0.05</a:t>
+            </a:r>
+          </a:p>
+        </p:txBody>
+      </p:sp>
+      <p:cxnSp>
+        <p:nvCxnSpPr>
+          <p:cNvPr id="214" name="Connector 213"/>
+          <p:cNvCxnSpPr/>
+          <p:nvPr/>
+        </p:nvCxnSpPr>
+        <p:spPr>
+          <a:xfrm>
+            <a:off x="4553712" y="5074920"/>
+            <a:ext cx="0" cy="64008"/>
+          </a:xfrm>
+          <a:prstGeom prst="line">
+            <a:avLst/>
+          </a:prstGeom>
+          <a:ln w="5080">
+            <a:solidFill>
+              <a:srgbClr val="333333"/>
+            </a:solidFill>
+          </a:ln>
+          <a:effectLst/>
+        </p:spPr>
+        <p:style>
+          <a:lnRef idx="2">
+            <a:schemeClr val="accent1"/>
+          </a:lnRef>
+          <a:fillRef idx="0">
+            <a:schemeClr val="accent1"/>
+          </a:fillRef>
+          <a:effectRef idx="1">
+            <a:schemeClr val="accent1"/>
+          </a:effectRef>
+          <a:fontRef idx="minor">
+            <a:schemeClr val="tx1"/>
+          </a:fontRef>
+        </p:style>
+      </p:cxnSp>
+      <p:sp>
+        <p:nvSpPr>
+          <p:cNvPr id="215" name="TextBox 214"/>
+          <p:cNvSpPr txBox="1"/>
+          <p:nvPr/>
+        </p:nvSpPr>
+        <p:spPr>
+          <a:xfrm>
+            <a:off x="4416552" y="5148072"/>
+            <a:ext cx="274320" cy="164592"/>
+          </a:xfrm>
+          <a:prstGeom prst="rect">
+            <a:avLst/>
+          </a:prstGeom>
+          <a:noFill/>
+          <a:effectLst/>
+        </p:spPr>
+        <p:txBody>
+          <a:bodyPr wrap="square" lIns="0" rIns="0" tIns="0" bIns="0" anchor="t">
+            <a:spAutoFit/>
+          </a:bodyPr>
+          <a:lstStyle/>
+          <a:p>
+            <a:pPr algn="ctr"/>
+            <a:r>
+              <a:rPr sz="600" b="0" i="0">
+                <a:solidFill>
+                  <a:srgbClr val="888888"/>
+                </a:solidFill>
+                <a:latin typeface="Arial"/>
+              </a:rPr>
+              <a:t>0</a:t>
+            </a:r>
+          </a:p>
+        </p:txBody>
+      </p:sp>
+      <p:cxnSp>
+        <p:nvCxnSpPr>
+          <p:cNvPr id="216" name="Connector 215"/>
+          <p:cNvCxnSpPr/>
+          <p:nvPr/>
+        </p:nvCxnSpPr>
+        <p:spPr>
+          <a:xfrm>
+            <a:off x="6626352" y="5074920"/>
+            <a:ext cx="0" cy="64008"/>
+          </a:xfrm>
+          <a:prstGeom prst="line">
+            <a:avLst/>
+          </a:prstGeom>
+          <a:ln w="5080">
+            <a:solidFill>
+              <a:srgbClr val="333333"/>
+            </a:solidFill>
+          </a:ln>
+          <a:effectLst/>
+        </p:spPr>
+        <p:style>
+          <a:lnRef idx="2">
+            <a:schemeClr val="accent1"/>
+          </a:lnRef>
+          <a:fillRef idx="0">
+            <a:schemeClr val="accent1"/>
+          </a:fillRef>
+          <a:effectRef idx="1">
+            <a:schemeClr val="accent1"/>
+          </a:effectRef>
+          <a:fontRef idx="minor">
+            <a:schemeClr val="tx1"/>
+          </a:fontRef>
+        </p:style>
+      </p:cxnSp>
+      <p:sp>
+        <p:nvSpPr>
+          <p:cNvPr id="217" name="TextBox 216"/>
+          <p:cNvSpPr txBox="1"/>
+          <p:nvPr/>
+        </p:nvSpPr>
+        <p:spPr>
+          <a:xfrm>
+            <a:off x="6489192" y="5148072"/>
+            <a:ext cx="274320" cy="164592"/>
+          </a:xfrm>
+          <a:prstGeom prst="rect">
+            <a:avLst/>
+          </a:prstGeom>
+          <a:noFill/>
+          <a:effectLst/>
+        </p:spPr>
+        <p:txBody>
+          <a:bodyPr wrap="square" lIns="0" rIns="0" tIns="0" bIns="0" anchor="t">
+            <a:spAutoFit/>
+          </a:bodyPr>
+          <a:lstStyle/>
+          <a:p>
+            <a:pPr algn="ctr"/>
+            <a:r>
+              <a:rPr sz="600" b="0" i="0">
+                <a:solidFill>
+                  <a:srgbClr val="888888"/>
+                </a:solidFill>
+                <a:latin typeface="Arial"/>
+              </a:rPr>
+              <a:t>1</a:t>
+            </a:r>
+          </a:p>
+        </p:txBody>
+      </p:sp>
+      <p:sp>
+        <p:nvSpPr>
+          <p:cNvPr id="218" name="TextBox 217"/>
+          <p:cNvSpPr txBox="1"/>
+          <p:nvPr/>
+        </p:nvSpPr>
+        <p:spPr>
+          <a:xfrm>
+            <a:off x="5285232" y="5349240"/>
+            <a:ext cx="1645920" cy="182880"/>
+          </a:xfrm>
+          <a:prstGeom prst="rect">
+            <a:avLst/>
+          </a:prstGeom>
+          <a:noFill/>
+          <a:effectLst/>
+        </p:spPr>
+        <p:txBody>
+          <a:bodyPr wrap="square" lIns="0" rIns="0" tIns="0" bIns="0" anchor="t">
+            <a:spAutoFit/>
+          </a:bodyPr>
+          <a:lstStyle/>
+          <a:p>
+            <a:pPr algn="ctr"/>
+            <a:r>
+              <a:rPr sz="700" b="0" i="0">
+                <a:solidFill>
+                  <a:srgbClr val="888888"/>
+                </a:solidFill>
+                <a:latin typeface="Arial"/>
+              </a:rPr>
+              <a:t>-log₁₀ P (good &gt; bad, 1-sided)</a:t>
+            </a:r>
+          </a:p>
+        </p:txBody>
+      </p:sp>
+      <p:sp>
+        <p:nvSpPr>
+          <p:cNvPr id="219" name="Rectangle 218"/>
+          <p:cNvSpPr/>
+          <p:nvPr/>
+        </p:nvSpPr>
+        <p:spPr>
+          <a:xfrm>
+            <a:off x="4553712" y="886968"/>
+            <a:ext cx="2696566" cy="37130"/>
+          </a:xfrm>
+          <a:prstGeom prst="rect">
+            <a:avLst/>
+          </a:prstGeom>
+          <a:solidFill>
+            <a:srgbClr val="1F5B82"/>
+          </a:solidFill>
+          <a:ln w="1905">
+            <a:solidFill>
+              <a:srgbClr val="333333"/>
+            </a:solidFill>
+          </a:ln>
+          <a:effectLst/>
+        </p:spPr>
+        <p:style>
+          <a:lnRef idx="1">
+            <a:schemeClr val="accent1"/>
+          </a:lnRef>
+          <a:fillRef idx="3">
+            <a:schemeClr val="accent1"/>
+          </a:fillRef>
+          <a:effectRef idx="2">
+            <a:schemeClr val="accent1"/>
+          </a:effectRef>
+          <a:fontRef idx="minor">
+            <a:schemeClr val="lt1"/>
+          </a:fontRef>
+        </p:style>
+        <p:txBody>
+          <a:bodyPr rtlCol="0" anchor="ctr"/>
+          <a:lstStyle/>
+          <a:p>
+            <a:pPr algn="ctr"/>
+          </a:p>
+        </p:txBody>
+      </p:sp>
+      <p:sp>
+        <p:nvSpPr>
+          <p:cNvPr id="220" name="Rectangle 219"/>
+          <p:cNvSpPr/>
+          <p:nvPr/>
+        </p:nvSpPr>
+        <p:spPr>
+          <a:xfrm>
+            <a:off x="4553712" y="942386"/>
+            <a:ext cx="1448713" cy="37130"/>
+          </a:xfrm>
+          <a:prstGeom prst="rect">
+            <a:avLst/>
+          </a:prstGeom>
+          <a:solidFill>
+            <a:srgbClr val="888888"/>
+          </a:solidFill>
+          <a:ln w="1905">
+            <a:solidFill>
+              <a:srgbClr val="333333"/>
+            </a:solidFill>
+          </a:ln>
+          <a:effectLst/>
+        </p:spPr>
+        <p:style>
+          <a:lnRef idx="1">
+            <a:schemeClr val="accent1"/>
+          </a:lnRef>
+          <a:fillRef idx="3">
+            <a:schemeClr val="accent1"/>
+          </a:fillRef>
+          <a:effectRef idx="2">
+            <a:schemeClr val="accent1"/>
+          </a:effectRef>
+          <a:fontRef idx="minor">
+            <a:schemeClr val="lt1"/>
+          </a:fontRef>
+        </p:style>
+        <p:txBody>
+          <a:bodyPr rtlCol="0" anchor="ctr"/>
+          <a:lstStyle/>
+          <a:p>
+            <a:pPr algn="ctr"/>
+          </a:p>
+        </p:txBody>
+      </p:sp>
+      <p:sp>
+        <p:nvSpPr>
+          <p:cNvPr id="221" name="Rectangle 220"/>
+          <p:cNvSpPr/>
+          <p:nvPr/>
+        </p:nvSpPr>
+        <p:spPr>
+          <a:xfrm>
+            <a:off x="4553712" y="997804"/>
+            <a:ext cx="200859" cy="37130"/>
+          </a:xfrm>
+          <a:prstGeom prst="rect">
+            <a:avLst/>
+          </a:prstGeom>
+          <a:solidFill>
+            <a:srgbClr val="D4A300"/>
+          </a:solidFill>
+          <a:ln w="1905">
+            <a:solidFill>
+              <a:srgbClr val="333333"/>
+            </a:solidFill>
+          </a:ln>
+          <a:effectLst/>
+        </p:spPr>
+        <p:style>
+          <a:lnRef idx="1">
+            <a:schemeClr val="accent1"/>
+          </a:lnRef>
+          <a:fillRef idx="3">
+            <a:schemeClr val="accent1"/>
+          </a:fillRef>
+          <a:effectRef idx="2">
+            <a:schemeClr val="accent1"/>
+          </a:effectRef>
+          <a:fontRef idx="minor">
+            <a:schemeClr val="lt1"/>
+          </a:fontRef>
+        </p:style>
+        <p:txBody>
+          <a:bodyPr rtlCol="0" anchor="ctr"/>
+          <a:lstStyle/>
+          <a:p>
+            <a:pPr algn="ctr"/>
+          </a:p>
+        </p:txBody>
+      </p:sp>
+      <p:sp>
+        <p:nvSpPr>
+          <p:cNvPr id="222" name="Rectangle 221"/>
+          <p:cNvSpPr/>
+          <p:nvPr/>
+        </p:nvSpPr>
+        <p:spPr>
+          <a:xfrm>
+            <a:off x="4553712" y="1069848"/>
+            <a:ext cx="2696566" cy="37130"/>
+          </a:xfrm>
+          <a:prstGeom prst="rect">
+            <a:avLst/>
+          </a:prstGeom>
+          <a:solidFill>
+            <a:srgbClr val="1F5B82"/>
+          </a:solidFill>
+          <a:ln w="1905">
+            <a:solidFill>
+              <a:srgbClr val="333333"/>
+            </a:solidFill>
+          </a:ln>
+          <a:effectLst/>
+        </p:spPr>
+        <p:style>
+          <a:lnRef idx="1">
+            <a:schemeClr val="accent1"/>
+          </a:lnRef>
+          <a:fillRef idx="3">
+            <a:schemeClr val="accent1"/>
+          </a:fillRef>
+          <a:effectRef idx="2">
+            <a:schemeClr val="accent1"/>
+          </a:effectRef>
+          <a:fontRef idx="minor">
+            <a:schemeClr val="lt1"/>
+          </a:fontRef>
+        </p:style>
+        <p:txBody>
+          <a:bodyPr rtlCol="0" anchor="ctr"/>
+          <a:lstStyle/>
+          <a:p>
+            <a:pPr algn="ctr"/>
+          </a:p>
+        </p:txBody>
+      </p:sp>
+      <p:sp>
+        <p:nvSpPr>
+          <p:cNvPr id="223" name="Rectangle 222"/>
+          <p:cNvSpPr/>
+          <p:nvPr/>
+        </p:nvSpPr>
+        <p:spPr>
+          <a:xfrm>
+            <a:off x="4553712" y="1125266"/>
+            <a:ext cx="2696566" cy="37130"/>
+          </a:xfrm>
+          <a:prstGeom prst="rect">
+            <a:avLst/>
+          </a:prstGeom>
+          <a:solidFill>
+            <a:srgbClr val="888888"/>
+          </a:solidFill>
+          <a:ln w="1905">
+            <a:solidFill>
+              <a:srgbClr val="333333"/>
+            </a:solidFill>
+          </a:ln>
+          <a:effectLst/>
+        </p:spPr>
+        <p:style>
+          <a:lnRef idx="1">
+            <a:schemeClr val="accent1"/>
+          </a:lnRef>
+          <a:fillRef idx="3">
+            <a:schemeClr val="accent1"/>
+          </a:fillRef>
+          <a:effectRef idx="2">
+            <a:schemeClr val="accent1"/>
+          </a:effectRef>
+          <a:fontRef idx="minor">
+            <a:schemeClr val="lt1"/>
+          </a:fontRef>
+        </p:style>
+        <p:txBody>
+          <a:bodyPr rtlCol="0" anchor="ctr"/>
+          <a:lstStyle/>
+          <a:p>
+            <a:pPr algn="ctr"/>
+          </a:p>
+        </p:txBody>
+      </p:sp>
+      <p:sp>
+        <p:nvSpPr>
+          <p:cNvPr id="224" name="Rectangle 223"/>
+          <p:cNvSpPr/>
+          <p:nvPr/>
+        </p:nvSpPr>
+        <p:spPr>
+          <a:xfrm>
+            <a:off x="4553712" y="1180684"/>
+            <a:ext cx="2072640" cy="37130"/>
+          </a:xfrm>
+          <a:prstGeom prst="rect">
+            <a:avLst/>
+          </a:prstGeom>
+          <a:solidFill>
+            <a:srgbClr val="D4A300"/>
+          </a:solidFill>
+          <a:ln w="1905">
+            <a:solidFill>
+              <a:srgbClr val="333333"/>
+            </a:solidFill>
+          </a:ln>
+          <a:effectLst/>
+        </p:spPr>
+        <p:style>
+          <a:lnRef idx="1">
+            <a:schemeClr val="accent1"/>
+          </a:lnRef>
+          <a:fillRef idx="3">
+            <a:schemeClr val="accent1"/>
+          </a:fillRef>
+          <a:effectRef idx="2">
+            <a:schemeClr val="accent1"/>
+          </a:effectRef>
+          <a:fontRef idx="minor">
+            <a:schemeClr val="lt1"/>
+          </a:fontRef>
+        </p:style>
+        <p:txBody>
+          <a:bodyPr rtlCol="0" anchor="ctr"/>
+          <a:lstStyle/>
+          <a:p>
+            <a:pPr algn="ctr"/>
+          </a:p>
+        </p:txBody>
+      </p:sp>
+      <p:sp>
+        <p:nvSpPr>
+          <p:cNvPr id="225" name="Rectangle 224"/>
+          <p:cNvSpPr/>
+          <p:nvPr/>
+        </p:nvSpPr>
+        <p:spPr>
+          <a:xfrm>
+            <a:off x="4553712" y="1252728"/>
+            <a:ext cx="2696566" cy="37130"/>
+          </a:xfrm>
+          <a:prstGeom prst="rect">
+            <a:avLst/>
+          </a:prstGeom>
+          <a:solidFill>
+            <a:srgbClr val="1F5B82"/>
+          </a:solidFill>
+          <a:ln w="1905">
+            <a:solidFill>
+              <a:srgbClr val="333333"/>
+            </a:solidFill>
+          </a:ln>
+          <a:effectLst/>
+        </p:spPr>
+        <p:style>
+          <a:lnRef idx="1">
+            <a:schemeClr val="accent1"/>
+          </a:lnRef>
+          <a:fillRef idx="3">
+            <a:schemeClr val="accent1"/>
+          </a:fillRef>
+          <a:effectRef idx="2">
+            <a:schemeClr val="accent1"/>
+          </a:effectRef>
+          <a:fontRef idx="minor">
+            <a:schemeClr val="lt1"/>
+          </a:fontRef>
+        </p:style>
+        <p:txBody>
+          <a:bodyPr rtlCol="0" anchor="ctr"/>
+          <a:lstStyle/>
+          <a:p>
+            <a:pPr algn="ctr"/>
+          </a:p>
+        </p:txBody>
+      </p:sp>
+      <p:sp>
+        <p:nvSpPr>
+          <p:cNvPr id="226" name="Rectangle 225"/>
+          <p:cNvSpPr/>
+          <p:nvPr/>
+        </p:nvSpPr>
+        <p:spPr>
+          <a:xfrm>
+            <a:off x="4553712" y="1308146"/>
+            <a:ext cx="2072640" cy="37130"/>
+          </a:xfrm>
+          <a:prstGeom prst="rect">
+            <a:avLst/>
+          </a:prstGeom>
+          <a:solidFill>
+            <a:srgbClr val="888888"/>
+          </a:solidFill>
+          <a:ln w="1905">
+            <a:solidFill>
+              <a:srgbClr val="333333"/>
+            </a:solidFill>
+          </a:ln>
+          <a:effectLst/>
+        </p:spPr>
+        <p:style>
+          <a:lnRef idx="1">
+            <a:schemeClr val="accent1"/>
+          </a:lnRef>
+          <a:fillRef idx="3">
+            <a:schemeClr val="accent1"/>
+          </a:fillRef>
+          <a:effectRef idx="2">
+            <a:schemeClr val="accent1"/>
+          </a:effectRef>
+          <a:fontRef idx="minor">
+            <a:schemeClr val="lt1"/>
+          </a:fontRef>
+        </p:style>
+        <p:txBody>
+          <a:bodyPr rtlCol="0" anchor="ctr"/>
+          <a:lstStyle/>
+          <a:p>
+            <a:pPr algn="ctr"/>
+          </a:p>
+        </p:txBody>
+      </p:sp>
+      <p:sp>
+        <p:nvSpPr>
+          <p:cNvPr id="227" name="Rectangle 226"/>
+          <p:cNvSpPr/>
+          <p:nvPr/>
+        </p:nvSpPr>
+        <p:spPr>
+          <a:xfrm>
+            <a:off x="4553712" y="1363564"/>
+            <a:ext cx="387763" cy="37130"/>
+          </a:xfrm>
+          <a:prstGeom prst="rect">
+            <a:avLst/>
+          </a:prstGeom>
+          <a:solidFill>
+            <a:srgbClr val="D4A300"/>
+          </a:solidFill>
+          <a:ln w="1905">
+            <a:solidFill>
+              <a:srgbClr val="333333"/>
+            </a:solidFill>
+          </a:ln>
+          <a:effectLst/>
+        </p:spPr>
+        <p:style>
+          <a:lnRef idx="1">
+            <a:schemeClr val="accent1"/>
+          </a:lnRef>
+          <a:fillRef idx="3">
+            <a:schemeClr val="accent1"/>
+          </a:fillRef>
+          <a:effectRef idx="2">
+            <a:schemeClr val="accent1"/>
+          </a:effectRef>
+          <a:fontRef idx="minor">
+            <a:schemeClr val="lt1"/>
+          </a:fontRef>
+        </p:style>
+        <p:txBody>
+          <a:bodyPr rtlCol="0" anchor="ctr"/>
+          <a:lstStyle/>
+          <a:p>
+            <a:pPr algn="ctr"/>
+          </a:p>
+        </p:txBody>
+      </p:sp>
+      <p:sp>
+        <p:nvSpPr>
+          <p:cNvPr id="228" name="Rectangle 227"/>
+          <p:cNvSpPr/>
+          <p:nvPr/>
+        </p:nvSpPr>
+        <p:spPr>
+          <a:xfrm>
+            <a:off x="4553712" y="1435607"/>
+            <a:ext cx="2696566" cy="37130"/>
+          </a:xfrm>
+          <a:prstGeom prst="rect">
+            <a:avLst/>
+          </a:prstGeom>
+          <a:solidFill>
+            <a:srgbClr val="1F5B82"/>
+          </a:solidFill>
+          <a:ln w="1905">
+            <a:solidFill>
+              <a:srgbClr val="333333"/>
+            </a:solidFill>
+          </a:ln>
+          <a:effectLst/>
+        </p:spPr>
+        <p:style>
+          <a:lnRef idx="1">
+            <a:schemeClr val="accent1"/>
+          </a:lnRef>
+          <a:fillRef idx="3">
+            <a:schemeClr val="accent1"/>
+          </a:fillRef>
+          <a:effectRef idx="2">
+            <a:schemeClr val="accent1"/>
+          </a:effectRef>
+          <a:fontRef idx="minor">
+            <a:schemeClr val="lt1"/>
+          </a:fontRef>
+        </p:style>
+        <p:txBody>
+          <a:bodyPr rtlCol="0" anchor="ctr"/>
+          <a:lstStyle/>
+          <a:p>
+            <a:pPr algn="ctr"/>
+          </a:p>
+        </p:txBody>
+      </p:sp>
+      <p:sp>
+        <p:nvSpPr>
+          <p:cNvPr id="229" name="Rectangle 228"/>
+          <p:cNvSpPr/>
+          <p:nvPr/>
+        </p:nvSpPr>
+        <p:spPr>
+          <a:xfrm>
+            <a:off x="4553712" y="1491026"/>
+            <a:ext cx="2696566" cy="37130"/>
+          </a:xfrm>
+          <a:prstGeom prst="rect">
+            <a:avLst/>
+          </a:prstGeom>
+          <a:solidFill>
+            <a:srgbClr val="888888"/>
+          </a:solidFill>
+          <a:ln w="1905">
+            <a:solidFill>
+              <a:srgbClr val="333333"/>
+            </a:solidFill>
+          </a:ln>
+          <a:effectLst/>
+        </p:spPr>
+        <p:style>
+          <a:lnRef idx="1">
+            <a:schemeClr val="accent1"/>
+          </a:lnRef>
+          <a:fillRef idx="3">
+            <a:schemeClr val="accent1"/>
+          </a:fillRef>
+          <a:effectRef idx="2">
+            <a:schemeClr val="accent1"/>
+          </a:effectRef>
+          <a:fontRef idx="minor">
+            <a:schemeClr val="lt1"/>
+          </a:fontRef>
+        </p:style>
+        <p:txBody>
+          <a:bodyPr rtlCol="0" anchor="ctr"/>
+          <a:lstStyle/>
+          <a:p>
+            <a:pPr algn="ctr"/>
+          </a:p>
+        </p:txBody>
+      </p:sp>
+      <p:sp>
+        <p:nvSpPr>
+          <p:cNvPr id="230" name="Rectangle 229"/>
+          <p:cNvSpPr/>
+          <p:nvPr/>
+        </p:nvSpPr>
+        <p:spPr>
+          <a:xfrm>
+            <a:off x="4553712" y="1546444"/>
+            <a:ext cx="1448713" cy="37130"/>
+          </a:xfrm>
+          <a:prstGeom prst="rect">
+            <a:avLst/>
+          </a:prstGeom>
+          <a:solidFill>
+            <a:srgbClr val="D4A300"/>
+          </a:solidFill>
+          <a:ln w="1905">
+            <a:solidFill>
+              <a:srgbClr val="333333"/>
+            </a:solidFill>
+          </a:ln>
+          <a:effectLst/>
+        </p:spPr>
+        <p:style>
+          <a:lnRef idx="1">
+            <a:schemeClr val="accent1"/>
+          </a:lnRef>
+          <a:fillRef idx="3">
+            <a:schemeClr val="accent1"/>
+          </a:fillRef>
+          <a:effectRef idx="2">
+            <a:schemeClr val="accent1"/>
+          </a:effectRef>
+          <a:fontRef idx="minor">
+            <a:schemeClr val="lt1"/>
+          </a:fontRef>
+        </p:style>
+        <p:txBody>
+          <a:bodyPr rtlCol="0" anchor="ctr"/>
+          <a:lstStyle/>
+          <a:p>
+            <a:pPr algn="ctr"/>
+          </a:p>
+        </p:txBody>
+      </p:sp>
+      <p:sp>
+        <p:nvSpPr>
+          <p:cNvPr id="231" name="Rectangle 230"/>
+          <p:cNvSpPr/>
+          <p:nvPr/>
+        </p:nvSpPr>
+        <p:spPr>
+          <a:xfrm>
+            <a:off x="4553712" y="1618488"/>
+            <a:ext cx="2696566" cy="37130"/>
+          </a:xfrm>
+          <a:prstGeom prst="rect">
+            <a:avLst/>
+          </a:prstGeom>
+          <a:solidFill>
+            <a:srgbClr val="1F5B82"/>
+          </a:solidFill>
+          <a:ln w="1905">
+            <a:solidFill>
+              <a:srgbClr val="333333"/>
+            </a:solidFill>
+          </a:ln>
+          <a:effectLst/>
+        </p:spPr>
+        <p:style>
+          <a:lnRef idx="1">
+            <a:schemeClr val="accent1"/>
+          </a:lnRef>
+          <a:fillRef idx="3">
+            <a:schemeClr val="accent1"/>
+          </a:fillRef>
+          <a:effectRef idx="2">
+            <a:schemeClr val="accent1"/>
+          </a:effectRef>
+          <a:fontRef idx="minor">
+            <a:schemeClr val="lt1"/>
+          </a:fontRef>
+        </p:style>
+        <p:txBody>
+          <a:bodyPr rtlCol="0" anchor="ctr"/>
+          <a:lstStyle/>
+          <a:p>
+            <a:pPr algn="ctr"/>
+          </a:p>
+        </p:txBody>
+      </p:sp>
+      <p:sp>
+        <p:nvSpPr>
+          <p:cNvPr id="232" name="Rectangle 231"/>
+          <p:cNvSpPr/>
+          <p:nvPr/>
+        </p:nvSpPr>
+        <p:spPr>
+          <a:xfrm>
+            <a:off x="4553712" y="1673906"/>
+            <a:ext cx="2072640" cy="37130"/>
+          </a:xfrm>
+          <a:prstGeom prst="rect">
+            <a:avLst/>
+          </a:prstGeom>
+          <a:solidFill>
+            <a:srgbClr val="888888"/>
+          </a:solidFill>
+          <a:ln w="1905">
+            <a:solidFill>
+              <a:srgbClr val="333333"/>
+            </a:solidFill>
+          </a:ln>
+          <a:effectLst/>
+        </p:spPr>
+        <p:style>
+          <a:lnRef idx="1">
+            <a:schemeClr val="accent1"/>
+          </a:lnRef>
+          <a:fillRef idx="3">
+            <a:schemeClr val="accent1"/>
+          </a:fillRef>
+          <a:effectRef idx="2">
+            <a:schemeClr val="accent1"/>
+          </a:effectRef>
+          <a:fontRef idx="minor">
+            <a:schemeClr val="lt1"/>
+          </a:fontRef>
+        </p:style>
+        <p:txBody>
+          <a:bodyPr rtlCol="0" anchor="ctr"/>
+          <a:lstStyle/>
+          <a:p>
+            <a:pPr algn="ctr"/>
+          </a:p>
+        </p:txBody>
+      </p:sp>
+      <p:sp>
+        <p:nvSpPr>
+          <p:cNvPr id="233" name="Rectangle 232"/>
+          <p:cNvSpPr/>
+          <p:nvPr/>
+        </p:nvSpPr>
+        <p:spPr>
+          <a:xfrm>
+            <a:off x="4553712" y="1729324"/>
+            <a:ext cx="623926" cy="37130"/>
+          </a:xfrm>
+          <a:prstGeom prst="rect">
+            <a:avLst/>
+          </a:prstGeom>
+          <a:solidFill>
+            <a:srgbClr val="D4A300"/>
+          </a:solidFill>
+          <a:ln w="1905">
+            <a:solidFill>
+              <a:srgbClr val="333333"/>
+            </a:solidFill>
+          </a:ln>
+          <a:effectLst/>
+        </p:spPr>
+        <p:style>
+          <a:lnRef idx="1">
+            <a:schemeClr val="accent1"/>
+          </a:lnRef>
+          <a:fillRef idx="3">
+            <a:schemeClr val="accent1"/>
+          </a:fillRef>
+          <a:effectRef idx="2">
+            <a:schemeClr val="accent1"/>
+          </a:effectRef>
+          <a:fontRef idx="minor">
+            <a:schemeClr val="lt1"/>
+          </a:fontRef>
+        </p:style>
+        <p:txBody>
+          <a:bodyPr rtlCol="0" anchor="ctr"/>
+          <a:lstStyle/>
+          <a:p>
+            <a:pPr algn="ctr"/>
+          </a:p>
+        </p:txBody>
+      </p:sp>
+      <p:sp>
+        <p:nvSpPr>
+          <p:cNvPr id="234" name="Rectangle 233"/>
+          <p:cNvSpPr/>
+          <p:nvPr/>
+        </p:nvSpPr>
+        <p:spPr>
+          <a:xfrm>
+            <a:off x="4553712" y="1801367"/>
+            <a:ext cx="2696566" cy="37130"/>
+          </a:xfrm>
+          <a:prstGeom prst="rect">
+            <a:avLst/>
+          </a:prstGeom>
+          <a:solidFill>
+            <a:srgbClr val="1F5B82"/>
+          </a:solidFill>
+          <a:ln w="1905">
+            <a:solidFill>
+              <a:srgbClr val="333333"/>
+            </a:solidFill>
+          </a:ln>
+          <a:effectLst/>
+        </p:spPr>
+        <p:style>
+          <a:lnRef idx="1">
+            <a:schemeClr val="accent1"/>
+          </a:lnRef>
+          <a:fillRef idx="3">
+            <a:schemeClr val="accent1"/>
+          </a:fillRef>
+          <a:effectRef idx="2">
+            <a:schemeClr val="accent1"/>
+          </a:effectRef>
+          <a:fontRef idx="minor">
+            <a:schemeClr val="lt1"/>
+          </a:fontRef>
+        </p:style>
+        <p:txBody>
+          <a:bodyPr rtlCol="0" anchor="ctr"/>
+          <a:lstStyle/>
+          <a:p>
+            <a:pPr algn="ctr"/>
+          </a:p>
+        </p:txBody>
+      </p:sp>
+      <p:sp>
+        <p:nvSpPr>
+          <p:cNvPr id="235" name="Rectangle 234"/>
+          <p:cNvSpPr/>
+          <p:nvPr/>
+        </p:nvSpPr>
+        <p:spPr>
+          <a:xfrm>
+            <a:off x="4553712" y="1856786"/>
+            <a:ext cx="944982" cy="37130"/>
+          </a:xfrm>
+          <a:prstGeom prst="rect">
+            <a:avLst/>
+          </a:prstGeom>
+          <a:solidFill>
+            <a:srgbClr val="888888"/>
+          </a:solidFill>
+          <a:ln w="1905">
+            <a:solidFill>
+              <a:srgbClr val="333333"/>
+            </a:solidFill>
+          </a:ln>
+          <a:effectLst/>
+        </p:spPr>
+        <p:style>
+          <a:lnRef idx="1">
+            <a:schemeClr val="accent1"/>
+          </a:lnRef>
+          <a:fillRef idx="3">
+            <a:schemeClr val="accent1"/>
+          </a:fillRef>
+          <a:effectRef idx="2">
+            <a:schemeClr val="accent1"/>
+          </a:effectRef>
+          <a:fontRef idx="minor">
+            <a:schemeClr val="lt1"/>
+          </a:fontRef>
+        </p:style>
+        <p:txBody>
+          <a:bodyPr rtlCol="0" anchor="ctr"/>
+          <a:lstStyle/>
+          <a:p>
+            <a:pPr algn="ctr"/>
+          </a:p>
+        </p:txBody>
+      </p:sp>
+      <p:sp>
+        <p:nvSpPr>
+          <p:cNvPr id="236" name="Rectangle 235"/>
+          <p:cNvSpPr/>
+          <p:nvPr/>
+        </p:nvSpPr>
+        <p:spPr>
+          <a:xfrm>
+            <a:off x="4553712" y="1912204"/>
+            <a:ext cx="387763" cy="37130"/>
+          </a:xfrm>
+          <a:prstGeom prst="rect">
+            <a:avLst/>
+          </a:prstGeom>
+          <a:solidFill>
+            <a:srgbClr val="D4A300"/>
+          </a:solidFill>
+          <a:ln w="1905">
+            <a:solidFill>
+              <a:srgbClr val="333333"/>
+            </a:solidFill>
+          </a:ln>
+          <a:effectLst/>
+        </p:spPr>
+        <p:style>
+          <a:lnRef idx="1">
+            <a:schemeClr val="accent1"/>
+          </a:lnRef>
+          <a:fillRef idx="3">
+            <a:schemeClr val="accent1"/>
+          </a:fillRef>
+          <a:effectRef idx="2">
+            <a:schemeClr val="accent1"/>
+          </a:effectRef>
+          <a:fontRef idx="minor">
+            <a:schemeClr val="lt1"/>
+          </a:fontRef>
+        </p:style>
+        <p:txBody>
+          <a:bodyPr rtlCol="0" anchor="ctr"/>
+          <a:lstStyle/>
+          <a:p>
+            <a:pPr algn="ctr"/>
+          </a:p>
+        </p:txBody>
+      </p:sp>
+      <p:sp>
+        <p:nvSpPr>
+          <p:cNvPr id="237" name="Rectangle 236"/>
+          <p:cNvSpPr/>
+          <p:nvPr/>
+        </p:nvSpPr>
+        <p:spPr>
+          <a:xfrm>
+            <a:off x="4553712" y="1984248"/>
+            <a:ext cx="2072640" cy="37130"/>
+          </a:xfrm>
+          <a:prstGeom prst="rect">
+            <a:avLst/>
+          </a:prstGeom>
+          <a:solidFill>
+            <a:srgbClr val="1F5B82"/>
+          </a:solidFill>
+          <a:ln w="1905">
+            <a:solidFill>
+              <a:srgbClr val="333333"/>
+            </a:solidFill>
+          </a:ln>
+          <a:effectLst/>
+        </p:spPr>
+        <p:style>
+          <a:lnRef idx="1">
+            <a:schemeClr val="accent1"/>
+          </a:lnRef>
+          <a:fillRef idx="3">
+            <a:schemeClr val="accent1"/>
+          </a:fillRef>
+          <a:effectRef idx="2">
+            <a:schemeClr val="accent1"/>
+          </a:effectRef>
+          <a:fontRef idx="minor">
+            <a:schemeClr val="lt1"/>
+          </a:fontRef>
+        </p:style>
+        <p:txBody>
+          <a:bodyPr rtlCol="0" anchor="ctr"/>
+          <a:lstStyle/>
+          <a:p>
+            <a:pPr algn="ctr"/>
+          </a:p>
+        </p:txBody>
+      </p:sp>
+      <p:sp>
+        <p:nvSpPr>
+          <p:cNvPr id="238" name="Rectangle 237"/>
+          <p:cNvSpPr/>
+          <p:nvPr/>
+        </p:nvSpPr>
+        <p:spPr>
+          <a:xfrm>
+            <a:off x="4553712" y="2039666"/>
+            <a:ext cx="200859" cy="37130"/>
+          </a:xfrm>
+          <a:prstGeom prst="rect">
+            <a:avLst/>
+          </a:prstGeom>
+          <a:solidFill>
+            <a:srgbClr val="888888"/>
+          </a:solidFill>
+          <a:ln w="1905">
+            <a:solidFill>
+              <a:srgbClr val="333333"/>
+            </a:solidFill>
+          </a:ln>
+          <a:effectLst/>
+        </p:spPr>
+        <p:style>
+          <a:lnRef idx="1">
+            <a:schemeClr val="accent1"/>
+          </a:lnRef>
+          <a:fillRef idx="3">
+            <a:schemeClr val="accent1"/>
+          </a:fillRef>
+          <a:effectRef idx="2">
+            <a:schemeClr val="accent1"/>
+          </a:effectRef>
+          <a:fontRef idx="minor">
+            <a:schemeClr val="lt1"/>
+          </a:fontRef>
+        </p:style>
+        <p:txBody>
+          <a:bodyPr rtlCol="0" anchor="ctr"/>
+          <a:lstStyle/>
+          <a:p>
+            <a:pPr algn="ctr"/>
+          </a:p>
+        </p:txBody>
+      </p:sp>
+      <p:sp>
+        <p:nvSpPr>
+          <p:cNvPr id="239" name="Rectangle 238"/>
+          <p:cNvSpPr/>
+          <p:nvPr/>
+        </p:nvSpPr>
+        <p:spPr>
+          <a:xfrm>
+            <a:off x="4553712" y="2095084"/>
+            <a:ext cx="200859" cy="37130"/>
+          </a:xfrm>
+          <a:prstGeom prst="rect">
+            <a:avLst/>
+          </a:prstGeom>
+          <a:solidFill>
+            <a:srgbClr val="D4A300"/>
+          </a:solidFill>
+          <a:ln w="1905">
+            <a:solidFill>
+              <a:srgbClr val="333333"/>
+            </a:solidFill>
+          </a:ln>
+          <a:effectLst/>
+        </p:spPr>
+        <p:style>
+          <a:lnRef idx="1">
+            <a:schemeClr val="accent1"/>
+          </a:lnRef>
+          <a:fillRef idx="3">
+            <a:schemeClr val="accent1"/>
+          </a:fillRef>
+          <a:effectRef idx="2">
+            <a:schemeClr val="accent1"/>
+          </a:effectRef>
+          <a:fontRef idx="minor">
+            <a:schemeClr val="lt1"/>
+          </a:fontRef>
+        </p:style>
+        <p:txBody>
+          <a:bodyPr rtlCol="0" anchor="ctr"/>
+          <a:lstStyle/>
+          <a:p>
+            <a:pPr algn="ctr"/>
+          </a:p>
+        </p:txBody>
+      </p:sp>
+      <p:sp>
+        <p:nvSpPr>
+          <p:cNvPr id="240" name="Rectangle 239"/>
+          <p:cNvSpPr/>
+          <p:nvPr/>
+        </p:nvSpPr>
+        <p:spPr>
+          <a:xfrm>
+            <a:off x="4553712" y="2167127"/>
+            <a:ext cx="2072640" cy="37130"/>
+          </a:xfrm>
+          <a:prstGeom prst="rect">
+            <a:avLst/>
+          </a:prstGeom>
+          <a:solidFill>
+            <a:srgbClr val="1F5B82"/>
+          </a:solidFill>
+          <a:ln w="1905">
+            <a:solidFill>
+              <a:srgbClr val="333333"/>
+            </a:solidFill>
+          </a:ln>
+          <a:effectLst/>
+        </p:spPr>
+        <p:style>
+          <a:lnRef idx="1">
+            <a:schemeClr val="accent1"/>
+          </a:lnRef>
+          <a:fillRef idx="3">
+            <a:schemeClr val="accent1"/>
+          </a:fillRef>
+          <a:effectRef idx="2">
+            <a:schemeClr val="accent1"/>
+          </a:effectRef>
+          <a:fontRef idx="minor">
+            <a:schemeClr val="lt1"/>
+          </a:fontRef>
+        </p:style>
+        <p:txBody>
+          <a:bodyPr rtlCol="0" anchor="ctr"/>
+          <a:lstStyle/>
+          <a:p>
+            <a:pPr algn="ctr"/>
+          </a:p>
+        </p:txBody>
+      </p:sp>
+      <p:sp>
+        <p:nvSpPr>
+          <p:cNvPr id="241" name="Rectangle 240"/>
+          <p:cNvSpPr/>
+          <p:nvPr/>
+        </p:nvSpPr>
+        <p:spPr>
+          <a:xfrm>
+            <a:off x="4553712" y="2222546"/>
+            <a:ext cx="2696566" cy="37130"/>
+          </a:xfrm>
+          <a:prstGeom prst="rect">
+            <a:avLst/>
+          </a:prstGeom>
+          <a:solidFill>
+            <a:srgbClr val="888888"/>
+          </a:solidFill>
+          <a:ln w="1905">
+            <a:solidFill>
+              <a:srgbClr val="333333"/>
+            </a:solidFill>
+          </a:ln>
+          <a:effectLst/>
+        </p:spPr>
+        <p:style>
+          <a:lnRef idx="1">
+            <a:schemeClr val="accent1"/>
+          </a:lnRef>
+          <a:fillRef idx="3">
+            <a:schemeClr val="accent1"/>
+          </a:fillRef>
+          <a:effectRef idx="2">
+            <a:schemeClr val="accent1"/>
+          </a:effectRef>
+          <a:fontRef idx="minor">
+            <a:schemeClr val="lt1"/>
+          </a:fontRef>
+        </p:style>
+        <p:txBody>
+          <a:bodyPr rtlCol="0" anchor="ctr"/>
+          <a:lstStyle/>
+          <a:p>
+            <a:pPr algn="ctr"/>
+          </a:p>
+        </p:txBody>
+      </p:sp>
+      <p:sp>
+        <p:nvSpPr>
+          <p:cNvPr id="242" name="Rectangle 241"/>
+          <p:cNvSpPr/>
+          <p:nvPr/>
+        </p:nvSpPr>
+        <p:spPr>
+          <a:xfrm>
+            <a:off x="4553712" y="2277964"/>
+            <a:ext cx="623926" cy="37130"/>
+          </a:xfrm>
+          <a:prstGeom prst="rect">
+            <a:avLst/>
+          </a:prstGeom>
+          <a:solidFill>
+            <a:srgbClr val="D4A300"/>
+          </a:solidFill>
+          <a:ln w="1905">
+            <a:solidFill>
+              <a:srgbClr val="333333"/>
+            </a:solidFill>
+          </a:ln>
+          <a:effectLst/>
+        </p:spPr>
+        <p:style>
+          <a:lnRef idx="1">
+            <a:schemeClr val="accent1"/>
+          </a:lnRef>
+          <a:fillRef idx="3">
+            <a:schemeClr val="accent1"/>
+          </a:fillRef>
+          <a:effectRef idx="2">
+            <a:schemeClr val="accent1"/>
+          </a:effectRef>
+          <a:fontRef idx="minor">
+            <a:schemeClr val="lt1"/>
+          </a:fontRef>
+        </p:style>
+        <p:txBody>
+          <a:bodyPr rtlCol="0" anchor="ctr"/>
+          <a:lstStyle/>
+          <a:p>
+            <a:pPr algn="ctr"/>
+          </a:p>
+        </p:txBody>
+      </p:sp>
+      <p:sp>
+        <p:nvSpPr>
+          <p:cNvPr id="243" name="Rectangle 242"/>
+          <p:cNvSpPr/>
+          <p:nvPr/>
+        </p:nvSpPr>
+        <p:spPr>
+          <a:xfrm>
+            <a:off x="4553712" y="2350008"/>
+            <a:ext cx="2072640" cy="37130"/>
+          </a:xfrm>
+          <a:prstGeom prst="rect">
+            <a:avLst/>
+          </a:prstGeom>
+          <a:solidFill>
+            <a:srgbClr val="1F5B82"/>
+          </a:solidFill>
+          <a:ln w="1905">
+            <a:solidFill>
+              <a:srgbClr val="333333"/>
+            </a:solidFill>
+          </a:ln>
+          <a:effectLst/>
+        </p:spPr>
+        <p:style>
+          <a:lnRef idx="1">
+            <a:schemeClr val="accent1"/>
+          </a:lnRef>
+          <a:fillRef idx="3">
+            <a:schemeClr val="accent1"/>
+          </a:fillRef>
+          <a:effectRef idx="2">
+            <a:schemeClr val="accent1"/>
+          </a:effectRef>
+          <a:fontRef idx="minor">
+            <a:schemeClr val="lt1"/>
+          </a:fontRef>
+        </p:style>
+        <p:txBody>
+          <a:bodyPr rtlCol="0" anchor="ctr"/>
+          <a:lstStyle/>
+          <a:p>
+            <a:pPr algn="ctr"/>
+          </a:p>
+        </p:txBody>
+      </p:sp>
+      <p:sp>
+        <p:nvSpPr>
+          <p:cNvPr id="244" name="Rectangle 243"/>
+          <p:cNvSpPr/>
+          <p:nvPr/>
+        </p:nvSpPr>
+        <p:spPr>
+          <a:xfrm>
+            <a:off x="4553712" y="2405426"/>
+            <a:ext cx="2696566" cy="37130"/>
+          </a:xfrm>
+          <a:prstGeom prst="rect">
+            <a:avLst/>
+          </a:prstGeom>
+          <a:solidFill>
+            <a:srgbClr val="888888"/>
+          </a:solidFill>
+          <a:ln w="1905">
+            <a:solidFill>
+              <a:srgbClr val="333333"/>
+            </a:solidFill>
+          </a:ln>
+          <a:effectLst/>
+        </p:spPr>
+        <p:style>
+          <a:lnRef idx="1">
+            <a:schemeClr val="accent1"/>
+          </a:lnRef>
+          <a:fillRef idx="3">
+            <a:schemeClr val="accent1"/>
+          </a:fillRef>
+          <a:effectRef idx="2">
+            <a:schemeClr val="accent1"/>
+          </a:effectRef>
+          <a:fontRef idx="minor">
+            <a:schemeClr val="lt1"/>
+          </a:fontRef>
+        </p:style>
+        <p:txBody>
+          <a:bodyPr rtlCol="0" anchor="ctr"/>
+          <a:lstStyle/>
+          <a:p>
+            <a:pPr algn="ctr"/>
+          </a:p>
+        </p:txBody>
+      </p:sp>
+      <p:sp>
+        <p:nvSpPr>
+          <p:cNvPr id="245" name="Rectangle 244"/>
+          <p:cNvSpPr/>
+          <p:nvPr/>
+        </p:nvSpPr>
+        <p:spPr>
+          <a:xfrm>
+            <a:off x="4553712" y="2460844"/>
+            <a:ext cx="623926" cy="37130"/>
+          </a:xfrm>
+          <a:prstGeom prst="rect">
+            <a:avLst/>
+          </a:prstGeom>
+          <a:solidFill>
+            <a:srgbClr val="D4A300"/>
+          </a:solidFill>
+          <a:ln w="1905">
+            <a:solidFill>
+              <a:srgbClr val="333333"/>
+            </a:solidFill>
+          </a:ln>
+          <a:effectLst/>
+        </p:spPr>
+        <p:style>
+          <a:lnRef idx="1">
+            <a:schemeClr val="accent1"/>
+          </a:lnRef>
+          <a:fillRef idx="3">
+            <a:schemeClr val="accent1"/>
+          </a:fillRef>
+          <a:effectRef idx="2">
+            <a:schemeClr val="accent1"/>
+          </a:effectRef>
+          <a:fontRef idx="minor">
+            <a:schemeClr val="lt1"/>
+          </a:fontRef>
+        </p:style>
+        <p:txBody>
+          <a:bodyPr rtlCol="0" anchor="ctr"/>
+          <a:lstStyle/>
+          <a:p>
+            <a:pPr algn="ctr"/>
+          </a:p>
+        </p:txBody>
+      </p:sp>
+      <p:sp>
+        <p:nvSpPr>
+          <p:cNvPr id="246" name="Rectangle 245"/>
+          <p:cNvSpPr/>
+          <p:nvPr/>
+        </p:nvSpPr>
+        <p:spPr>
+          <a:xfrm>
+            <a:off x="4553712" y="2532888"/>
+            <a:ext cx="2072640" cy="37130"/>
+          </a:xfrm>
+          <a:prstGeom prst="rect">
+            <a:avLst/>
+          </a:prstGeom>
+          <a:solidFill>
+            <a:srgbClr val="1F5B82"/>
+          </a:solidFill>
+          <a:ln w="1905">
+            <a:solidFill>
+              <a:srgbClr val="333333"/>
+            </a:solidFill>
+          </a:ln>
+          <a:effectLst/>
+        </p:spPr>
+        <p:style>
+          <a:lnRef idx="1">
+            <a:schemeClr val="accent1"/>
+          </a:lnRef>
+          <a:fillRef idx="3">
+            <a:schemeClr val="accent1"/>
+          </a:fillRef>
+          <a:effectRef idx="2">
+            <a:schemeClr val="accent1"/>
+          </a:effectRef>
+          <a:fontRef idx="minor">
+            <a:schemeClr val="lt1"/>
+          </a:fontRef>
+        </p:style>
+        <p:txBody>
+          <a:bodyPr rtlCol="0" anchor="ctr"/>
+          <a:lstStyle/>
+          <a:p>
+            <a:pPr algn="ctr"/>
+          </a:p>
+        </p:txBody>
+      </p:sp>
+      <p:sp>
+        <p:nvSpPr>
+          <p:cNvPr id="247" name="Rectangle 246"/>
+          <p:cNvSpPr/>
+          <p:nvPr/>
+        </p:nvSpPr>
+        <p:spPr>
+          <a:xfrm>
+            <a:off x="4553712" y="2588306"/>
+            <a:ext cx="623926" cy="37130"/>
+          </a:xfrm>
+          <a:prstGeom prst="rect">
+            <a:avLst/>
+          </a:prstGeom>
+          <a:solidFill>
+            <a:srgbClr val="888888"/>
+          </a:solidFill>
+          <a:ln w="1905">
+            <a:solidFill>
+              <a:srgbClr val="333333"/>
+            </a:solidFill>
+          </a:ln>
+          <a:effectLst/>
+        </p:spPr>
+        <p:style>
+          <a:lnRef idx="1">
+            <a:schemeClr val="accent1"/>
+          </a:lnRef>
+          <a:fillRef idx="3">
+            <a:schemeClr val="accent1"/>
+          </a:fillRef>
+          <a:effectRef idx="2">
+            <a:schemeClr val="accent1"/>
+          </a:effectRef>
+          <a:fontRef idx="minor">
+            <a:schemeClr val="lt1"/>
+          </a:fontRef>
+        </p:style>
+        <p:txBody>
+          <a:bodyPr rtlCol="0" anchor="ctr"/>
+          <a:lstStyle/>
+          <a:p>
+            <a:pPr algn="ctr"/>
+          </a:p>
+        </p:txBody>
+      </p:sp>
+      <p:sp>
+        <p:nvSpPr>
+          <p:cNvPr id="248" name="Rectangle 247"/>
+          <p:cNvSpPr/>
+          <p:nvPr/>
+        </p:nvSpPr>
+        <p:spPr>
+          <a:xfrm>
+            <a:off x="4553712" y="2643724"/>
+            <a:ext cx="200859" cy="37130"/>
+          </a:xfrm>
+          <a:prstGeom prst="rect">
+            <a:avLst/>
+          </a:prstGeom>
+          <a:solidFill>
+            <a:srgbClr val="D4A300"/>
+          </a:solidFill>
+          <a:ln w="1905">
+            <a:solidFill>
+              <a:srgbClr val="333333"/>
+            </a:solidFill>
+          </a:ln>
+          <a:effectLst/>
+        </p:spPr>
+        <p:style>
+          <a:lnRef idx="1">
+            <a:schemeClr val="accent1"/>
+          </a:lnRef>
+          <a:fillRef idx="3">
+            <a:schemeClr val="accent1"/>
+          </a:fillRef>
+          <a:effectRef idx="2">
+            <a:schemeClr val="accent1"/>
+          </a:effectRef>
+          <a:fontRef idx="minor">
+            <a:schemeClr val="lt1"/>
+          </a:fontRef>
+        </p:style>
+        <p:txBody>
+          <a:bodyPr rtlCol="0" anchor="ctr"/>
+          <a:lstStyle/>
+          <a:p>
+            <a:pPr algn="ctr"/>
+          </a:p>
+        </p:txBody>
+      </p:sp>
+      <p:sp>
+        <p:nvSpPr>
+          <p:cNvPr id="249" name="Rectangle 248"/>
+          <p:cNvSpPr/>
+          <p:nvPr/>
+        </p:nvSpPr>
+        <p:spPr>
+          <a:xfrm>
+            <a:off x="4553712" y="2715768"/>
+            <a:ext cx="2072640" cy="37130"/>
+          </a:xfrm>
+          <a:prstGeom prst="rect">
+            <a:avLst/>
+          </a:prstGeom>
+          <a:solidFill>
+            <a:srgbClr val="1F5B82"/>
+          </a:solidFill>
+          <a:ln w="1905">
+            <a:solidFill>
+              <a:srgbClr val="333333"/>
+            </a:solidFill>
+          </a:ln>
+          <a:effectLst/>
+        </p:spPr>
+        <p:style>
+          <a:lnRef idx="1">
+            <a:schemeClr val="accent1"/>
+          </a:lnRef>
+          <a:fillRef idx="3">
+            <a:schemeClr val="accent1"/>
+          </a:fillRef>
+          <a:effectRef idx="2">
+            <a:schemeClr val="accent1"/>
+          </a:effectRef>
+          <a:fontRef idx="minor">
+            <a:schemeClr val="lt1"/>
+          </a:fontRef>
+        </p:style>
+        <p:txBody>
+          <a:bodyPr rtlCol="0" anchor="ctr"/>
+          <a:lstStyle/>
+          <a:p>
+            <a:pPr algn="ctr"/>
+          </a:p>
+        </p:txBody>
+      </p:sp>
+      <p:sp>
+        <p:nvSpPr>
+          <p:cNvPr id="250" name="Rectangle 249"/>
+          <p:cNvSpPr/>
+          <p:nvPr/>
+        </p:nvSpPr>
+        <p:spPr>
+          <a:xfrm>
+            <a:off x="4553712" y="2771186"/>
+            <a:ext cx="2072640" cy="37130"/>
+          </a:xfrm>
+          <a:prstGeom prst="rect">
+            <a:avLst/>
+          </a:prstGeom>
+          <a:solidFill>
+            <a:srgbClr val="888888"/>
+          </a:solidFill>
+          <a:ln w="1905">
+            <a:solidFill>
+              <a:srgbClr val="333333"/>
+            </a:solidFill>
+          </a:ln>
+          <a:effectLst/>
+        </p:spPr>
+        <p:style>
+          <a:lnRef idx="1">
+            <a:schemeClr val="accent1"/>
+          </a:lnRef>
+          <a:fillRef idx="3">
+            <a:schemeClr val="accent1"/>
+          </a:fillRef>
+          <a:effectRef idx="2">
+            <a:schemeClr val="accent1"/>
+          </a:effectRef>
+          <a:fontRef idx="minor">
+            <a:schemeClr val="lt1"/>
+          </a:fontRef>
+        </p:style>
+        <p:txBody>
+          <a:bodyPr rtlCol="0" anchor="ctr"/>
+          <a:lstStyle/>
+          <a:p>
+            <a:pPr algn="ctr"/>
+          </a:p>
+        </p:txBody>
+      </p:sp>
+      <p:sp>
+        <p:nvSpPr>
+          <p:cNvPr id="251" name="Rectangle 250"/>
+          <p:cNvSpPr/>
+          <p:nvPr/>
+        </p:nvSpPr>
+        <p:spPr>
+          <a:xfrm>
+            <a:off x="4553712" y="2826604"/>
+            <a:ext cx="944982" cy="37130"/>
+          </a:xfrm>
+          <a:prstGeom prst="rect">
+            <a:avLst/>
+          </a:prstGeom>
+          <a:solidFill>
+            <a:srgbClr val="D4A300"/>
+          </a:solidFill>
+          <a:ln w="1905">
+            <a:solidFill>
+              <a:srgbClr val="333333"/>
+            </a:solidFill>
+          </a:ln>
+          <a:effectLst/>
+        </p:spPr>
+        <p:style>
+          <a:lnRef idx="1">
+            <a:schemeClr val="accent1"/>
+          </a:lnRef>
+          <a:fillRef idx="3">
+            <a:schemeClr val="accent1"/>
+          </a:fillRef>
+          <a:effectRef idx="2">
+            <a:schemeClr val="accent1"/>
+          </a:effectRef>
+          <a:fontRef idx="minor">
+            <a:schemeClr val="lt1"/>
+          </a:fontRef>
+        </p:style>
+        <p:txBody>
+          <a:bodyPr rtlCol="0" anchor="ctr"/>
+          <a:lstStyle/>
+          <a:p>
+            <a:pPr algn="ctr"/>
+          </a:p>
+        </p:txBody>
+      </p:sp>
+      <p:sp>
+        <p:nvSpPr>
+          <p:cNvPr id="252" name="Rectangle 251"/>
+          <p:cNvSpPr/>
+          <p:nvPr/>
+        </p:nvSpPr>
+        <p:spPr>
+          <a:xfrm>
+            <a:off x="4553712" y="2898647"/>
+            <a:ext cx="1448713" cy="37130"/>
+          </a:xfrm>
+          <a:prstGeom prst="rect">
+            <a:avLst/>
+          </a:prstGeom>
+          <a:solidFill>
+            <a:srgbClr val="1F5B82"/>
+          </a:solidFill>
+          <a:ln w="1905">
+            <a:solidFill>
+              <a:srgbClr val="333333"/>
+            </a:solidFill>
+          </a:ln>
+          <a:effectLst/>
+        </p:spPr>
+        <p:style>
+          <a:lnRef idx="1">
+            <a:schemeClr val="accent1"/>
+          </a:lnRef>
+          <a:fillRef idx="3">
+            <a:schemeClr val="accent1"/>
+          </a:fillRef>
+          <a:effectRef idx="2">
+            <a:schemeClr val="accent1"/>
+          </a:effectRef>
+          <a:fontRef idx="minor">
+            <a:schemeClr val="lt1"/>
+          </a:fontRef>
+        </p:style>
+        <p:txBody>
+          <a:bodyPr rtlCol="0" anchor="ctr"/>
+          <a:lstStyle/>
+          <a:p>
+            <a:pPr algn="ctr"/>
+          </a:p>
+        </p:txBody>
+      </p:sp>
+      <p:sp>
+        <p:nvSpPr>
+          <p:cNvPr id="253" name="Rectangle 252"/>
+          <p:cNvSpPr/>
+          <p:nvPr/>
+        </p:nvSpPr>
+        <p:spPr>
+          <a:xfrm>
+            <a:off x="4553712" y="2954066"/>
+            <a:ext cx="2072640" cy="37130"/>
+          </a:xfrm>
+          <a:prstGeom prst="rect">
+            <a:avLst/>
+          </a:prstGeom>
+          <a:solidFill>
+            <a:srgbClr val="888888"/>
+          </a:solidFill>
+          <a:ln w="1905">
+            <a:solidFill>
+              <a:srgbClr val="333333"/>
+            </a:solidFill>
+          </a:ln>
+          <a:effectLst/>
+        </p:spPr>
+        <p:style>
+          <a:lnRef idx="1">
+            <a:schemeClr val="accent1"/>
+          </a:lnRef>
+          <a:fillRef idx="3">
+            <a:schemeClr val="accent1"/>
+          </a:fillRef>
+          <a:effectRef idx="2">
+            <a:schemeClr val="accent1"/>
+          </a:effectRef>
+          <a:fontRef idx="minor">
+            <a:schemeClr val="lt1"/>
+          </a:fontRef>
+        </p:style>
+        <p:txBody>
+          <a:bodyPr rtlCol="0" anchor="ctr"/>
+          <a:lstStyle/>
+          <a:p>
+            <a:pPr algn="ctr"/>
+          </a:p>
+        </p:txBody>
+      </p:sp>
+      <p:sp>
+        <p:nvSpPr>
+          <p:cNvPr id="254" name="Rectangle 253"/>
+          <p:cNvSpPr/>
+          <p:nvPr/>
+        </p:nvSpPr>
+        <p:spPr>
+          <a:xfrm>
+            <a:off x="4553712" y="3009484"/>
+            <a:ext cx="623926" cy="37130"/>
+          </a:xfrm>
+          <a:prstGeom prst="rect">
+            <a:avLst/>
+          </a:prstGeom>
+          <a:solidFill>
+            <a:srgbClr val="D4A300"/>
+          </a:solidFill>
+          <a:ln w="1905">
+            <a:solidFill>
+              <a:srgbClr val="333333"/>
+            </a:solidFill>
+          </a:ln>
+          <a:effectLst/>
+        </p:spPr>
+        <p:style>
+          <a:lnRef idx="1">
+            <a:schemeClr val="accent1"/>
+          </a:lnRef>
+          <a:fillRef idx="3">
+            <a:schemeClr val="accent1"/>
+          </a:fillRef>
+          <a:effectRef idx="2">
+            <a:schemeClr val="accent1"/>
+          </a:effectRef>
+          <a:fontRef idx="minor">
+            <a:schemeClr val="lt1"/>
+          </a:fontRef>
+        </p:style>
+        <p:txBody>
+          <a:bodyPr rtlCol="0" anchor="ctr"/>
+          <a:lstStyle/>
+          <a:p>
+            <a:pPr algn="ctr"/>
+          </a:p>
+        </p:txBody>
+      </p:sp>
+      <p:sp>
+        <p:nvSpPr>
+          <p:cNvPr id="255" name="Rectangle 254"/>
+          <p:cNvSpPr/>
+          <p:nvPr/>
+        </p:nvSpPr>
+        <p:spPr>
+          <a:xfrm>
+            <a:off x="4553712" y="3081527"/>
+            <a:ext cx="1448713" cy="37130"/>
+          </a:xfrm>
+          <a:prstGeom prst="rect">
+            <a:avLst/>
+          </a:prstGeom>
+          <a:solidFill>
+            <a:srgbClr val="1F5B82"/>
+          </a:solidFill>
+          <a:ln w="1905">
+            <a:solidFill>
+              <a:srgbClr val="333333"/>
+            </a:solidFill>
+          </a:ln>
+          <a:effectLst/>
+        </p:spPr>
+        <p:style>
+          <a:lnRef idx="1">
+            <a:schemeClr val="accent1"/>
+          </a:lnRef>
+          <a:fillRef idx="3">
+            <a:schemeClr val="accent1"/>
+          </a:fillRef>
+          <a:effectRef idx="2">
+            <a:schemeClr val="accent1"/>
+          </a:effectRef>
+          <a:fontRef idx="minor">
+            <a:schemeClr val="lt1"/>
+          </a:fontRef>
+        </p:style>
+        <p:txBody>
+          <a:bodyPr rtlCol="0" anchor="ctr"/>
+          <a:lstStyle/>
+          <a:p>
+            <a:pPr algn="ctr"/>
+          </a:p>
+        </p:txBody>
+      </p:sp>
+      <p:sp>
+        <p:nvSpPr>
+          <p:cNvPr id="256" name="Rectangle 255"/>
+          <p:cNvSpPr/>
+          <p:nvPr/>
+        </p:nvSpPr>
+        <p:spPr>
+          <a:xfrm>
+            <a:off x="4553712" y="3136946"/>
+            <a:ext cx="623926" cy="37130"/>
+          </a:xfrm>
+          <a:prstGeom prst="rect">
+            <a:avLst/>
+          </a:prstGeom>
+          <a:solidFill>
+            <a:srgbClr val="888888"/>
+          </a:solidFill>
+          <a:ln w="1905">
+            <a:solidFill>
+              <a:srgbClr val="333333"/>
+            </a:solidFill>
+          </a:ln>
+          <a:effectLst/>
+        </p:spPr>
+        <p:style>
+          <a:lnRef idx="1">
+            <a:schemeClr val="accent1"/>
+          </a:lnRef>
+          <a:fillRef idx="3">
+            <a:schemeClr val="accent1"/>
+          </a:fillRef>
+          <a:effectRef idx="2">
+            <a:schemeClr val="accent1"/>
+          </a:effectRef>
+          <a:fontRef idx="minor">
+            <a:schemeClr val="lt1"/>
+          </a:fontRef>
+        </p:style>
+        <p:txBody>
+          <a:bodyPr rtlCol="0" anchor="ctr"/>
+          <a:lstStyle/>
+          <a:p>
+            <a:pPr algn="ctr"/>
+          </a:p>
+        </p:txBody>
+      </p:sp>
+      <p:sp>
+        <p:nvSpPr>
+          <p:cNvPr id="257" name="Rectangle 256"/>
+          <p:cNvSpPr/>
+          <p:nvPr/>
+        </p:nvSpPr>
+        <p:spPr>
+          <a:xfrm>
+            <a:off x="4553712" y="3192364"/>
+            <a:ext cx="200859" cy="37130"/>
+          </a:xfrm>
+          <a:prstGeom prst="rect">
+            <a:avLst/>
+          </a:prstGeom>
+          <a:solidFill>
+            <a:srgbClr val="D4A300"/>
+          </a:solidFill>
+          <a:ln w="1905">
+            <a:solidFill>
+              <a:srgbClr val="333333"/>
+            </a:solidFill>
+          </a:ln>
+          <a:effectLst/>
+        </p:spPr>
+        <p:style>
+          <a:lnRef idx="1">
+            <a:schemeClr val="accent1"/>
+          </a:lnRef>
+          <a:fillRef idx="3">
+            <a:schemeClr val="accent1"/>
+          </a:fillRef>
+          <a:effectRef idx="2">
+            <a:schemeClr val="accent1"/>
+          </a:effectRef>
+          <a:fontRef idx="minor">
+            <a:schemeClr val="lt1"/>
+          </a:fontRef>
+        </p:style>
+        <p:txBody>
+          <a:bodyPr rtlCol="0" anchor="ctr"/>
+          <a:lstStyle/>
+          <a:p>
+            <a:pPr algn="ctr"/>
+          </a:p>
+        </p:txBody>
+      </p:sp>
+      <p:sp>
+        <p:nvSpPr>
+          <p:cNvPr id="258" name="Rectangle 257"/>
+          <p:cNvSpPr/>
+          <p:nvPr/>
+        </p:nvSpPr>
+        <p:spPr>
+          <a:xfrm>
+            <a:off x="4553712" y="3264408"/>
+            <a:ext cx="1448713" cy="37130"/>
+          </a:xfrm>
+          <a:prstGeom prst="rect">
+            <a:avLst/>
+          </a:prstGeom>
+          <a:solidFill>
+            <a:srgbClr val="1F5B82"/>
+          </a:solidFill>
+          <a:ln w="1905">
+            <a:solidFill>
+              <a:srgbClr val="333333"/>
+            </a:solidFill>
+          </a:ln>
+          <a:effectLst/>
+        </p:spPr>
+        <p:style>
+          <a:lnRef idx="1">
+            <a:schemeClr val="accent1"/>
+          </a:lnRef>
+          <a:fillRef idx="3">
+            <a:schemeClr val="accent1"/>
+          </a:fillRef>
+          <a:effectRef idx="2">
+            <a:schemeClr val="accent1"/>
+          </a:effectRef>
+          <a:fontRef idx="minor">
+            <a:schemeClr val="lt1"/>
+          </a:fontRef>
+        </p:style>
+        <p:txBody>
+          <a:bodyPr rtlCol="0" anchor="ctr"/>
+          <a:lstStyle/>
+          <a:p>
+            <a:pPr algn="ctr"/>
+          </a:p>
+        </p:txBody>
+      </p:sp>
+      <p:sp>
+        <p:nvSpPr>
+          <p:cNvPr id="259" name="Rectangle 258"/>
+          <p:cNvSpPr/>
+          <p:nvPr/>
+        </p:nvSpPr>
+        <p:spPr>
+          <a:xfrm>
+            <a:off x="4553712" y="3319826"/>
+            <a:ext cx="1448713" cy="37130"/>
+          </a:xfrm>
+          <a:prstGeom prst="rect">
+            <a:avLst/>
+          </a:prstGeom>
+          <a:solidFill>
+            <a:srgbClr val="888888"/>
+          </a:solidFill>
+          <a:ln w="1905">
+            <a:solidFill>
+              <a:srgbClr val="333333"/>
+            </a:solidFill>
+          </a:ln>
+          <a:effectLst/>
+        </p:spPr>
+        <p:style>
+          <a:lnRef idx="1">
+            <a:schemeClr val="accent1"/>
+          </a:lnRef>
+          <a:fillRef idx="3">
+            <a:schemeClr val="accent1"/>
+          </a:fillRef>
+          <a:effectRef idx="2">
+            <a:schemeClr val="accent1"/>
+          </a:effectRef>
+          <a:fontRef idx="minor">
+            <a:schemeClr val="lt1"/>
+          </a:fontRef>
+        </p:style>
+        <p:txBody>
+          <a:bodyPr rtlCol="0" anchor="ctr"/>
+          <a:lstStyle/>
+          <a:p>
+            <a:pPr algn="ctr"/>
+          </a:p>
+        </p:txBody>
+      </p:sp>
+      <p:sp>
+        <p:nvSpPr>
+          <p:cNvPr id="260" name="Rectangle 259"/>
+          <p:cNvSpPr/>
+          <p:nvPr/>
+        </p:nvSpPr>
+        <p:spPr>
+          <a:xfrm>
+            <a:off x="4553712" y="3375244"/>
+            <a:ext cx="387763" cy="37130"/>
+          </a:xfrm>
+          <a:prstGeom prst="rect">
+            <a:avLst/>
+          </a:prstGeom>
+          <a:solidFill>
+            <a:srgbClr val="D4A300"/>
+          </a:solidFill>
+          <a:ln w="1905">
+            <a:solidFill>
+              <a:srgbClr val="333333"/>
+            </a:solidFill>
+          </a:ln>
+          <a:effectLst/>
+        </p:spPr>
+        <p:style>
+          <a:lnRef idx="1">
+            <a:schemeClr val="accent1"/>
+          </a:lnRef>
+          <a:fillRef idx="3">
+            <a:schemeClr val="accent1"/>
+          </a:fillRef>
+          <a:effectRef idx="2">
+            <a:schemeClr val="accent1"/>
+          </a:effectRef>
+          <a:fontRef idx="minor">
+            <a:schemeClr val="lt1"/>
+          </a:fontRef>
+        </p:style>
+        <p:txBody>
+          <a:bodyPr rtlCol="0" anchor="ctr"/>
+          <a:lstStyle/>
+          <a:p>
+            <a:pPr algn="ctr"/>
+          </a:p>
+        </p:txBody>
+      </p:sp>
+      <p:sp>
+        <p:nvSpPr>
+          <p:cNvPr id="261" name="Rectangle 260"/>
+          <p:cNvSpPr/>
+          <p:nvPr/>
+        </p:nvSpPr>
+        <p:spPr>
+          <a:xfrm>
+            <a:off x="4553712" y="3447288"/>
+            <a:ext cx="1448713" cy="37130"/>
+          </a:xfrm>
+          <a:prstGeom prst="rect">
+            <a:avLst/>
+          </a:prstGeom>
+          <a:solidFill>
+            <a:srgbClr val="1F5B82"/>
+          </a:solidFill>
+          <a:ln w="1905">
+            <a:solidFill>
+              <a:srgbClr val="333333"/>
+            </a:solidFill>
+          </a:ln>
+          <a:effectLst/>
+        </p:spPr>
+        <p:style>
+          <a:lnRef idx="1">
+            <a:schemeClr val="accent1"/>
+          </a:lnRef>
+          <a:fillRef idx="3">
+            <a:schemeClr val="accent1"/>
+          </a:fillRef>
+          <a:effectRef idx="2">
+            <a:schemeClr val="accent1"/>
+          </a:effectRef>
+          <a:fontRef idx="minor">
+            <a:schemeClr val="lt1"/>
+          </a:fontRef>
+        </p:style>
+        <p:txBody>
+          <a:bodyPr rtlCol="0" anchor="ctr"/>
+          <a:lstStyle/>
+          <a:p>
+            <a:pPr algn="ctr"/>
+          </a:p>
+        </p:txBody>
+      </p:sp>
+      <p:sp>
+        <p:nvSpPr>
+          <p:cNvPr id="262" name="Rectangle 261"/>
+          <p:cNvSpPr/>
+          <p:nvPr/>
+        </p:nvSpPr>
+        <p:spPr>
+          <a:xfrm>
+            <a:off x="4553712" y="3502706"/>
+            <a:ext cx="944982" cy="37130"/>
+          </a:xfrm>
+          <a:prstGeom prst="rect">
+            <a:avLst/>
+          </a:prstGeom>
+          <a:solidFill>
+            <a:srgbClr val="888888"/>
+          </a:solidFill>
+          <a:ln w="1905">
+            <a:solidFill>
+              <a:srgbClr val="333333"/>
+            </a:solidFill>
+          </a:ln>
+          <a:effectLst/>
+        </p:spPr>
+        <p:style>
+          <a:lnRef idx="1">
+            <a:schemeClr val="accent1"/>
+          </a:lnRef>
+          <a:fillRef idx="3">
+            <a:schemeClr val="accent1"/>
+          </a:fillRef>
+          <a:effectRef idx="2">
+            <a:schemeClr val="accent1"/>
+          </a:effectRef>
+          <a:fontRef idx="minor">
+            <a:schemeClr val="lt1"/>
+          </a:fontRef>
+        </p:style>
+        <p:txBody>
+          <a:bodyPr rtlCol="0" anchor="ctr"/>
+          <a:lstStyle/>
+          <a:p>
+            <a:pPr algn="ctr"/>
+          </a:p>
+        </p:txBody>
+      </p:sp>
+      <p:sp>
+        <p:nvSpPr>
+          <p:cNvPr id="263" name="Rectangle 262"/>
+          <p:cNvSpPr/>
+          <p:nvPr/>
+        </p:nvSpPr>
+        <p:spPr>
+          <a:xfrm>
+            <a:off x="4553712" y="3558124"/>
+            <a:ext cx="623926" cy="37130"/>
+          </a:xfrm>
+          <a:prstGeom prst="rect">
+            <a:avLst/>
+          </a:prstGeom>
+          <a:solidFill>
+            <a:srgbClr val="D4A300"/>
+          </a:solidFill>
+          <a:ln w="1905">
+            <a:solidFill>
+              <a:srgbClr val="333333"/>
+            </a:solidFill>
+          </a:ln>
+          <a:effectLst/>
+        </p:spPr>
+        <p:style>
+          <a:lnRef idx="1">
+            <a:schemeClr val="accent1"/>
+          </a:lnRef>
+          <a:fillRef idx="3">
+            <a:schemeClr val="accent1"/>
+          </a:fillRef>
+          <a:effectRef idx="2">
+            <a:schemeClr val="accent1"/>
+          </a:effectRef>
+          <a:fontRef idx="minor">
+            <a:schemeClr val="lt1"/>
+          </a:fontRef>
+        </p:style>
+        <p:txBody>
+          <a:bodyPr rtlCol="0" anchor="ctr"/>
+          <a:lstStyle/>
+          <a:p>
+            <a:pPr algn="ctr"/>
+          </a:p>
+        </p:txBody>
+      </p:sp>
+      <p:sp>
+        <p:nvSpPr>
+          <p:cNvPr id="264" name="Rectangle 263"/>
+          <p:cNvSpPr/>
+          <p:nvPr/>
+        </p:nvSpPr>
+        <p:spPr>
+          <a:xfrm>
+            <a:off x="4553712" y="3630167"/>
+            <a:ext cx="1448713" cy="37130"/>
+          </a:xfrm>
+          <a:prstGeom prst="rect">
+            <a:avLst/>
+          </a:prstGeom>
+          <a:solidFill>
+            <a:srgbClr val="1F5B82"/>
+          </a:solidFill>
+          <a:ln w="1905">
+            <a:solidFill>
+              <a:srgbClr val="333333"/>
+            </a:solidFill>
+          </a:ln>
+          <a:effectLst/>
+        </p:spPr>
+        <p:style>
+          <a:lnRef idx="1">
+            <a:schemeClr val="accent1"/>
+          </a:lnRef>
+          <a:fillRef idx="3">
+            <a:schemeClr val="accent1"/>
+          </a:fillRef>
+          <a:effectRef idx="2">
+            <a:schemeClr val="accent1"/>
+          </a:effectRef>
+          <a:fontRef idx="minor">
+            <a:schemeClr val="lt1"/>
+          </a:fontRef>
+        </p:style>
+        <p:txBody>
+          <a:bodyPr rtlCol="0" anchor="ctr"/>
+          <a:lstStyle/>
+          <a:p>
+            <a:pPr algn="ctr"/>
+          </a:p>
+        </p:txBody>
+      </p:sp>
+      <p:sp>
+        <p:nvSpPr>
+          <p:cNvPr id="265" name="Rectangle 264"/>
+          <p:cNvSpPr/>
+          <p:nvPr/>
+        </p:nvSpPr>
+        <p:spPr>
+          <a:xfrm>
+            <a:off x="4553712" y="3685586"/>
+            <a:ext cx="1448713" cy="37130"/>
+          </a:xfrm>
+          <a:prstGeom prst="rect">
+            <a:avLst/>
+          </a:prstGeom>
+          <a:solidFill>
+            <a:srgbClr val="888888"/>
+          </a:solidFill>
+          <a:ln w="1905">
+            <a:solidFill>
+              <a:srgbClr val="333333"/>
+            </a:solidFill>
+          </a:ln>
+          <a:effectLst/>
+        </p:spPr>
+        <p:style>
+          <a:lnRef idx="1">
+            <a:schemeClr val="accent1"/>
+          </a:lnRef>
+          <a:fillRef idx="3">
+            <a:schemeClr val="accent1"/>
+          </a:fillRef>
+          <a:effectRef idx="2">
+            <a:schemeClr val="accent1"/>
+          </a:effectRef>
+          <a:fontRef idx="minor">
+            <a:schemeClr val="lt1"/>
+          </a:fontRef>
+        </p:style>
+        <p:txBody>
+          <a:bodyPr rtlCol="0" anchor="ctr"/>
+          <a:lstStyle/>
+          <a:p>
+            <a:pPr algn="ctr"/>
+          </a:p>
+        </p:txBody>
+      </p:sp>
+      <p:sp>
+        <p:nvSpPr>
+          <p:cNvPr id="266" name="Rectangle 265"/>
+          <p:cNvSpPr/>
+          <p:nvPr/>
+        </p:nvSpPr>
+        <p:spPr>
+          <a:xfrm>
+            <a:off x="4553712" y="3741004"/>
+            <a:ext cx="200859" cy="37130"/>
+          </a:xfrm>
+          <a:prstGeom prst="rect">
+            <a:avLst/>
+          </a:prstGeom>
+          <a:solidFill>
+            <a:srgbClr val="D4A300"/>
+          </a:solidFill>
+          <a:ln w="1905">
+            <a:solidFill>
+              <a:srgbClr val="333333"/>
+            </a:solidFill>
+          </a:ln>
+          <a:effectLst/>
+        </p:spPr>
+        <p:style>
+          <a:lnRef idx="1">
+            <a:schemeClr val="accent1"/>
+          </a:lnRef>
+          <a:fillRef idx="3">
+            <a:schemeClr val="accent1"/>
+          </a:fillRef>
+          <a:effectRef idx="2">
+            <a:schemeClr val="accent1"/>
+          </a:effectRef>
+          <a:fontRef idx="minor">
+            <a:schemeClr val="lt1"/>
+          </a:fontRef>
+        </p:style>
+        <p:txBody>
+          <a:bodyPr rtlCol="0" anchor="ctr"/>
+          <a:lstStyle/>
+          <a:p>
+            <a:pPr algn="ctr"/>
+          </a:p>
+        </p:txBody>
+      </p:sp>
+      <p:sp>
+        <p:nvSpPr>
+          <p:cNvPr id="267" name="Rectangle 266"/>
+          <p:cNvSpPr/>
+          <p:nvPr/>
+        </p:nvSpPr>
+        <p:spPr>
+          <a:xfrm>
+            <a:off x="4553712" y="3813047"/>
+            <a:ext cx="1448713" cy="37130"/>
+          </a:xfrm>
+          <a:prstGeom prst="rect">
+            <a:avLst/>
+          </a:prstGeom>
+          <a:solidFill>
+            <a:srgbClr val="1F5B82"/>
+          </a:solidFill>
+          <a:ln w="1905">
+            <a:solidFill>
+              <a:srgbClr val="333333"/>
+            </a:solidFill>
+          </a:ln>
+          <a:effectLst/>
+        </p:spPr>
+        <p:style>
+          <a:lnRef idx="1">
+            <a:schemeClr val="accent1"/>
+          </a:lnRef>
+          <a:fillRef idx="3">
+            <a:schemeClr val="accent1"/>
+          </a:fillRef>
+          <a:effectRef idx="2">
+            <a:schemeClr val="accent1"/>
+          </a:effectRef>
+          <a:fontRef idx="minor">
+            <a:schemeClr val="lt1"/>
+          </a:fontRef>
+        </p:style>
+        <p:txBody>
+          <a:bodyPr rtlCol="0" anchor="ctr"/>
+          <a:lstStyle/>
+          <a:p>
+            <a:pPr algn="ctr"/>
+          </a:p>
+        </p:txBody>
+      </p:sp>
+      <p:sp>
+        <p:nvSpPr>
+          <p:cNvPr id="268" name="Rectangle 267"/>
+          <p:cNvSpPr/>
+          <p:nvPr/>
+        </p:nvSpPr>
+        <p:spPr>
+          <a:xfrm>
+            <a:off x="4553712" y="3868466"/>
+            <a:ext cx="623926" cy="37130"/>
+          </a:xfrm>
+          <a:prstGeom prst="rect">
+            <a:avLst/>
+          </a:prstGeom>
+          <a:solidFill>
+            <a:srgbClr val="888888"/>
+          </a:solidFill>
+          <a:ln w="1905">
+            <a:solidFill>
+              <a:srgbClr val="333333"/>
+            </a:solidFill>
+          </a:ln>
+          <a:effectLst/>
+        </p:spPr>
+        <p:style>
+          <a:lnRef idx="1">
+            <a:schemeClr val="accent1"/>
+          </a:lnRef>
+          <a:fillRef idx="3">
+            <a:schemeClr val="accent1"/>
+          </a:fillRef>
+          <a:effectRef idx="2">
+            <a:schemeClr val="accent1"/>
+          </a:effectRef>
+          <a:fontRef idx="minor">
+            <a:schemeClr val="lt1"/>
+          </a:fontRef>
+        </p:style>
+        <p:txBody>
+          <a:bodyPr rtlCol="0" anchor="ctr"/>
+          <a:lstStyle/>
+          <a:p>
+            <a:pPr algn="ctr"/>
+          </a:p>
+        </p:txBody>
+      </p:sp>
+      <p:sp>
+        <p:nvSpPr>
+          <p:cNvPr id="269" name="Rectangle 268"/>
+          <p:cNvSpPr/>
+          <p:nvPr/>
+        </p:nvSpPr>
+        <p:spPr>
+          <a:xfrm>
+            <a:off x="4553712" y="3923884"/>
+            <a:ext cx="623926" cy="37130"/>
+          </a:xfrm>
+          <a:prstGeom prst="rect">
+            <a:avLst/>
+          </a:prstGeom>
+          <a:solidFill>
+            <a:srgbClr val="D4A300"/>
+          </a:solidFill>
+          <a:ln w="1905">
+            <a:solidFill>
+              <a:srgbClr val="333333"/>
+            </a:solidFill>
+          </a:ln>
+          <a:effectLst/>
+        </p:spPr>
+        <p:style>
+          <a:lnRef idx="1">
+            <a:schemeClr val="accent1"/>
+          </a:lnRef>
+          <a:fillRef idx="3">
+            <a:schemeClr val="accent1"/>
+          </a:fillRef>
+          <a:effectRef idx="2">
+            <a:schemeClr val="accent1"/>
+          </a:effectRef>
+          <a:fontRef idx="minor">
+            <a:schemeClr val="lt1"/>
+          </a:fontRef>
+        </p:style>
+        <p:txBody>
+          <a:bodyPr rtlCol="0" anchor="ctr"/>
+          <a:lstStyle/>
+          <a:p>
+            <a:pPr algn="ctr"/>
+          </a:p>
+        </p:txBody>
+      </p:sp>
+      <p:sp>
+        <p:nvSpPr>
+          <p:cNvPr id="270" name="Rectangle 269"/>
+          <p:cNvSpPr/>
+          <p:nvPr/>
+        </p:nvSpPr>
+        <p:spPr>
+          <a:xfrm>
+            <a:off x="4553712" y="3995927"/>
+            <a:ext cx="1448713" cy="37130"/>
+          </a:xfrm>
+          <a:prstGeom prst="rect">
+            <a:avLst/>
+          </a:prstGeom>
+          <a:solidFill>
+            <a:srgbClr val="1F5B82"/>
+          </a:solidFill>
+          <a:ln w="1905">
+            <a:solidFill>
+              <a:srgbClr val="333333"/>
+            </a:solidFill>
+          </a:ln>
+          <a:effectLst/>
+        </p:spPr>
+        <p:style>
+          <a:lnRef idx="1">
+            <a:schemeClr val="accent1"/>
+          </a:lnRef>
+          <a:fillRef idx="3">
+            <a:schemeClr val="accent1"/>
+          </a:fillRef>
+          <a:effectRef idx="2">
+            <a:schemeClr val="accent1"/>
+          </a:effectRef>
+          <a:fontRef idx="minor">
+            <a:schemeClr val="lt1"/>
+          </a:fontRef>
+        </p:style>
+        <p:txBody>
+          <a:bodyPr rtlCol="0" anchor="ctr"/>
+          <a:lstStyle/>
+          <a:p>
+            <a:pPr algn="ctr"/>
+          </a:p>
+        </p:txBody>
+      </p:sp>
+      <p:sp>
+        <p:nvSpPr>
+          <p:cNvPr id="271" name="Rectangle 270"/>
+          <p:cNvSpPr/>
+          <p:nvPr/>
+        </p:nvSpPr>
+        <p:spPr>
+          <a:xfrm>
+            <a:off x="4553712" y="4051346"/>
+            <a:ext cx="944982" cy="37130"/>
+          </a:xfrm>
+          <a:prstGeom prst="rect">
+            <a:avLst/>
+          </a:prstGeom>
+          <a:solidFill>
+            <a:srgbClr val="888888"/>
+          </a:solidFill>
+          <a:ln w="1905">
+            <a:solidFill>
+              <a:srgbClr val="333333"/>
+            </a:solidFill>
+          </a:ln>
+          <a:effectLst/>
+        </p:spPr>
+        <p:style>
+          <a:lnRef idx="1">
+            <a:schemeClr val="accent1"/>
+          </a:lnRef>
+          <a:fillRef idx="3">
+            <a:schemeClr val="accent1"/>
+          </a:fillRef>
+          <a:effectRef idx="2">
+            <a:schemeClr val="accent1"/>
+          </a:effectRef>
+          <a:fontRef idx="minor">
+            <a:schemeClr val="lt1"/>
+          </a:fontRef>
+        </p:style>
+        <p:txBody>
+          <a:bodyPr rtlCol="0" anchor="ctr"/>
+          <a:lstStyle/>
+          <a:p>
+            <a:pPr algn="ctr"/>
+          </a:p>
+        </p:txBody>
+      </p:sp>
+      <p:sp>
+        <p:nvSpPr>
+          <p:cNvPr id="272" name="Rectangle 271"/>
+          <p:cNvSpPr/>
+          <p:nvPr/>
+        </p:nvSpPr>
+        <p:spPr>
+          <a:xfrm>
+            <a:off x="4553712" y="4106764"/>
+            <a:ext cx="387763" cy="37130"/>
+          </a:xfrm>
+          <a:prstGeom prst="rect">
+            <a:avLst/>
+          </a:prstGeom>
+          <a:solidFill>
+            <a:srgbClr val="D4A300"/>
+          </a:solidFill>
+          <a:ln w="1905">
+            <a:solidFill>
+              <a:srgbClr val="333333"/>
+            </a:solidFill>
+          </a:ln>
+          <a:effectLst/>
+        </p:spPr>
+        <p:style>
+          <a:lnRef idx="1">
+            <a:schemeClr val="accent1"/>
+          </a:lnRef>
+          <a:fillRef idx="3">
+            <a:schemeClr val="accent1"/>
+          </a:fillRef>
+          <a:effectRef idx="2">
+            <a:schemeClr val="accent1"/>
+          </a:effectRef>
+          <a:fontRef idx="minor">
+            <a:schemeClr val="lt1"/>
+          </a:fontRef>
+        </p:style>
+        <p:txBody>
+          <a:bodyPr rtlCol="0" anchor="ctr"/>
+          <a:lstStyle/>
+          <a:p>
+            <a:pPr algn="ctr"/>
+          </a:p>
+        </p:txBody>
+      </p:sp>
+      <p:sp>
+        <p:nvSpPr>
+          <p:cNvPr id="273" name="Rectangle 272"/>
+          <p:cNvSpPr/>
+          <p:nvPr/>
+        </p:nvSpPr>
+        <p:spPr>
+          <a:xfrm>
+            <a:off x="4553712" y="4178807"/>
+            <a:ext cx="944982" cy="37130"/>
+          </a:xfrm>
+          <a:prstGeom prst="rect">
+            <a:avLst/>
+          </a:prstGeom>
+          <a:solidFill>
+            <a:srgbClr val="1F5B82"/>
+          </a:solidFill>
+          <a:ln w="1905">
+            <a:solidFill>
+              <a:srgbClr val="333333"/>
+            </a:solidFill>
+          </a:ln>
+          <a:effectLst/>
+        </p:spPr>
+        <p:style>
+          <a:lnRef idx="1">
+            <a:schemeClr val="accent1"/>
+          </a:lnRef>
+          <a:fillRef idx="3">
+            <a:schemeClr val="accent1"/>
+          </a:fillRef>
+          <a:effectRef idx="2">
+            <a:schemeClr val="accent1"/>
+          </a:effectRef>
+          <a:fontRef idx="minor">
+            <a:schemeClr val="lt1"/>
+          </a:fontRef>
+        </p:style>
+        <p:txBody>
+          <a:bodyPr rtlCol="0" anchor="ctr"/>
+          <a:lstStyle/>
+          <a:p>
+            <a:pPr algn="ctr"/>
+          </a:p>
+        </p:txBody>
+      </p:sp>
+      <p:sp>
+        <p:nvSpPr>
+          <p:cNvPr id="274" name="Rectangle 273"/>
+          <p:cNvSpPr/>
+          <p:nvPr/>
+        </p:nvSpPr>
+        <p:spPr>
+          <a:xfrm>
+            <a:off x="4553712" y="4234226"/>
+            <a:ext cx="2072640" cy="37130"/>
+          </a:xfrm>
+          <a:prstGeom prst="rect">
+            <a:avLst/>
+          </a:prstGeom>
+          <a:solidFill>
+            <a:srgbClr val="888888"/>
+          </a:solidFill>
+          <a:ln w="1905">
+            <a:solidFill>
+              <a:srgbClr val="333333"/>
+            </a:solidFill>
+          </a:ln>
+          <a:effectLst/>
+        </p:spPr>
+        <p:style>
+          <a:lnRef idx="1">
+            <a:schemeClr val="accent1"/>
+          </a:lnRef>
+          <a:fillRef idx="3">
+            <a:schemeClr val="accent1"/>
+          </a:fillRef>
+          <a:effectRef idx="2">
+            <a:schemeClr val="accent1"/>
+          </a:effectRef>
+          <a:fontRef idx="minor">
+            <a:schemeClr val="lt1"/>
+          </a:fontRef>
+        </p:style>
+        <p:txBody>
+          <a:bodyPr rtlCol="0" anchor="ctr"/>
+          <a:lstStyle/>
+          <a:p>
+            <a:pPr algn="ctr"/>
+          </a:p>
+        </p:txBody>
+      </p:sp>
+      <p:sp>
+        <p:nvSpPr>
+          <p:cNvPr id="275" name="Rectangle 274"/>
+          <p:cNvSpPr/>
+          <p:nvPr/>
+        </p:nvSpPr>
+        <p:spPr>
+          <a:xfrm>
+            <a:off x="4553712" y="4289644"/>
+            <a:ext cx="623926" cy="37130"/>
+          </a:xfrm>
+          <a:prstGeom prst="rect">
+            <a:avLst/>
+          </a:prstGeom>
+          <a:solidFill>
+            <a:srgbClr val="D4A300"/>
+          </a:solidFill>
+          <a:ln w="1905">
+            <a:solidFill>
+              <a:srgbClr val="333333"/>
+            </a:solidFill>
+          </a:ln>
+          <a:effectLst/>
+        </p:spPr>
+        <p:style>
+          <a:lnRef idx="1">
+            <a:schemeClr val="accent1"/>
+          </a:lnRef>
+          <a:fillRef idx="3">
+            <a:schemeClr val="accent1"/>
+          </a:fillRef>
+          <a:effectRef idx="2">
+            <a:schemeClr val="accent1"/>
+          </a:effectRef>
+          <a:fontRef idx="minor">
+            <a:schemeClr val="lt1"/>
+          </a:fontRef>
+        </p:style>
+        <p:txBody>
+          <a:bodyPr rtlCol="0" anchor="ctr"/>
+          <a:lstStyle/>
+          <a:p>
+            <a:pPr algn="ctr"/>
+          </a:p>
+        </p:txBody>
+      </p:sp>
+      <p:sp>
+        <p:nvSpPr>
+          <p:cNvPr id="276" name="Rectangle 275"/>
+          <p:cNvSpPr/>
+          <p:nvPr/>
+        </p:nvSpPr>
+        <p:spPr>
+          <a:xfrm>
+            <a:off x="4553712" y="4361688"/>
+            <a:ext cx="944982" cy="37130"/>
+          </a:xfrm>
+          <a:prstGeom prst="rect">
+            <a:avLst/>
+          </a:prstGeom>
+          <a:solidFill>
+            <a:srgbClr val="1F5B82"/>
+          </a:solidFill>
+          <a:ln w="1905">
+            <a:solidFill>
+              <a:srgbClr val="333333"/>
+            </a:solidFill>
+          </a:ln>
+          <a:effectLst/>
+        </p:spPr>
+        <p:style>
+          <a:lnRef idx="1">
+            <a:schemeClr val="accent1"/>
+          </a:lnRef>
+          <a:fillRef idx="3">
+            <a:schemeClr val="accent1"/>
+          </a:fillRef>
+          <a:effectRef idx="2">
+            <a:schemeClr val="accent1"/>
+          </a:effectRef>
+          <a:fontRef idx="minor">
+            <a:schemeClr val="lt1"/>
+          </a:fontRef>
+        </p:style>
+        <p:txBody>
+          <a:bodyPr rtlCol="0" anchor="ctr"/>
+          <a:lstStyle/>
+          <a:p>
+            <a:pPr algn="ctr"/>
+          </a:p>
+        </p:txBody>
+      </p:sp>
+      <p:sp>
+        <p:nvSpPr>
+          <p:cNvPr id="277" name="Rectangle 276"/>
+          <p:cNvSpPr/>
+          <p:nvPr/>
+        </p:nvSpPr>
+        <p:spPr>
+          <a:xfrm>
+            <a:off x="4553712" y="4417106"/>
+            <a:ext cx="387763" cy="37130"/>
+          </a:xfrm>
+          <a:prstGeom prst="rect">
+            <a:avLst/>
+          </a:prstGeom>
+          <a:solidFill>
+            <a:srgbClr val="888888"/>
+          </a:solidFill>
+          <a:ln w="1905">
+            <a:solidFill>
+              <a:srgbClr val="333333"/>
+            </a:solidFill>
+          </a:ln>
+          <a:effectLst/>
+        </p:spPr>
+        <p:style>
+          <a:lnRef idx="1">
+            <a:schemeClr val="accent1"/>
+          </a:lnRef>
+          <a:fillRef idx="3">
+            <a:schemeClr val="accent1"/>
+          </a:fillRef>
+          <a:effectRef idx="2">
+            <a:schemeClr val="accent1"/>
+          </a:effectRef>
+          <a:fontRef idx="minor">
+            <a:schemeClr val="lt1"/>
+          </a:fontRef>
+        </p:style>
+        <p:txBody>
+          <a:bodyPr rtlCol="0" anchor="ctr"/>
+          <a:lstStyle/>
+          <a:p>
+            <a:pPr algn="ctr"/>
+          </a:p>
+        </p:txBody>
+      </p:sp>
+      <p:sp>
+        <p:nvSpPr>
+          <p:cNvPr id="278" name="Rectangle 277"/>
+          <p:cNvSpPr/>
+          <p:nvPr/>
+        </p:nvSpPr>
+        <p:spPr>
+          <a:xfrm>
+            <a:off x="4553712" y="4472524"/>
+            <a:ext cx="46170" cy="37130"/>
+          </a:xfrm>
+          <a:prstGeom prst="rect">
+            <a:avLst/>
+          </a:prstGeom>
+          <a:solidFill>
+            <a:srgbClr val="D4A300"/>
+          </a:solidFill>
+          <a:ln w="1905">
+            <a:solidFill>
+              <a:srgbClr val="333333"/>
+            </a:solidFill>
+          </a:ln>
+          <a:effectLst/>
+        </p:spPr>
+        <p:style>
+          <a:lnRef idx="1">
+            <a:schemeClr val="accent1"/>
+          </a:lnRef>
+          <a:fillRef idx="3">
+            <a:schemeClr val="accent1"/>
+          </a:fillRef>
+          <a:effectRef idx="2">
+            <a:schemeClr val="accent1"/>
+          </a:effectRef>
+          <a:fontRef idx="minor">
+            <a:schemeClr val="lt1"/>
+          </a:fontRef>
+        </p:style>
+        <p:txBody>
+          <a:bodyPr rtlCol="0" anchor="ctr"/>
+          <a:lstStyle/>
+          <a:p>
+            <a:pPr algn="ctr"/>
+          </a:p>
+        </p:txBody>
+      </p:sp>
+      <p:sp>
+        <p:nvSpPr>
+          <p:cNvPr id="279" name="Rectangle 278"/>
+          <p:cNvSpPr/>
+          <p:nvPr/>
+        </p:nvSpPr>
+        <p:spPr>
+          <a:xfrm>
+            <a:off x="4553712" y="4544567"/>
+            <a:ext cx="944982" cy="37130"/>
+          </a:xfrm>
+          <a:prstGeom prst="rect">
+            <a:avLst/>
+          </a:prstGeom>
+          <a:solidFill>
+            <a:srgbClr val="1F5B82"/>
+          </a:solidFill>
+          <a:ln w="1905">
+            <a:solidFill>
+              <a:srgbClr val="333333"/>
+            </a:solidFill>
+          </a:ln>
+          <a:effectLst/>
+        </p:spPr>
+        <p:style>
+          <a:lnRef idx="1">
+            <a:schemeClr val="accent1"/>
+          </a:lnRef>
+          <a:fillRef idx="3">
+            <a:schemeClr val="accent1"/>
+          </a:fillRef>
+          <a:effectRef idx="2">
+            <a:schemeClr val="accent1"/>
+          </a:effectRef>
+          <a:fontRef idx="minor">
+            <a:schemeClr val="lt1"/>
+          </a:fontRef>
+        </p:style>
+        <p:txBody>
+          <a:bodyPr rtlCol="0" anchor="ctr"/>
+          <a:lstStyle/>
+          <a:p>
+            <a:pPr algn="ctr"/>
+          </a:p>
+        </p:txBody>
+      </p:sp>
+      <p:sp>
+        <p:nvSpPr>
+          <p:cNvPr id="280" name="Rectangle 279"/>
+          <p:cNvSpPr/>
+          <p:nvPr/>
+        </p:nvSpPr>
+        <p:spPr>
+          <a:xfrm>
+            <a:off x="4553712" y="4599986"/>
+            <a:ext cx="94838" cy="37130"/>
+          </a:xfrm>
+          <a:prstGeom prst="rect">
+            <a:avLst/>
+          </a:prstGeom>
+          <a:solidFill>
+            <a:srgbClr val="888888"/>
+          </a:solidFill>
+          <a:ln w="1905">
+            <a:solidFill>
+              <a:srgbClr val="333333"/>
+            </a:solidFill>
+          </a:ln>
+          <a:effectLst/>
+        </p:spPr>
+        <p:style>
+          <a:lnRef idx="1">
+            <a:schemeClr val="accent1"/>
+          </a:lnRef>
+          <a:fillRef idx="3">
+            <a:schemeClr val="accent1"/>
+          </a:fillRef>
+          <a:effectRef idx="2">
+            <a:schemeClr val="accent1"/>
+          </a:effectRef>
+          <a:fontRef idx="minor">
+            <a:schemeClr val="lt1"/>
+          </a:fontRef>
+        </p:style>
+        <p:txBody>
+          <a:bodyPr rtlCol="0" anchor="ctr"/>
+          <a:lstStyle/>
+          <a:p>
+            <a:pPr algn="ctr"/>
+          </a:p>
+        </p:txBody>
+      </p:sp>
+      <p:sp>
+        <p:nvSpPr>
+          <p:cNvPr id="281" name="Rectangle 280"/>
+          <p:cNvSpPr/>
+          <p:nvPr/>
+        </p:nvSpPr>
+        <p:spPr>
+          <a:xfrm>
+            <a:off x="4553712" y="4655404"/>
+            <a:ext cx="46170" cy="37130"/>
+          </a:xfrm>
+          <a:prstGeom prst="rect">
+            <a:avLst/>
+          </a:prstGeom>
+          <a:solidFill>
+            <a:srgbClr val="D4A300"/>
+          </a:solidFill>
+          <a:ln w="1905">
+            <a:solidFill>
+              <a:srgbClr val="333333"/>
+            </a:solidFill>
+          </a:ln>
+          <a:effectLst/>
+        </p:spPr>
+        <p:style>
+          <a:lnRef idx="1">
+            <a:schemeClr val="accent1"/>
+          </a:lnRef>
+          <a:fillRef idx="3">
+            <a:schemeClr val="accent1"/>
+          </a:fillRef>
+          <a:effectRef idx="2">
+            <a:schemeClr val="accent1"/>
+          </a:effectRef>
+          <a:fontRef idx="minor">
+            <a:schemeClr val="lt1"/>
+          </a:fontRef>
+        </p:style>
+        <p:txBody>
+          <a:bodyPr rtlCol="0" anchor="ctr"/>
+          <a:lstStyle/>
+          <a:p>
+            <a:pPr algn="ctr"/>
+          </a:p>
+        </p:txBody>
+      </p:sp>
+      <p:sp>
+        <p:nvSpPr>
+          <p:cNvPr id="282" name="Rectangle 281"/>
+          <p:cNvSpPr/>
+          <p:nvPr/>
+        </p:nvSpPr>
+        <p:spPr>
+          <a:xfrm>
+            <a:off x="4553712" y="4727447"/>
+            <a:ext cx="944982" cy="37130"/>
+          </a:xfrm>
+          <a:prstGeom prst="rect">
+            <a:avLst/>
+          </a:prstGeom>
+          <a:solidFill>
+            <a:srgbClr val="1F5B82"/>
+          </a:solidFill>
+          <a:ln w="1905">
+            <a:solidFill>
+              <a:srgbClr val="333333"/>
+            </a:solidFill>
+          </a:ln>
+          <a:effectLst/>
+        </p:spPr>
+        <p:style>
+          <a:lnRef idx="1">
+            <a:schemeClr val="accent1"/>
+          </a:lnRef>
+          <a:fillRef idx="3">
+            <a:schemeClr val="accent1"/>
+          </a:fillRef>
+          <a:effectRef idx="2">
+            <a:schemeClr val="accent1"/>
+          </a:effectRef>
+          <a:fontRef idx="minor">
+            <a:schemeClr val="lt1"/>
+          </a:fontRef>
+        </p:style>
+        <p:txBody>
+          <a:bodyPr rtlCol="0" anchor="ctr"/>
+          <a:lstStyle/>
+          <a:p>
+            <a:pPr algn="ctr"/>
+          </a:p>
+        </p:txBody>
+      </p:sp>
+      <p:sp>
+        <p:nvSpPr>
+          <p:cNvPr id="283" name="Rectangle 282"/>
+          <p:cNvSpPr/>
+          <p:nvPr/>
+        </p:nvSpPr>
+        <p:spPr>
+          <a:xfrm>
+            <a:off x="4553712" y="4782866"/>
+            <a:ext cx="1448713" cy="37130"/>
+          </a:xfrm>
+          <a:prstGeom prst="rect">
+            <a:avLst/>
+          </a:prstGeom>
+          <a:solidFill>
+            <a:srgbClr val="888888"/>
+          </a:solidFill>
+          <a:ln w="1905">
+            <a:solidFill>
+              <a:srgbClr val="333333"/>
+            </a:solidFill>
+          </a:ln>
+          <a:effectLst/>
+        </p:spPr>
+        <p:style>
+          <a:lnRef idx="1">
+            <a:schemeClr val="accent1"/>
+          </a:lnRef>
+          <a:fillRef idx="3">
+            <a:schemeClr val="accent1"/>
+          </a:fillRef>
+          <a:effectRef idx="2">
+            <a:schemeClr val="accent1"/>
+          </a:effectRef>
+          <a:fontRef idx="minor">
+            <a:schemeClr val="lt1"/>
+          </a:fontRef>
+        </p:style>
+        <p:txBody>
+          <a:bodyPr rtlCol="0" anchor="ctr"/>
+          <a:lstStyle/>
+          <a:p>
+            <a:pPr algn="ctr"/>
+          </a:p>
+        </p:txBody>
+      </p:sp>
+      <p:sp>
+        <p:nvSpPr>
+          <p:cNvPr id="284" name="Rectangle 283"/>
+          <p:cNvSpPr/>
+          <p:nvPr/>
+        </p:nvSpPr>
+        <p:spPr>
+          <a:xfrm>
+            <a:off x="4553712" y="4838284"/>
+            <a:ext cx="944982" cy="37130"/>
+          </a:xfrm>
+          <a:prstGeom prst="rect">
+            <a:avLst/>
+          </a:prstGeom>
+          <a:solidFill>
+            <a:srgbClr val="D4A300"/>
+          </a:solidFill>
+          <a:ln w="1905">
+            <a:solidFill>
+              <a:srgbClr val="333333"/>
+            </a:solidFill>
+          </a:ln>
+          <a:effectLst/>
+        </p:spPr>
+        <p:style>
+          <a:lnRef idx="1">
+            <a:schemeClr val="accent1"/>
+          </a:lnRef>
+          <a:fillRef idx="3">
+            <a:schemeClr val="accent1"/>
+          </a:fillRef>
+          <a:effectRef idx="2">
+            <a:schemeClr val="accent1"/>
+          </a:effectRef>
+          <a:fontRef idx="minor">
+            <a:schemeClr val="lt1"/>
+          </a:fontRef>
+        </p:style>
+        <p:txBody>
+          <a:bodyPr rtlCol="0" anchor="ctr"/>
+          <a:lstStyle/>
+          <a:p>
+            <a:pPr algn="ctr"/>
+          </a:p>
+        </p:txBody>
+      </p:sp>
+      <p:sp>
+        <p:nvSpPr>
+          <p:cNvPr id="285" name="Rectangle 284"/>
+          <p:cNvSpPr/>
+          <p:nvPr/>
+        </p:nvSpPr>
+        <p:spPr>
+          <a:xfrm>
+            <a:off x="4553712" y="4910327"/>
+            <a:ext cx="623926" cy="37130"/>
+          </a:xfrm>
+          <a:prstGeom prst="rect">
+            <a:avLst/>
+          </a:prstGeom>
+          <a:solidFill>
+            <a:srgbClr val="1F5B82"/>
+          </a:solidFill>
+          <a:ln w="1905">
+            <a:solidFill>
+              <a:srgbClr val="333333"/>
+            </a:solidFill>
+          </a:ln>
+          <a:effectLst/>
+        </p:spPr>
+        <p:style>
+          <a:lnRef idx="1">
+            <a:schemeClr val="accent1"/>
+          </a:lnRef>
+          <a:fillRef idx="3">
+            <a:schemeClr val="accent1"/>
+          </a:fillRef>
+          <a:effectRef idx="2">
+            <a:schemeClr val="accent1"/>
+          </a:effectRef>
+          <a:fontRef idx="minor">
+            <a:schemeClr val="lt1"/>
+          </a:fontRef>
+        </p:style>
+        <p:txBody>
+          <a:bodyPr rtlCol="0" anchor="ctr"/>
+          <a:lstStyle/>
+          <a:p>
+            <a:pPr algn="ctr"/>
+          </a:p>
+        </p:txBody>
+      </p:sp>
+      <p:sp>
+        <p:nvSpPr>
+          <p:cNvPr id="286" name="Rectangle 285"/>
+          <p:cNvSpPr/>
+          <p:nvPr/>
+        </p:nvSpPr>
+        <p:spPr>
+          <a:xfrm>
+            <a:off x="4553712" y="4965746"/>
+            <a:ext cx="944982" cy="37130"/>
+          </a:xfrm>
+          <a:prstGeom prst="rect">
+            <a:avLst/>
+          </a:prstGeom>
+          <a:solidFill>
+            <a:srgbClr val="888888"/>
+          </a:solidFill>
+          <a:ln w="1905">
+            <a:solidFill>
+              <a:srgbClr val="333333"/>
+            </a:solidFill>
+          </a:ln>
+          <a:effectLst/>
+        </p:spPr>
+        <p:style>
+          <a:lnRef idx="1">
+            <a:schemeClr val="accent1"/>
+          </a:lnRef>
+          <a:fillRef idx="3">
+            <a:schemeClr val="accent1"/>
+          </a:fillRef>
+          <a:effectRef idx="2">
+            <a:schemeClr val="accent1"/>
+          </a:effectRef>
+          <a:fontRef idx="minor">
+            <a:schemeClr val="lt1"/>
+          </a:fontRef>
+        </p:style>
+        <p:txBody>
+          <a:bodyPr rtlCol="0" anchor="ctr"/>
+          <a:lstStyle/>
+          <a:p>
+            <a:pPr algn="ctr"/>
+          </a:p>
+        </p:txBody>
+      </p:sp>
+      <p:sp>
+        <p:nvSpPr>
+          <p:cNvPr id="287" name="Rectangle 286"/>
+          <p:cNvSpPr/>
+          <p:nvPr/>
+        </p:nvSpPr>
+        <p:spPr>
+          <a:xfrm>
+            <a:off x="4553712" y="5021164"/>
+            <a:ext cx="200859" cy="37130"/>
+          </a:xfrm>
+          <a:prstGeom prst="rect">
+            <a:avLst/>
+          </a:prstGeom>
+          <a:solidFill>
+            <a:srgbClr val="D4A300"/>
+          </a:solidFill>
+          <a:ln w="1905">
+            <a:solidFill>
+              <a:srgbClr val="333333"/>
+            </a:solidFill>
+          </a:ln>
+          <a:effectLst/>
+        </p:spPr>
+        <p:style>
+          <a:lnRef idx="1">
+            <a:schemeClr val="accent1"/>
+          </a:lnRef>
+          <a:fillRef idx="3">
+            <a:schemeClr val="accent1"/>
+          </a:fillRef>
+          <a:effectRef idx="2">
+            <a:schemeClr val="accent1"/>
+          </a:effectRef>
+          <a:fontRef idx="minor">
+            <a:schemeClr val="lt1"/>
+          </a:fontRef>
+        </p:style>
+        <p:txBody>
+          <a:bodyPr rtlCol="0" anchor="ctr"/>
+          <a:lstStyle/>
+          <a:p>
+            <a:pPr algn="ctr"/>
+          </a:p>
+        </p:txBody>
+      </p:sp>
+      <p:sp>
+        <p:nvSpPr>
+          <p:cNvPr id="288" name="Rectangle 287"/>
+          <p:cNvSpPr/>
+          <p:nvPr/>
+        </p:nvSpPr>
+        <p:spPr>
+          <a:xfrm>
+            <a:off x="4553712" y="5577840"/>
+            <a:ext cx="146304" cy="91440"/>
+          </a:xfrm>
+          <a:prstGeom prst="rect">
+            <a:avLst/>
+          </a:prstGeom>
+          <a:solidFill>
+            <a:srgbClr val="1F5B82"/>
+          </a:solidFill>
+          <a:ln w="2540">
+            <a:solidFill>
+              <a:srgbClr val="333333"/>
+            </a:solidFill>
+          </a:ln>
+          <a:effectLst/>
+        </p:spPr>
+        <p:style>
+          <a:lnRef idx="1">
+            <a:schemeClr val="accent1"/>
+          </a:lnRef>
+          <a:fillRef idx="3">
+            <a:schemeClr val="accent1"/>
+          </a:fillRef>
+          <a:effectRef idx="2">
+            <a:schemeClr val="accent1"/>
+          </a:effectRef>
+          <a:fontRef idx="minor">
+            <a:schemeClr val="lt1"/>
+          </a:fontRef>
+        </p:style>
+        <p:txBody>
+          <a:bodyPr rtlCol="0" anchor="ctr"/>
+          <a:lstStyle/>
+          <a:p>
+            <a:pPr algn="ctr"/>
+          </a:p>
+        </p:txBody>
+      </p:sp>
+      <p:sp>
+        <p:nvSpPr>
+          <p:cNvPr id="289" name="TextBox 288"/>
+          <p:cNvSpPr txBox="1"/>
+          <p:nvPr/>
+        </p:nvSpPr>
+        <p:spPr>
+          <a:xfrm>
+            <a:off x="4718304" y="5550407"/>
+            <a:ext cx="411480" cy="146304"/>
+          </a:xfrm>
+          <a:prstGeom prst="rect">
+            <a:avLst/>
+          </a:prstGeom>
+          <a:noFill/>
+          <a:effectLst/>
+        </p:spPr>
+        <p:txBody>
+          <a:bodyPr wrap="square" lIns="0" rIns="0" tIns="0" bIns="0" anchor="t">
+            <a:spAutoFit/>
+          </a:bodyPr>
+          <a:lstStyle/>
+          <a:p>
             <a:pPr algn="l"/>
             <a:r>
-              <a:rPr sz="700" b="0" i="0">
+              <a:rPr sz="650" b="0" i="0">
+                <a:solidFill>
+                  <a:srgbClr val="222222"/>
+                </a:solidFill>
+                <a:latin typeface="Arial"/>
+              </a:rPr>
+              <a:t>pre</a:t>
+            </a:r>
+          </a:p>
+        </p:txBody>
+      </p:sp>
+      <p:sp>
+        <p:nvSpPr>
+          <p:cNvPr id="290" name="Rectangle 289"/>
+          <p:cNvSpPr/>
+          <p:nvPr/>
+        </p:nvSpPr>
+        <p:spPr>
+          <a:xfrm>
+            <a:off x="5175504" y="5577840"/>
+            <a:ext cx="146304" cy="91440"/>
+          </a:xfrm>
+          <a:prstGeom prst="rect">
+            <a:avLst/>
+          </a:prstGeom>
+          <a:solidFill>
+            <a:srgbClr val="888888"/>
+          </a:solidFill>
+          <a:ln w="2540">
+            <a:solidFill>
+              <a:srgbClr val="333333"/>
+            </a:solidFill>
+          </a:ln>
+          <a:effectLst/>
+        </p:spPr>
+        <p:style>
+          <a:lnRef idx="1">
+            <a:schemeClr val="accent1"/>
+          </a:lnRef>
+          <a:fillRef idx="3">
+            <a:schemeClr val="accent1"/>
+          </a:fillRef>
+          <a:effectRef idx="2">
+            <a:schemeClr val="accent1"/>
+          </a:effectRef>
+          <a:fontRef idx="minor">
+            <a:schemeClr val="lt1"/>
+          </a:fontRef>
+        </p:style>
+        <p:txBody>
+          <a:bodyPr rtlCol="0" anchor="ctr"/>
+          <a:lstStyle/>
+          <a:p>
+            <a:pPr algn="ctr"/>
+          </a:p>
+        </p:txBody>
+      </p:sp>
+      <p:sp>
+        <p:nvSpPr>
+          <p:cNvPr id="291" name="TextBox 290"/>
+          <p:cNvSpPr txBox="1"/>
+          <p:nvPr/>
+        </p:nvSpPr>
+        <p:spPr>
+          <a:xfrm>
+            <a:off x="5340096" y="5550407"/>
+            <a:ext cx="411480" cy="146304"/>
+          </a:xfrm>
+          <a:prstGeom prst="rect">
+            <a:avLst/>
+          </a:prstGeom>
+          <a:noFill/>
+          <a:effectLst/>
+        </p:spPr>
+        <p:txBody>
+          <a:bodyPr wrap="square" lIns="0" rIns="0" tIns="0" bIns="0" anchor="t">
+            <a:spAutoFit/>
+          </a:bodyPr>
+          <a:lstStyle/>
+          <a:p>
+            <a:pPr algn="l"/>
+            <a:r>
+              <a:rPr sz="650" b="0" i="0">
+                <a:solidFill>
+                  <a:srgbClr val="222222"/>
+                </a:solidFill>
+                <a:latin typeface="Arial"/>
+              </a:rPr>
+              <a:t>post</a:t>
+            </a:r>
+          </a:p>
+        </p:txBody>
+      </p:sp>
+      <p:sp>
+        <p:nvSpPr>
+          <p:cNvPr id="292" name="Rectangle 291"/>
+          <p:cNvSpPr/>
+          <p:nvPr/>
+        </p:nvSpPr>
+        <p:spPr>
+          <a:xfrm>
+            <a:off x="5797296" y="5577840"/>
+            <a:ext cx="146304" cy="91440"/>
+          </a:xfrm>
+          <a:prstGeom prst="rect">
+            <a:avLst/>
+          </a:prstGeom>
+          <a:solidFill>
+            <a:srgbClr val="D4A300"/>
+          </a:solidFill>
+          <a:ln w="2540">
+            <a:solidFill>
+              <a:srgbClr val="333333"/>
+            </a:solidFill>
+          </a:ln>
+          <a:effectLst/>
+        </p:spPr>
+        <p:style>
+          <a:lnRef idx="1">
+            <a:schemeClr val="accent1"/>
+          </a:lnRef>
+          <a:fillRef idx="3">
+            <a:schemeClr val="accent1"/>
+          </a:fillRef>
+          <a:effectRef idx="2">
+            <a:schemeClr val="accent1"/>
+          </a:effectRef>
+          <a:fontRef idx="minor">
+            <a:schemeClr val="lt1"/>
+          </a:fontRef>
+        </p:style>
+        <p:txBody>
+          <a:bodyPr rtlCol="0" anchor="ctr"/>
+          <a:lstStyle/>
+          <a:p>
+            <a:pPr algn="ctr"/>
+          </a:p>
+        </p:txBody>
+      </p:sp>
+      <p:sp>
+        <p:nvSpPr>
+          <p:cNvPr id="293" name="TextBox 292"/>
+          <p:cNvSpPr txBox="1"/>
+          <p:nvPr/>
+        </p:nvSpPr>
+        <p:spPr>
+          <a:xfrm>
+            <a:off x="5961888" y="5550407"/>
+            <a:ext cx="411480" cy="146304"/>
+          </a:xfrm>
+          <a:prstGeom prst="rect">
+            <a:avLst/>
+          </a:prstGeom>
+          <a:noFill/>
+          <a:effectLst/>
+        </p:spPr>
+        <p:txBody>
+          <a:bodyPr wrap="square" lIns="0" rIns="0" tIns="0" bIns="0" anchor="t">
+            <a:spAutoFit/>
+          </a:bodyPr>
+          <a:lstStyle/>
+          <a:p>
+            <a:pPr algn="l"/>
+            <a:r>
+              <a:rPr sz="650" b="0" i="0">
+                <a:solidFill>
+                  <a:srgbClr val="222222"/>
+                </a:solidFill>
+                <a:latin typeface="Arial"/>
+              </a:rPr>
+              <a:t>Δ</a:t>
+            </a:r>
+          </a:p>
+        </p:txBody>
+      </p:sp>
+      <p:sp>
+        <p:nvSpPr>
+          <p:cNvPr id="294" name="TextBox 293"/>
+          <p:cNvSpPr txBox="1"/>
+          <p:nvPr/>
+        </p:nvSpPr>
+        <p:spPr>
+          <a:xfrm>
+            <a:off x="3977640" y="5349240"/>
+            <a:ext cx="713232" cy="182880"/>
+          </a:xfrm>
+          <a:prstGeom prst="rect">
+            <a:avLst/>
+          </a:prstGeom>
+          <a:noFill/>
+          <a:effectLst/>
+        </p:spPr>
+        <p:txBody>
+          <a:bodyPr wrap="square" lIns="0" rIns="0" tIns="0" bIns="0" anchor="t">
+            <a:spAutoFit/>
+          </a:bodyPr>
+          <a:lstStyle/>
+          <a:p>
+            <a:pPr algn="ctr"/>
+            <a:r>
+              <a:rPr sz="650" b="0" i="0">
                 <a:solidFill>
                   <a:srgbClr val="888888"/>
                 </a:solidFill>
@@ -11804,7 +15549,7 @@
                 </a:solidFill>
                 <a:latin typeface="Arial"/>
               </a:rPr>
-              <a:t>Six composites reach ceiling P = 0.05 (Ayers TIS, IFN-γ 6/10, CD8 cytotoxic, M1 macrophage, GC-TF).</a:t>
+              <a:t>Six composites reach ceiling P = 0.05 (Ayers TIS, IFN-γ 6/10, CD8 cytotoxic, M1 macrophage, GC-TF). Value axis ticks at 0.2 increments; P from one-sided MW, 3 vs 3 ceiling = 0.050.</a:t>
             </a:r>
           </a:p>
         </p:txBody>
@@ -11817,8 +15562,8 @@
         </p:nvCxnSpPr>
         <p:spPr>
           <a:xfrm>
-            <a:off x="3200400" y="777240"/>
-            <a:ext cx="0" cy="4178808"/>
+            <a:off x="91439" y="4910328"/>
+            <a:ext cx="5852161" cy="0"/>
           </a:xfrm>
           <a:prstGeom prst="line">
             <a:avLst/>
@@ -11845,16 +15590,988 @@
           </a:fontRef>
         </p:style>
       </p:cxnSp>
-      <p:sp>
-        <p:nvSpPr>
-          <p:cNvPr id="5" name="TextBox 4"/>
+      <p:cxnSp>
+        <p:nvCxnSpPr>
+          <p:cNvPr id="5" name="Connector 4"/>
+          <p:cNvCxnSpPr/>
+          <p:nvPr/>
+        </p:nvCxnSpPr>
+        <p:spPr>
+          <a:xfrm>
+            <a:off x="91440" y="4910328"/>
+            <a:ext cx="0" cy="54864"/>
+          </a:xfrm>
+          <a:prstGeom prst="line">
+            <a:avLst/>
+          </a:prstGeom>
+          <a:ln w="5080">
+            <a:solidFill>
+              <a:srgbClr val="333333"/>
+            </a:solidFill>
+          </a:ln>
+          <a:effectLst/>
+        </p:spPr>
+        <p:style>
+          <a:lnRef idx="2">
+            <a:schemeClr val="accent1"/>
+          </a:lnRef>
+          <a:fillRef idx="0">
+            <a:schemeClr val="accent1"/>
+          </a:fillRef>
+          <a:effectRef idx="1">
+            <a:schemeClr val="accent1"/>
+          </a:effectRef>
+          <a:fontRef idx="minor">
+            <a:schemeClr val="tx1"/>
+          </a:fontRef>
+        </p:style>
+      </p:cxnSp>
+      <p:sp>
+        <p:nvSpPr>
+          <p:cNvPr id="6" name="TextBox 5"/>
           <p:cNvSpPr txBox="1"/>
           <p:nvPr/>
         </p:nvSpPr>
         <p:spPr>
           <a:xfrm>
-            <a:off x="548640" y="850392"/>
-            <a:ext cx="2468880" cy="210312"/>
+            <a:off x="-109727" y="4974336"/>
+            <a:ext cx="402336" cy="164592"/>
+          </a:xfrm>
+          <a:prstGeom prst="rect">
+            <a:avLst/>
+          </a:prstGeom>
+          <a:noFill/>
+          <a:effectLst/>
+        </p:spPr>
+        <p:txBody>
+          <a:bodyPr wrap="square" lIns="0" rIns="0" tIns="0" bIns="0" anchor="t">
+            <a:spAutoFit/>
+          </a:bodyPr>
+          <a:lstStyle/>
+          <a:p>
+            <a:pPr algn="ctr"/>
+            <a:r>
+              <a:rPr sz="600" b="0" i="0">
+                <a:solidFill>
+                  <a:srgbClr val="888888"/>
+                </a:solidFill>
+                <a:latin typeface="Arial"/>
+              </a:rPr>
+              <a:t>-1.2</a:t>
+            </a:r>
+          </a:p>
+        </p:txBody>
+      </p:sp>
+      <p:cxnSp>
+        <p:nvCxnSpPr>
+          <p:cNvPr id="7" name="Connector 6"/>
+          <p:cNvCxnSpPr/>
+          <p:nvPr/>
+        </p:nvCxnSpPr>
+        <p:spPr>
+          <a:xfrm>
+            <a:off x="579120" y="4910328"/>
+            <a:ext cx="0" cy="54864"/>
+          </a:xfrm>
+          <a:prstGeom prst="line">
+            <a:avLst/>
+          </a:prstGeom>
+          <a:ln w="5080">
+            <a:solidFill>
+              <a:srgbClr val="333333"/>
+            </a:solidFill>
+          </a:ln>
+          <a:effectLst/>
+        </p:spPr>
+        <p:style>
+          <a:lnRef idx="2">
+            <a:schemeClr val="accent1"/>
+          </a:lnRef>
+          <a:fillRef idx="0">
+            <a:schemeClr val="accent1"/>
+          </a:fillRef>
+          <a:effectRef idx="1">
+            <a:schemeClr val="accent1"/>
+          </a:effectRef>
+          <a:fontRef idx="minor">
+            <a:schemeClr val="tx1"/>
+          </a:fontRef>
+        </p:style>
+      </p:cxnSp>
+      <p:sp>
+        <p:nvSpPr>
+          <p:cNvPr id="8" name="TextBox 7"/>
+          <p:cNvSpPr txBox="1"/>
+          <p:nvPr/>
+        </p:nvSpPr>
+        <p:spPr>
+          <a:xfrm>
+            <a:off x="377952" y="4974336"/>
+            <a:ext cx="402336" cy="164592"/>
+          </a:xfrm>
+          <a:prstGeom prst="rect">
+            <a:avLst/>
+          </a:prstGeom>
+          <a:noFill/>
+          <a:effectLst/>
+        </p:spPr>
+        <p:txBody>
+          <a:bodyPr wrap="square" lIns="0" rIns="0" tIns="0" bIns="0" anchor="t">
+            <a:spAutoFit/>
+          </a:bodyPr>
+          <a:lstStyle/>
+          <a:p>
+            <a:pPr algn="ctr"/>
+            <a:r>
+              <a:rPr sz="600" b="0" i="0">
+                <a:solidFill>
+                  <a:srgbClr val="888888"/>
+                </a:solidFill>
+                <a:latin typeface="Arial"/>
+              </a:rPr>
+              <a:t>-1.0</a:t>
+            </a:r>
+          </a:p>
+        </p:txBody>
+      </p:sp>
+      <p:cxnSp>
+        <p:nvCxnSpPr>
+          <p:cNvPr id="9" name="Connector 8"/>
+          <p:cNvCxnSpPr/>
+          <p:nvPr/>
+        </p:nvCxnSpPr>
+        <p:spPr>
+          <a:xfrm>
+            <a:off x="1066799" y="4910328"/>
+            <a:ext cx="0" cy="54864"/>
+          </a:xfrm>
+          <a:prstGeom prst="line">
+            <a:avLst/>
+          </a:prstGeom>
+          <a:ln w="5080">
+            <a:solidFill>
+              <a:srgbClr val="333333"/>
+            </a:solidFill>
+          </a:ln>
+          <a:effectLst/>
+        </p:spPr>
+        <p:style>
+          <a:lnRef idx="2">
+            <a:schemeClr val="accent1"/>
+          </a:lnRef>
+          <a:fillRef idx="0">
+            <a:schemeClr val="accent1"/>
+          </a:fillRef>
+          <a:effectRef idx="1">
+            <a:schemeClr val="accent1"/>
+          </a:effectRef>
+          <a:fontRef idx="minor">
+            <a:schemeClr val="tx1"/>
+          </a:fontRef>
+        </p:style>
+      </p:cxnSp>
+      <p:sp>
+        <p:nvSpPr>
+          <p:cNvPr id="10" name="TextBox 9"/>
+          <p:cNvSpPr txBox="1"/>
+          <p:nvPr/>
+        </p:nvSpPr>
+        <p:spPr>
+          <a:xfrm>
+            <a:off x="865631" y="4974336"/>
+            <a:ext cx="402336" cy="164592"/>
+          </a:xfrm>
+          <a:prstGeom prst="rect">
+            <a:avLst/>
+          </a:prstGeom>
+          <a:noFill/>
+          <a:effectLst/>
+        </p:spPr>
+        <p:txBody>
+          <a:bodyPr wrap="square" lIns="0" rIns="0" tIns="0" bIns="0" anchor="t">
+            <a:spAutoFit/>
+          </a:bodyPr>
+          <a:lstStyle/>
+          <a:p>
+            <a:pPr algn="ctr"/>
+            <a:r>
+              <a:rPr sz="600" b="0" i="0">
+                <a:solidFill>
+                  <a:srgbClr val="888888"/>
+                </a:solidFill>
+                <a:latin typeface="Arial"/>
+              </a:rPr>
+              <a:t>-0.8</a:t>
+            </a:r>
+          </a:p>
+        </p:txBody>
+      </p:sp>
+      <p:cxnSp>
+        <p:nvCxnSpPr>
+          <p:cNvPr id="11" name="Connector 10"/>
+          <p:cNvCxnSpPr/>
+          <p:nvPr/>
+        </p:nvCxnSpPr>
+        <p:spPr>
+          <a:xfrm>
+            <a:off x="1554479" y="4910328"/>
+            <a:ext cx="0" cy="54864"/>
+          </a:xfrm>
+          <a:prstGeom prst="line">
+            <a:avLst/>
+          </a:prstGeom>
+          <a:ln w="5080">
+            <a:solidFill>
+              <a:srgbClr val="333333"/>
+            </a:solidFill>
+          </a:ln>
+          <a:effectLst/>
+        </p:spPr>
+        <p:style>
+          <a:lnRef idx="2">
+            <a:schemeClr val="accent1"/>
+          </a:lnRef>
+          <a:fillRef idx="0">
+            <a:schemeClr val="accent1"/>
+          </a:fillRef>
+          <a:effectRef idx="1">
+            <a:schemeClr val="accent1"/>
+          </a:effectRef>
+          <a:fontRef idx="minor">
+            <a:schemeClr val="tx1"/>
+          </a:fontRef>
+        </p:style>
+      </p:cxnSp>
+      <p:sp>
+        <p:nvSpPr>
+          <p:cNvPr id="12" name="TextBox 11"/>
+          <p:cNvSpPr txBox="1"/>
+          <p:nvPr/>
+        </p:nvSpPr>
+        <p:spPr>
+          <a:xfrm>
+            <a:off x="1353311" y="4974336"/>
+            <a:ext cx="402336" cy="164592"/>
+          </a:xfrm>
+          <a:prstGeom prst="rect">
+            <a:avLst/>
+          </a:prstGeom>
+          <a:noFill/>
+          <a:effectLst/>
+        </p:spPr>
+        <p:txBody>
+          <a:bodyPr wrap="square" lIns="0" rIns="0" tIns="0" bIns="0" anchor="t">
+            <a:spAutoFit/>
+          </a:bodyPr>
+          <a:lstStyle/>
+          <a:p>
+            <a:pPr algn="ctr"/>
+            <a:r>
+              <a:rPr sz="600" b="0" i="0">
+                <a:solidFill>
+                  <a:srgbClr val="888888"/>
+                </a:solidFill>
+                <a:latin typeface="Arial"/>
+              </a:rPr>
+              <a:t>-0.6</a:t>
+            </a:r>
+          </a:p>
+        </p:txBody>
+      </p:sp>
+      <p:cxnSp>
+        <p:nvCxnSpPr>
+          <p:cNvPr id="13" name="Connector 12"/>
+          <p:cNvCxnSpPr/>
+          <p:nvPr/>
+        </p:nvCxnSpPr>
+        <p:spPr>
+          <a:xfrm>
+            <a:off x="2042160" y="4910328"/>
+            <a:ext cx="0" cy="54864"/>
+          </a:xfrm>
+          <a:prstGeom prst="line">
+            <a:avLst/>
+          </a:prstGeom>
+          <a:ln w="5080">
+            <a:solidFill>
+              <a:srgbClr val="333333"/>
+            </a:solidFill>
+          </a:ln>
+          <a:effectLst/>
+        </p:spPr>
+        <p:style>
+          <a:lnRef idx="2">
+            <a:schemeClr val="accent1"/>
+          </a:lnRef>
+          <a:fillRef idx="0">
+            <a:schemeClr val="accent1"/>
+          </a:fillRef>
+          <a:effectRef idx="1">
+            <a:schemeClr val="accent1"/>
+          </a:effectRef>
+          <a:fontRef idx="minor">
+            <a:schemeClr val="tx1"/>
+          </a:fontRef>
+        </p:style>
+      </p:cxnSp>
+      <p:sp>
+        <p:nvSpPr>
+          <p:cNvPr id="14" name="TextBox 13"/>
+          <p:cNvSpPr txBox="1"/>
+          <p:nvPr/>
+        </p:nvSpPr>
+        <p:spPr>
+          <a:xfrm>
+            <a:off x="1840991" y="4974336"/>
+            <a:ext cx="402336" cy="164592"/>
+          </a:xfrm>
+          <a:prstGeom prst="rect">
+            <a:avLst/>
+          </a:prstGeom>
+          <a:noFill/>
+          <a:effectLst/>
+        </p:spPr>
+        <p:txBody>
+          <a:bodyPr wrap="square" lIns="0" rIns="0" tIns="0" bIns="0" anchor="t">
+            <a:spAutoFit/>
+          </a:bodyPr>
+          <a:lstStyle/>
+          <a:p>
+            <a:pPr algn="ctr"/>
+            <a:r>
+              <a:rPr sz="600" b="0" i="0">
+                <a:solidFill>
+                  <a:srgbClr val="888888"/>
+                </a:solidFill>
+                <a:latin typeface="Arial"/>
+              </a:rPr>
+              <a:t>-0.4</a:t>
+            </a:r>
+          </a:p>
+        </p:txBody>
+      </p:sp>
+      <p:cxnSp>
+        <p:nvCxnSpPr>
+          <p:cNvPr id="15" name="Connector 14"/>
+          <p:cNvCxnSpPr/>
+          <p:nvPr/>
+        </p:nvCxnSpPr>
+        <p:spPr>
+          <a:xfrm>
+            <a:off x="2529840" y="4910328"/>
+            <a:ext cx="0" cy="54864"/>
+          </a:xfrm>
+          <a:prstGeom prst="line">
+            <a:avLst/>
+          </a:prstGeom>
+          <a:ln w="5080">
+            <a:solidFill>
+              <a:srgbClr val="333333"/>
+            </a:solidFill>
+          </a:ln>
+          <a:effectLst/>
+        </p:spPr>
+        <p:style>
+          <a:lnRef idx="2">
+            <a:schemeClr val="accent1"/>
+          </a:lnRef>
+          <a:fillRef idx="0">
+            <a:schemeClr val="accent1"/>
+          </a:fillRef>
+          <a:effectRef idx="1">
+            <a:schemeClr val="accent1"/>
+          </a:effectRef>
+          <a:fontRef idx="minor">
+            <a:schemeClr val="tx1"/>
+          </a:fontRef>
+        </p:style>
+      </p:cxnSp>
+      <p:sp>
+        <p:nvSpPr>
+          <p:cNvPr id="16" name="TextBox 15"/>
+          <p:cNvSpPr txBox="1"/>
+          <p:nvPr/>
+        </p:nvSpPr>
+        <p:spPr>
+          <a:xfrm>
+            <a:off x="2328672" y="4974336"/>
+            <a:ext cx="402336" cy="164592"/>
+          </a:xfrm>
+          <a:prstGeom prst="rect">
+            <a:avLst/>
+          </a:prstGeom>
+          <a:noFill/>
+          <a:effectLst/>
+        </p:spPr>
+        <p:txBody>
+          <a:bodyPr wrap="square" lIns="0" rIns="0" tIns="0" bIns="0" anchor="t">
+            <a:spAutoFit/>
+          </a:bodyPr>
+          <a:lstStyle/>
+          <a:p>
+            <a:pPr algn="ctr"/>
+            <a:r>
+              <a:rPr sz="600" b="0" i="0">
+                <a:solidFill>
+                  <a:srgbClr val="888888"/>
+                </a:solidFill>
+                <a:latin typeface="Arial"/>
+              </a:rPr>
+              <a:t>-0.2</a:t>
+            </a:r>
+          </a:p>
+        </p:txBody>
+      </p:sp>
+      <p:cxnSp>
+        <p:nvCxnSpPr>
+          <p:cNvPr id="17" name="Connector 16"/>
+          <p:cNvCxnSpPr/>
+          <p:nvPr/>
+        </p:nvCxnSpPr>
+        <p:spPr>
+          <a:xfrm>
+            <a:off x="3017520" y="4910328"/>
+            <a:ext cx="0" cy="54864"/>
+          </a:xfrm>
+          <a:prstGeom prst="line">
+            <a:avLst/>
+          </a:prstGeom>
+          <a:ln w="5080">
+            <a:solidFill>
+              <a:srgbClr val="333333"/>
+            </a:solidFill>
+          </a:ln>
+          <a:effectLst/>
+        </p:spPr>
+        <p:style>
+          <a:lnRef idx="2">
+            <a:schemeClr val="accent1"/>
+          </a:lnRef>
+          <a:fillRef idx="0">
+            <a:schemeClr val="accent1"/>
+          </a:fillRef>
+          <a:effectRef idx="1">
+            <a:schemeClr val="accent1"/>
+          </a:effectRef>
+          <a:fontRef idx="minor">
+            <a:schemeClr val="tx1"/>
+          </a:fontRef>
+        </p:style>
+      </p:cxnSp>
+      <p:sp>
+        <p:nvSpPr>
+          <p:cNvPr id="18" name="TextBox 17"/>
+          <p:cNvSpPr txBox="1"/>
+          <p:nvPr/>
+        </p:nvSpPr>
+        <p:spPr>
+          <a:xfrm>
+            <a:off x="2816351" y="4974336"/>
+            <a:ext cx="402336" cy="164592"/>
+          </a:xfrm>
+          <a:prstGeom prst="rect">
+            <a:avLst/>
+          </a:prstGeom>
+          <a:noFill/>
+          <a:effectLst/>
+        </p:spPr>
+        <p:txBody>
+          <a:bodyPr wrap="square" lIns="0" rIns="0" tIns="0" bIns="0" anchor="t">
+            <a:spAutoFit/>
+          </a:bodyPr>
+          <a:lstStyle/>
+          <a:p>
+            <a:pPr algn="ctr"/>
+            <a:r>
+              <a:rPr sz="600" b="0" i="0">
+                <a:solidFill>
+                  <a:srgbClr val="888888"/>
+                </a:solidFill>
+                <a:latin typeface="Arial"/>
+              </a:rPr>
+              <a:t>0</a:t>
+            </a:r>
+          </a:p>
+        </p:txBody>
+      </p:sp>
+      <p:cxnSp>
+        <p:nvCxnSpPr>
+          <p:cNvPr id="19" name="Connector 18"/>
+          <p:cNvCxnSpPr/>
+          <p:nvPr/>
+        </p:nvCxnSpPr>
+        <p:spPr>
+          <a:xfrm>
+            <a:off x="3505199" y="4910328"/>
+            <a:ext cx="0" cy="54864"/>
+          </a:xfrm>
+          <a:prstGeom prst="line">
+            <a:avLst/>
+          </a:prstGeom>
+          <a:ln w="5080">
+            <a:solidFill>
+              <a:srgbClr val="333333"/>
+            </a:solidFill>
+          </a:ln>
+          <a:effectLst/>
+        </p:spPr>
+        <p:style>
+          <a:lnRef idx="2">
+            <a:schemeClr val="accent1"/>
+          </a:lnRef>
+          <a:fillRef idx="0">
+            <a:schemeClr val="accent1"/>
+          </a:fillRef>
+          <a:effectRef idx="1">
+            <a:schemeClr val="accent1"/>
+          </a:effectRef>
+          <a:fontRef idx="minor">
+            <a:schemeClr val="tx1"/>
+          </a:fontRef>
+        </p:style>
+      </p:cxnSp>
+      <p:sp>
+        <p:nvSpPr>
+          <p:cNvPr id="20" name="TextBox 19"/>
+          <p:cNvSpPr txBox="1"/>
+          <p:nvPr/>
+        </p:nvSpPr>
+        <p:spPr>
+          <a:xfrm>
+            <a:off x="3304031" y="4974336"/>
+            <a:ext cx="402336" cy="164592"/>
+          </a:xfrm>
+          <a:prstGeom prst="rect">
+            <a:avLst/>
+          </a:prstGeom>
+          <a:noFill/>
+          <a:effectLst/>
+        </p:spPr>
+        <p:txBody>
+          <a:bodyPr wrap="square" lIns="0" rIns="0" tIns="0" bIns="0" anchor="t">
+            <a:spAutoFit/>
+          </a:bodyPr>
+          <a:lstStyle/>
+          <a:p>
+            <a:pPr algn="ctr"/>
+            <a:r>
+              <a:rPr sz="600" b="0" i="0">
+                <a:solidFill>
+                  <a:srgbClr val="888888"/>
+                </a:solidFill>
+                <a:latin typeface="Arial"/>
+              </a:rPr>
+              <a:t>+0.2</a:t>
+            </a:r>
+          </a:p>
+        </p:txBody>
+      </p:sp>
+      <p:cxnSp>
+        <p:nvCxnSpPr>
+          <p:cNvPr id="21" name="Connector 20"/>
+          <p:cNvCxnSpPr/>
+          <p:nvPr/>
+        </p:nvCxnSpPr>
+        <p:spPr>
+          <a:xfrm>
+            <a:off x="3992879" y="4910328"/>
+            <a:ext cx="0" cy="54864"/>
+          </a:xfrm>
+          <a:prstGeom prst="line">
+            <a:avLst/>
+          </a:prstGeom>
+          <a:ln w="5080">
+            <a:solidFill>
+              <a:srgbClr val="333333"/>
+            </a:solidFill>
+          </a:ln>
+          <a:effectLst/>
+        </p:spPr>
+        <p:style>
+          <a:lnRef idx="2">
+            <a:schemeClr val="accent1"/>
+          </a:lnRef>
+          <a:fillRef idx="0">
+            <a:schemeClr val="accent1"/>
+          </a:fillRef>
+          <a:effectRef idx="1">
+            <a:schemeClr val="accent1"/>
+          </a:effectRef>
+          <a:fontRef idx="minor">
+            <a:schemeClr val="tx1"/>
+          </a:fontRef>
+        </p:style>
+      </p:cxnSp>
+      <p:sp>
+        <p:nvSpPr>
+          <p:cNvPr id="22" name="TextBox 21"/>
+          <p:cNvSpPr txBox="1"/>
+          <p:nvPr/>
+        </p:nvSpPr>
+        <p:spPr>
+          <a:xfrm>
+            <a:off x="3791712" y="4974336"/>
+            <a:ext cx="402336" cy="164592"/>
+          </a:xfrm>
+          <a:prstGeom prst="rect">
+            <a:avLst/>
+          </a:prstGeom>
+          <a:noFill/>
+          <a:effectLst/>
+        </p:spPr>
+        <p:txBody>
+          <a:bodyPr wrap="square" lIns="0" rIns="0" tIns="0" bIns="0" anchor="t">
+            <a:spAutoFit/>
+          </a:bodyPr>
+          <a:lstStyle/>
+          <a:p>
+            <a:pPr algn="ctr"/>
+            <a:r>
+              <a:rPr sz="600" b="0" i="0">
+                <a:solidFill>
+                  <a:srgbClr val="888888"/>
+                </a:solidFill>
+                <a:latin typeface="Arial"/>
+              </a:rPr>
+              <a:t>+0.4</a:t>
+            </a:r>
+          </a:p>
+        </p:txBody>
+      </p:sp>
+      <p:cxnSp>
+        <p:nvCxnSpPr>
+          <p:cNvPr id="23" name="Connector 22"/>
+          <p:cNvCxnSpPr/>
+          <p:nvPr/>
+        </p:nvCxnSpPr>
+        <p:spPr>
+          <a:xfrm>
+            <a:off x="4480560" y="4910328"/>
+            <a:ext cx="0" cy="54864"/>
+          </a:xfrm>
+          <a:prstGeom prst="line">
+            <a:avLst/>
+          </a:prstGeom>
+          <a:ln w="5080">
+            <a:solidFill>
+              <a:srgbClr val="333333"/>
+            </a:solidFill>
+          </a:ln>
+          <a:effectLst/>
+        </p:spPr>
+        <p:style>
+          <a:lnRef idx="2">
+            <a:schemeClr val="accent1"/>
+          </a:lnRef>
+          <a:fillRef idx="0">
+            <a:schemeClr val="accent1"/>
+          </a:fillRef>
+          <a:effectRef idx="1">
+            <a:schemeClr val="accent1"/>
+          </a:effectRef>
+          <a:fontRef idx="minor">
+            <a:schemeClr val="tx1"/>
+          </a:fontRef>
+        </p:style>
+      </p:cxnSp>
+      <p:sp>
+        <p:nvSpPr>
+          <p:cNvPr id="24" name="TextBox 23"/>
+          <p:cNvSpPr txBox="1"/>
+          <p:nvPr/>
+        </p:nvSpPr>
+        <p:spPr>
+          <a:xfrm>
+            <a:off x="4279392" y="4974336"/>
+            <a:ext cx="402336" cy="164592"/>
+          </a:xfrm>
+          <a:prstGeom prst="rect">
+            <a:avLst/>
+          </a:prstGeom>
+          <a:noFill/>
+          <a:effectLst/>
+        </p:spPr>
+        <p:txBody>
+          <a:bodyPr wrap="square" lIns="0" rIns="0" tIns="0" bIns="0" anchor="t">
+            <a:spAutoFit/>
+          </a:bodyPr>
+          <a:lstStyle/>
+          <a:p>
+            <a:pPr algn="ctr"/>
+            <a:r>
+              <a:rPr sz="600" b="0" i="0">
+                <a:solidFill>
+                  <a:srgbClr val="888888"/>
+                </a:solidFill>
+                <a:latin typeface="Arial"/>
+              </a:rPr>
+              <a:t>+0.6</a:t>
+            </a:r>
+          </a:p>
+        </p:txBody>
+      </p:sp>
+      <p:cxnSp>
+        <p:nvCxnSpPr>
+          <p:cNvPr id="25" name="Connector 24"/>
+          <p:cNvCxnSpPr/>
+          <p:nvPr/>
+        </p:nvCxnSpPr>
+        <p:spPr>
+          <a:xfrm>
+            <a:off x="4968240" y="4910328"/>
+            <a:ext cx="0" cy="54864"/>
+          </a:xfrm>
+          <a:prstGeom prst="line">
+            <a:avLst/>
+          </a:prstGeom>
+          <a:ln w="5080">
+            <a:solidFill>
+              <a:srgbClr val="333333"/>
+            </a:solidFill>
+          </a:ln>
+          <a:effectLst/>
+        </p:spPr>
+        <p:style>
+          <a:lnRef idx="2">
+            <a:schemeClr val="accent1"/>
+          </a:lnRef>
+          <a:fillRef idx="0">
+            <a:schemeClr val="accent1"/>
+          </a:fillRef>
+          <a:effectRef idx="1">
+            <a:schemeClr val="accent1"/>
+          </a:effectRef>
+          <a:fontRef idx="minor">
+            <a:schemeClr val="tx1"/>
+          </a:fontRef>
+        </p:style>
+      </p:cxnSp>
+      <p:sp>
+        <p:nvSpPr>
+          <p:cNvPr id="26" name="TextBox 25"/>
+          <p:cNvSpPr txBox="1"/>
+          <p:nvPr/>
+        </p:nvSpPr>
+        <p:spPr>
+          <a:xfrm>
+            <a:off x="4767072" y="4974336"/>
+            <a:ext cx="402336" cy="164592"/>
+          </a:xfrm>
+          <a:prstGeom prst="rect">
+            <a:avLst/>
+          </a:prstGeom>
+          <a:noFill/>
+          <a:effectLst/>
+        </p:spPr>
+        <p:txBody>
+          <a:bodyPr wrap="square" lIns="0" rIns="0" tIns="0" bIns="0" anchor="t">
+            <a:spAutoFit/>
+          </a:bodyPr>
+          <a:lstStyle/>
+          <a:p>
+            <a:pPr algn="ctr"/>
+            <a:r>
+              <a:rPr sz="600" b="0" i="0">
+                <a:solidFill>
+                  <a:srgbClr val="888888"/>
+                </a:solidFill>
+                <a:latin typeface="Arial"/>
+              </a:rPr>
+              <a:t>+0.8</a:t>
+            </a:r>
+          </a:p>
+        </p:txBody>
+      </p:sp>
+      <p:cxnSp>
+        <p:nvCxnSpPr>
+          <p:cNvPr id="27" name="Connector 26"/>
+          <p:cNvCxnSpPr/>
+          <p:nvPr/>
+        </p:nvCxnSpPr>
+        <p:spPr>
+          <a:xfrm>
+            <a:off x="5455920" y="4910328"/>
+            <a:ext cx="0" cy="54864"/>
+          </a:xfrm>
+          <a:prstGeom prst="line">
+            <a:avLst/>
+          </a:prstGeom>
+          <a:ln w="5080">
+            <a:solidFill>
+              <a:srgbClr val="333333"/>
+            </a:solidFill>
+          </a:ln>
+          <a:effectLst/>
+        </p:spPr>
+        <p:style>
+          <a:lnRef idx="2">
+            <a:schemeClr val="accent1"/>
+          </a:lnRef>
+          <a:fillRef idx="0">
+            <a:schemeClr val="accent1"/>
+          </a:fillRef>
+          <a:effectRef idx="1">
+            <a:schemeClr val="accent1"/>
+          </a:effectRef>
+          <a:fontRef idx="minor">
+            <a:schemeClr val="tx1"/>
+          </a:fontRef>
+        </p:style>
+      </p:cxnSp>
+      <p:sp>
+        <p:nvSpPr>
+          <p:cNvPr id="28" name="TextBox 27"/>
+          <p:cNvSpPr txBox="1"/>
+          <p:nvPr/>
+        </p:nvSpPr>
+        <p:spPr>
+          <a:xfrm>
+            <a:off x="5254752" y="4974336"/>
+            <a:ext cx="402336" cy="164592"/>
+          </a:xfrm>
+          <a:prstGeom prst="rect">
+            <a:avLst/>
+          </a:prstGeom>
+          <a:noFill/>
+          <a:effectLst/>
+        </p:spPr>
+        <p:txBody>
+          <a:bodyPr wrap="square" lIns="0" rIns="0" tIns="0" bIns="0" anchor="t">
+            <a:spAutoFit/>
+          </a:bodyPr>
+          <a:lstStyle/>
+          <a:p>
+            <a:pPr algn="ctr"/>
+            <a:r>
+              <a:rPr sz="600" b="0" i="0">
+                <a:solidFill>
+                  <a:srgbClr val="888888"/>
+                </a:solidFill>
+                <a:latin typeface="Arial"/>
+              </a:rPr>
+              <a:t>+1.0</a:t>
+            </a:r>
+          </a:p>
+        </p:txBody>
+      </p:sp>
+      <p:cxnSp>
+        <p:nvCxnSpPr>
+          <p:cNvPr id="29" name="Connector 28"/>
+          <p:cNvCxnSpPr/>
+          <p:nvPr/>
+        </p:nvCxnSpPr>
+        <p:spPr>
+          <a:xfrm>
+            <a:off x="5943599" y="4910328"/>
+            <a:ext cx="0" cy="54864"/>
+          </a:xfrm>
+          <a:prstGeom prst="line">
+            <a:avLst/>
+          </a:prstGeom>
+          <a:ln w="5080">
+            <a:solidFill>
+              <a:srgbClr val="333333"/>
+            </a:solidFill>
+          </a:ln>
+          <a:effectLst/>
+        </p:spPr>
+        <p:style>
+          <a:lnRef idx="2">
+            <a:schemeClr val="accent1"/>
+          </a:lnRef>
+          <a:fillRef idx="0">
+            <a:schemeClr val="accent1"/>
+          </a:fillRef>
+          <a:effectRef idx="1">
+            <a:schemeClr val="accent1"/>
+          </a:effectRef>
+          <a:fontRef idx="minor">
+            <a:schemeClr val="tx1"/>
+          </a:fontRef>
+        </p:style>
+      </p:cxnSp>
+      <p:sp>
+        <p:nvSpPr>
+          <p:cNvPr id="30" name="TextBox 29"/>
+          <p:cNvSpPr txBox="1"/>
+          <p:nvPr/>
+        </p:nvSpPr>
+        <p:spPr>
+          <a:xfrm>
+            <a:off x="5742431" y="4974336"/>
+            <a:ext cx="402336" cy="164592"/>
+          </a:xfrm>
+          <a:prstGeom prst="rect">
+            <a:avLst/>
+          </a:prstGeom>
+          <a:noFill/>
+          <a:effectLst/>
+        </p:spPr>
+        <p:txBody>
+          <a:bodyPr wrap="square" lIns="0" rIns="0" tIns="0" bIns="0" anchor="t">
+            <a:spAutoFit/>
+          </a:bodyPr>
+          <a:lstStyle/>
+          <a:p>
+            <a:pPr algn="ctr"/>
+            <a:r>
+              <a:rPr sz="600" b="0" i="0">
+                <a:solidFill>
+                  <a:srgbClr val="888888"/>
+                </a:solidFill>
+                <a:latin typeface="Arial"/>
+              </a:rPr>
+              <a:t>+1.2</a:t>
+            </a:r>
+          </a:p>
+        </p:txBody>
+      </p:sp>
+      <p:cxnSp>
+        <p:nvCxnSpPr>
+          <p:cNvPr id="31" name="Connector 30"/>
+          <p:cNvCxnSpPr/>
+          <p:nvPr/>
+        </p:nvCxnSpPr>
+        <p:spPr>
+          <a:xfrm>
+            <a:off x="3017520" y="822959"/>
+            <a:ext cx="0" cy="4087369"/>
+          </a:xfrm>
+          <a:prstGeom prst="line">
+            <a:avLst/>
+          </a:prstGeom>
+          <a:ln w="7620">
+            <a:solidFill>
+              <a:srgbClr val="333333"/>
+            </a:solidFill>
+          </a:ln>
+          <a:effectLst/>
+        </p:spPr>
+        <p:style>
+          <a:lnRef idx="2">
+            <a:schemeClr val="accent1"/>
+          </a:lnRef>
+          <a:fillRef idx="0">
+            <a:schemeClr val="accent1"/>
+          </a:fillRef>
+          <a:effectRef idx="1">
+            <a:schemeClr val="accent1"/>
+          </a:effectRef>
+          <a:fontRef idx="minor">
+            <a:schemeClr val="tx1"/>
+          </a:fontRef>
+        </p:style>
+      </p:cxnSp>
+      <p:sp>
+        <p:nvSpPr>
+          <p:cNvPr id="32" name="TextBox 31"/>
+          <p:cNvSpPr txBox="1"/>
+          <p:nvPr/>
+        </p:nvSpPr>
+        <p:spPr>
+          <a:xfrm>
+            <a:off x="457200" y="850392"/>
+            <a:ext cx="2377440" cy="210312"/>
           </a:xfrm>
           <a:prstGeom prst="rect">
             <a:avLst/>
@@ -11883,14 +16600,14 @@
       </p:sp>
       <p:sp>
         <p:nvSpPr>
-          <p:cNvPr id="6" name="Rectangle 5"/>
-          <p:cNvSpPr/>
-          <p:nvPr/>
-        </p:nvSpPr>
-        <p:spPr>
-          <a:xfrm>
-            <a:off x="3200400" y="886968"/>
-            <a:ext cx="2725301" cy="128016"/>
+          <p:cNvPr id="33" name="Rectangle 32"/>
+          <p:cNvSpPr/>
+          <p:nvPr/>
+        </p:nvSpPr>
+        <p:spPr>
+          <a:xfrm>
+            <a:off x="3017520" y="886968"/>
+            <a:ext cx="2134056" cy="128016"/>
           </a:xfrm>
           <a:prstGeom prst="rect">
             <a:avLst/>
@@ -11929,14 +16646,14 @@
       </p:sp>
       <p:sp>
         <p:nvSpPr>
-          <p:cNvPr id="7" name="TextBox 6"/>
+          <p:cNvPr id="34" name="TextBox 33"/>
           <p:cNvSpPr txBox="1"/>
           <p:nvPr/>
         </p:nvSpPr>
         <p:spPr>
           <a:xfrm>
-            <a:off x="5971421" y="850392"/>
-            <a:ext cx="640080" cy="210312"/>
+            <a:off x="6035040" y="850392"/>
+            <a:ext cx="1280160" cy="210312"/>
           </a:xfrm>
           <a:prstGeom prst="rect">
             <a:avLst/>
@@ -11952,27 +16669,27 @@
           <a:p>
             <a:pPr algn="l"/>
             <a:r>
-              <a:rPr sz="650" b="0" i="0">
+              <a:rPr sz="650" b="1" i="0">
                 <a:solidFill>
                   <a:srgbClr val="D4A300"/>
                 </a:solidFill>
-                <a:latin typeface="Arial"/>
+                <a:latin typeface="Courier New"/>
               </a:rPr>
-              <a:t>+0.88 ★</a:t>
-            </a:r>
-          </a:p>
-        </p:txBody>
-      </p:sp>
-      <p:sp>
-        <p:nvSpPr>
-          <p:cNvPr id="8" name="TextBox 7"/>
+              <a:t>+0.88   P=0.05 ★</a:t>
+            </a:r>
+          </a:p>
+        </p:txBody>
+      </p:sp>
+      <p:sp>
+        <p:nvSpPr>
+          <p:cNvPr id="35" name="TextBox 34"/>
           <p:cNvSpPr txBox="1"/>
           <p:nvPr/>
         </p:nvSpPr>
         <p:spPr>
           <a:xfrm>
-            <a:off x="548640" y="1024127"/>
-            <a:ext cx="2468880" cy="210312"/>
+            <a:off x="457200" y="1024127"/>
+            <a:ext cx="2377440" cy="210312"/>
           </a:xfrm>
           <a:prstGeom prst="rect">
             <a:avLst/>
@@ -12001,14 +16718,14 @@
       </p:sp>
       <p:sp>
         <p:nvSpPr>
-          <p:cNvPr id="9" name="Rectangle 8"/>
-          <p:cNvSpPr/>
-          <p:nvPr/>
-        </p:nvSpPr>
-        <p:spPr>
-          <a:xfrm>
-            <a:off x="3200400" y="1060704"/>
-            <a:ext cx="2688755" cy="128016"/>
+          <p:cNvPr id="36" name="Rectangle 35"/>
+          <p:cNvSpPr/>
+          <p:nvPr/>
+        </p:nvSpPr>
+        <p:spPr>
+          <a:xfrm>
+            <a:off x="3017520" y="1060704"/>
+            <a:ext cx="2105439" cy="128016"/>
           </a:xfrm>
           <a:prstGeom prst="rect">
             <a:avLst/>
@@ -12047,14 +16764,14 @@
       </p:sp>
       <p:sp>
         <p:nvSpPr>
-          <p:cNvPr id="10" name="TextBox 9"/>
+          <p:cNvPr id="37" name="TextBox 36"/>
           <p:cNvSpPr txBox="1"/>
           <p:nvPr/>
         </p:nvSpPr>
         <p:spPr>
           <a:xfrm>
-            <a:off x="5934875" y="1024127"/>
-            <a:ext cx="640080" cy="210312"/>
+            <a:off x="6035040" y="1024127"/>
+            <a:ext cx="1280160" cy="210312"/>
           </a:xfrm>
           <a:prstGeom prst="rect">
             <a:avLst/>
@@ -12070,27 +16787,27 @@
           <a:p>
             <a:pPr algn="l"/>
             <a:r>
-              <a:rPr sz="650" b="0" i="0">
+              <a:rPr sz="650" b="1" i="0">
                 <a:solidFill>
                   <a:srgbClr val="D4A300"/>
                 </a:solidFill>
-                <a:latin typeface="Arial"/>
+                <a:latin typeface="Courier New"/>
               </a:rPr>
-              <a:t>+0.86 ★</a:t>
-            </a:r>
-          </a:p>
-        </p:txBody>
-      </p:sp>
-      <p:sp>
-        <p:nvSpPr>
-          <p:cNvPr id="11" name="TextBox 10"/>
+              <a:t>+0.86   P=0.05 ★</a:t>
+            </a:r>
+          </a:p>
+        </p:txBody>
+      </p:sp>
+      <p:sp>
+        <p:nvSpPr>
+          <p:cNvPr id="38" name="TextBox 37"/>
           <p:cNvSpPr txBox="1"/>
           <p:nvPr/>
         </p:nvSpPr>
         <p:spPr>
           <a:xfrm>
-            <a:off x="548640" y="1197864"/>
-            <a:ext cx="2468880" cy="210312"/>
+            <a:off x="457200" y="1197864"/>
+            <a:ext cx="2377440" cy="210312"/>
           </a:xfrm>
           <a:prstGeom prst="rect">
             <a:avLst/>
@@ -12119,14 +16836,14 @@
       </p:sp>
       <p:sp>
         <p:nvSpPr>
-          <p:cNvPr id="12" name="Rectangle 11"/>
-          <p:cNvSpPr/>
-          <p:nvPr/>
-        </p:nvSpPr>
-        <p:spPr>
-          <a:xfrm>
-            <a:off x="3200400" y="1234440"/>
-            <a:ext cx="2423787" cy="128016"/>
+          <p:cNvPr id="39" name="Rectangle 38"/>
+          <p:cNvSpPr/>
+          <p:nvPr/>
+        </p:nvSpPr>
+        <p:spPr>
+          <a:xfrm>
+            <a:off x="3017520" y="1234440"/>
+            <a:ext cx="1897955" cy="128016"/>
           </a:xfrm>
           <a:prstGeom prst="rect">
             <a:avLst/>
@@ -12165,14 +16882,14 @@
       </p:sp>
       <p:sp>
         <p:nvSpPr>
-          <p:cNvPr id="13" name="TextBox 12"/>
+          <p:cNvPr id="40" name="TextBox 39"/>
           <p:cNvSpPr txBox="1"/>
           <p:nvPr/>
         </p:nvSpPr>
         <p:spPr>
           <a:xfrm>
-            <a:off x="5669907" y="1197864"/>
-            <a:ext cx="640080" cy="210312"/>
+            <a:off x="6035040" y="1197864"/>
+            <a:ext cx="1280160" cy="210312"/>
           </a:xfrm>
           <a:prstGeom prst="rect">
             <a:avLst/>
@@ -12188,27 +16905,27 @@
           <a:p>
             <a:pPr algn="l"/>
             <a:r>
-              <a:rPr sz="650" b="0" i="0">
+              <a:rPr sz="650" b="1" i="0">
                 <a:solidFill>
                   <a:srgbClr val="D4A300"/>
                 </a:solidFill>
-                <a:latin typeface="Arial"/>
+                <a:latin typeface="Courier New"/>
               </a:rPr>
-              <a:t>+0.78 ★</a:t>
-            </a:r>
-          </a:p>
-        </p:txBody>
-      </p:sp>
-      <p:sp>
-        <p:nvSpPr>
-          <p:cNvPr id="14" name="TextBox 13"/>
+              <a:t>+0.78   P=0.05 ★</a:t>
+            </a:r>
+          </a:p>
+        </p:txBody>
+      </p:sp>
+      <p:sp>
+        <p:nvSpPr>
+          <p:cNvPr id="41" name="TextBox 40"/>
           <p:cNvSpPr txBox="1"/>
           <p:nvPr/>
         </p:nvSpPr>
         <p:spPr>
           <a:xfrm>
-            <a:off x="548640" y="1371600"/>
-            <a:ext cx="2468880" cy="210312"/>
+            <a:off x="457200" y="1371600"/>
+            <a:ext cx="2377440" cy="210312"/>
           </a:xfrm>
           <a:prstGeom prst="rect">
             <a:avLst/>
@@ -12237,14 +16954,14 @@
       </p:sp>
       <p:sp>
         <p:nvSpPr>
-          <p:cNvPr id="15" name="Rectangle 14"/>
-          <p:cNvSpPr/>
-          <p:nvPr/>
-        </p:nvSpPr>
-        <p:spPr>
-          <a:xfrm>
-            <a:off x="3200400" y="1408176"/>
-            <a:ext cx="3036773" cy="128016"/>
+          <p:cNvPr id="42" name="Rectangle 41"/>
+          <p:cNvSpPr/>
+          <p:nvPr/>
+        </p:nvSpPr>
+        <p:spPr>
+          <a:xfrm>
+            <a:off x="3017520" y="1408176"/>
+            <a:ext cx="2377956" cy="128016"/>
           </a:xfrm>
           <a:prstGeom prst="rect">
             <a:avLst/>
@@ -12283,14 +17000,14 @@
       </p:sp>
       <p:sp>
         <p:nvSpPr>
-          <p:cNvPr id="16" name="TextBox 15"/>
+          <p:cNvPr id="43" name="TextBox 42"/>
           <p:cNvSpPr txBox="1"/>
           <p:nvPr/>
         </p:nvSpPr>
         <p:spPr>
           <a:xfrm>
-            <a:off x="6282893" y="1371600"/>
-            <a:ext cx="640080" cy="210312"/>
+            <a:off x="6035040" y="1371600"/>
+            <a:ext cx="1280160" cy="210312"/>
           </a:xfrm>
           <a:prstGeom prst="rect">
             <a:avLst/>
@@ -12306,27 +17023,27 @@
           <a:p>
             <a:pPr algn="l"/>
             <a:r>
-              <a:rPr sz="650" b="0" i="0">
+              <a:rPr sz="650" b="1" i="0">
                 <a:solidFill>
                   <a:srgbClr val="D4A300"/>
                 </a:solidFill>
-                <a:latin typeface="Arial"/>
+                <a:latin typeface="Courier New"/>
               </a:rPr>
-              <a:t>+0.98 ★</a:t>
-            </a:r>
-          </a:p>
-        </p:txBody>
-      </p:sp>
-      <p:sp>
-        <p:nvSpPr>
-          <p:cNvPr id="17" name="TextBox 16"/>
+              <a:t>+0.98   P=0.05 ★</a:t>
+            </a:r>
+          </a:p>
+        </p:txBody>
+      </p:sp>
+      <p:sp>
+        <p:nvSpPr>
+          <p:cNvPr id="44" name="TextBox 43"/>
           <p:cNvSpPr txBox="1"/>
           <p:nvPr/>
         </p:nvSpPr>
         <p:spPr>
           <a:xfrm>
-            <a:off x="548640" y="1545336"/>
-            <a:ext cx="2468880" cy="210312"/>
+            <a:off x="457200" y="1545336"/>
+            <a:ext cx="2377440" cy="210312"/>
           </a:xfrm>
           <a:prstGeom prst="rect">
             <a:avLst/>
@@ -12355,14 +17072,14 @@
       </p:sp>
       <p:sp>
         <p:nvSpPr>
-          <p:cNvPr id="18" name="Rectangle 17"/>
-          <p:cNvSpPr/>
-          <p:nvPr/>
-        </p:nvSpPr>
-        <p:spPr>
-          <a:xfrm>
-            <a:off x="3200400" y="1581912"/>
-            <a:ext cx="2287578" cy="128016"/>
+          <p:cNvPr id="45" name="Rectangle 44"/>
+          <p:cNvSpPr/>
+          <p:nvPr/>
+        </p:nvSpPr>
+        <p:spPr>
+          <a:xfrm>
+            <a:off x="3017520" y="1581912"/>
+            <a:ext cx="1791296" cy="128016"/>
           </a:xfrm>
           <a:prstGeom prst="rect">
             <a:avLst/>
@@ -12401,14 +17118,14 @@
       </p:sp>
       <p:sp>
         <p:nvSpPr>
-          <p:cNvPr id="19" name="TextBox 18"/>
+          <p:cNvPr id="46" name="TextBox 45"/>
           <p:cNvSpPr txBox="1"/>
           <p:nvPr/>
         </p:nvSpPr>
         <p:spPr>
           <a:xfrm>
-            <a:off x="5533698" y="1545336"/>
-            <a:ext cx="640080" cy="210312"/>
+            <a:off x="6035040" y="1545336"/>
+            <a:ext cx="1280160" cy="210312"/>
           </a:xfrm>
           <a:prstGeom prst="rect">
             <a:avLst/>
@@ -12424,27 +17141,27 @@
           <a:p>
             <a:pPr algn="l"/>
             <a:r>
-              <a:rPr sz="650" b="0" i="0">
+              <a:rPr sz="650" b="1" i="0">
                 <a:solidFill>
                   <a:srgbClr val="D4A300"/>
                 </a:solidFill>
-                <a:latin typeface="Arial"/>
+                <a:latin typeface="Courier New"/>
               </a:rPr>
-              <a:t>+0.73 ★</a:t>
-            </a:r>
-          </a:p>
-        </p:txBody>
-      </p:sp>
-      <p:sp>
-        <p:nvSpPr>
-          <p:cNvPr id="20" name="TextBox 19"/>
+              <a:t>+0.73   P=0.05 ★</a:t>
+            </a:r>
+          </a:p>
+        </p:txBody>
+      </p:sp>
+      <p:sp>
+        <p:nvSpPr>
+          <p:cNvPr id="47" name="TextBox 46"/>
           <p:cNvSpPr txBox="1"/>
           <p:nvPr/>
         </p:nvSpPr>
         <p:spPr>
           <a:xfrm>
-            <a:off x="548640" y="1719072"/>
-            <a:ext cx="2468880" cy="210312"/>
+            <a:off x="457200" y="1719072"/>
+            <a:ext cx="2377440" cy="210312"/>
           </a:xfrm>
           <a:prstGeom prst="rect">
             <a:avLst/>
@@ -12473,14 +17190,14 @@
       </p:sp>
       <p:sp>
         <p:nvSpPr>
-          <p:cNvPr id="21" name="Rectangle 20"/>
-          <p:cNvSpPr/>
-          <p:nvPr/>
-        </p:nvSpPr>
-        <p:spPr>
-          <a:xfrm>
-            <a:off x="3200400" y="1755648"/>
-            <a:ext cx="1621432" cy="128016"/>
+          <p:cNvPr id="48" name="Rectangle 47"/>
+          <p:cNvSpPr/>
+          <p:nvPr/>
+        </p:nvSpPr>
+        <p:spPr>
+          <a:xfrm>
+            <a:off x="3017520" y="1755648"/>
+            <a:ext cx="1269668" cy="128016"/>
           </a:xfrm>
           <a:prstGeom prst="rect">
             <a:avLst/>
@@ -12519,14 +17236,14 @@
       </p:sp>
       <p:sp>
         <p:nvSpPr>
-          <p:cNvPr id="22" name="TextBox 21"/>
+          <p:cNvPr id="49" name="TextBox 48"/>
           <p:cNvSpPr txBox="1"/>
           <p:nvPr/>
         </p:nvSpPr>
         <p:spPr>
           <a:xfrm>
-            <a:off x="4867552" y="1719072"/>
-            <a:ext cx="640080" cy="210312"/>
+            <a:off x="6035040" y="1719072"/>
+            <a:ext cx="1280160" cy="210312"/>
           </a:xfrm>
           <a:prstGeom prst="rect">
             <a:avLst/>
@@ -12542,27 +17259,27 @@
           <a:p>
             <a:pPr algn="l"/>
             <a:r>
-              <a:rPr sz="650" b="0" i="0">
+              <a:rPr sz="650" b="1" i="0">
                 <a:solidFill>
                   <a:srgbClr val="D4A300"/>
                 </a:solidFill>
-                <a:latin typeface="Arial"/>
+                <a:latin typeface="Courier New"/>
               </a:rPr>
-              <a:t>+0.52 ★</a:t>
-            </a:r>
-          </a:p>
-        </p:txBody>
-      </p:sp>
-      <p:sp>
-        <p:nvSpPr>
-          <p:cNvPr id="23" name="TextBox 22"/>
+              <a:t>+0.52   P=0.05 ★</a:t>
+            </a:r>
+          </a:p>
+        </p:txBody>
+      </p:sp>
+      <p:sp>
+        <p:nvSpPr>
+          <p:cNvPr id="50" name="TextBox 49"/>
           <p:cNvSpPr txBox="1"/>
           <p:nvPr/>
         </p:nvSpPr>
         <p:spPr>
           <a:xfrm>
-            <a:off x="548640" y="1892807"/>
-            <a:ext cx="2468880" cy="210312"/>
+            <a:off x="457200" y="1892807"/>
+            <a:ext cx="2377440" cy="210312"/>
           </a:xfrm>
           <a:prstGeom prst="rect">
             <a:avLst/>
@@ -12591,14 +17308,14 @@
       </p:sp>
       <p:sp>
         <p:nvSpPr>
-          <p:cNvPr id="24" name="Rectangle 23"/>
-          <p:cNvSpPr/>
-          <p:nvPr/>
-        </p:nvSpPr>
-        <p:spPr>
-          <a:xfrm>
-            <a:off x="3200400" y="1929384"/>
-            <a:ext cx="2344690" cy="128016"/>
+          <p:cNvPr id="51" name="Rectangle 50"/>
+          <p:cNvSpPr/>
+          <p:nvPr/>
+        </p:nvSpPr>
+        <p:spPr>
+          <a:xfrm>
+            <a:off x="3017520" y="1929384"/>
+            <a:ext cx="1836018" cy="128016"/>
           </a:xfrm>
           <a:prstGeom prst="rect">
             <a:avLst/>
@@ -12637,14 +17354,14 @@
       </p:sp>
       <p:sp>
         <p:nvSpPr>
-          <p:cNvPr id="25" name="TextBox 24"/>
+          <p:cNvPr id="52" name="TextBox 51"/>
           <p:cNvSpPr txBox="1"/>
           <p:nvPr/>
         </p:nvSpPr>
         <p:spPr>
           <a:xfrm>
-            <a:off x="5590810" y="1892807"/>
-            <a:ext cx="640080" cy="210312"/>
+            <a:off x="6035040" y="1892807"/>
+            <a:ext cx="1280160" cy="210312"/>
           </a:xfrm>
           <a:prstGeom prst="rect">
             <a:avLst/>
@@ -12662,25 +17379,25 @@
             <a:r>
               <a:rPr sz="650" b="0" i="0">
                 <a:solidFill>
-                  <a:srgbClr val="888888"/>
-                </a:solidFill>
-                <a:latin typeface="Arial"/>
+                  <a:srgbClr val="222222"/>
+                </a:solidFill>
+                <a:latin typeface="Courier New"/>
               </a:rPr>
-              <a:t>+0.75</a:t>
-            </a:r>
-          </a:p>
-        </p:txBody>
-      </p:sp>
-      <p:sp>
-        <p:nvSpPr>
-          <p:cNvPr id="26" name="TextBox 25"/>
+              <a:t>+0.75   P=0.10 ·</a:t>
+            </a:r>
+          </a:p>
+        </p:txBody>
+      </p:sp>
+      <p:sp>
+        <p:nvSpPr>
+          <p:cNvPr id="53" name="TextBox 52"/>
           <p:cNvSpPr txBox="1"/>
           <p:nvPr/>
         </p:nvSpPr>
         <p:spPr>
           <a:xfrm>
-            <a:off x="548640" y="2066544"/>
-            <a:ext cx="2468880" cy="210312"/>
+            <a:off x="457200" y="2066544"/>
+            <a:ext cx="2377440" cy="210312"/>
           </a:xfrm>
           <a:prstGeom prst="rect">
             <a:avLst/>
@@ -12709,14 +17426,14 @@
       </p:sp>
       <p:sp>
         <p:nvSpPr>
-          <p:cNvPr id="27" name="Rectangle 26"/>
-          <p:cNvSpPr/>
-          <p:nvPr/>
-        </p:nvSpPr>
-        <p:spPr>
-          <a:xfrm>
-            <a:off x="3200400" y="2103120"/>
-            <a:ext cx="2693585" cy="128016"/>
+          <p:cNvPr id="54" name="Rectangle 53"/>
+          <p:cNvSpPr/>
+          <p:nvPr/>
+        </p:nvSpPr>
+        <p:spPr>
+          <a:xfrm>
+            <a:off x="3017520" y="2103120"/>
+            <a:ext cx="2109221" cy="128016"/>
           </a:xfrm>
           <a:prstGeom prst="rect">
             <a:avLst/>
@@ -12755,14 +17472,14 @@
       </p:sp>
       <p:sp>
         <p:nvSpPr>
-          <p:cNvPr id="28" name="TextBox 27"/>
+          <p:cNvPr id="55" name="TextBox 54"/>
           <p:cNvSpPr txBox="1"/>
           <p:nvPr/>
         </p:nvSpPr>
         <p:spPr>
           <a:xfrm>
-            <a:off x="5939705" y="2066544"/>
-            <a:ext cx="640080" cy="210312"/>
+            <a:off x="6035040" y="2066544"/>
+            <a:ext cx="1280160" cy="210312"/>
           </a:xfrm>
           <a:prstGeom prst="rect">
             <a:avLst/>
@@ -12780,25 +17497,25 @@
             <a:r>
               <a:rPr sz="650" b="0" i="0">
                 <a:solidFill>
-                  <a:srgbClr val="888888"/>
-                </a:solidFill>
-                <a:latin typeface="Arial"/>
+                  <a:srgbClr val="222222"/>
+                </a:solidFill>
+                <a:latin typeface="Courier New"/>
               </a:rPr>
-              <a:t>+0.87</a:t>
-            </a:r>
-          </a:p>
-        </p:txBody>
-      </p:sp>
-      <p:sp>
-        <p:nvSpPr>
-          <p:cNvPr id="29" name="TextBox 28"/>
+              <a:t>+0.87   P=0.10 ·</a:t>
+            </a:r>
+          </a:p>
+        </p:txBody>
+      </p:sp>
+      <p:sp>
+        <p:nvSpPr>
+          <p:cNvPr id="56" name="TextBox 55"/>
           <p:cNvSpPr txBox="1"/>
           <p:nvPr/>
         </p:nvSpPr>
         <p:spPr>
           <a:xfrm>
-            <a:off x="548640" y="2240279"/>
-            <a:ext cx="2468880" cy="210312"/>
+            <a:off x="457200" y="2240279"/>
+            <a:ext cx="2377440" cy="210312"/>
           </a:xfrm>
           <a:prstGeom prst="rect">
             <a:avLst/>
@@ -12827,14 +17544,14 @@
       </p:sp>
       <p:sp>
         <p:nvSpPr>
-          <p:cNvPr id="30" name="Rectangle 29"/>
-          <p:cNvSpPr/>
-          <p:nvPr/>
-        </p:nvSpPr>
-        <p:spPr>
-          <a:xfrm>
-            <a:off x="3200400" y="2276856"/>
-            <a:ext cx="2693585" cy="128016"/>
+          <p:cNvPr id="57" name="Rectangle 56"/>
+          <p:cNvSpPr/>
+          <p:nvPr/>
+        </p:nvSpPr>
+        <p:spPr>
+          <a:xfrm>
+            <a:off x="3017520" y="2276856"/>
+            <a:ext cx="2109221" cy="128016"/>
           </a:xfrm>
           <a:prstGeom prst="rect">
             <a:avLst/>
@@ -12873,14 +17590,14 @@
       </p:sp>
       <p:sp>
         <p:nvSpPr>
-          <p:cNvPr id="31" name="TextBox 30"/>
+          <p:cNvPr id="58" name="TextBox 57"/>
           <p:cNvSpPr txBox="1"/>
           <p:nvPr/>
         </p:nvSpPr>
         <p:spPr>
           <a:xfrm>
-            <a:off x="5939705" y="2240279"/>
-            <a:ext cx="640080" cy="210312"/>
+            <a:off x="6035040" y="2240279"/>
+            <a:ext cx="1280160" cy="210312"/>
           </a:xfrm>
           <a:prstGeom prst="rect">
             <a:avLst/>
@@ -12898,25 +17615,25 @@
             <a:r>
               <a:rPr sz="650" b="0" i="0">
                 <a:solidFill>
-                  <a:srgbClr val="888888"/>
-                </a:solidFill>
-                <a:latin typeface="Arial"/>
+                  <a:srgbClr val="222222"/>
+                </a:solidFill>
+                <a:latin typeface="Courier New"/>
               </a:rPr>
-              <a:t>+0.87</a:t>
-            </a:r>
-          </a:p>
-        </p:txBody>
-      </p:sp>
-      <p:sp>
-        <p:nvSpPr>
-          <p:cNvPr id="32" name="TextBox 31"/>
+              <a:t>+0.87   P=0.10 ·</a:t>
+            </a:r>
+          </a:p>
+        </p:txBody>
+      </p:sp>
+      <p:sp>
+        <p:nvSpPr>
+          <p:cNvPr id="59" name="TextBox 58"/>
           <p:cNvSpPr txBox="1"/>
           <p:nvPr/>
         </p:nvSpPr>
         <p:spPr>
           <a:xfrm>
-            <a:off x="548640" y="2414016"/>
-            <a:ext cx="2468880" cy="210312"/>
+            <a:off x="457200" y="2414016"/>
+            <a:ext cx="2377440" cy="210312"/>
           </a:xfrm>
           <a:prstGeom prst="rect">
             <a:avLst/>
@@ -12945,14 +17662,14 @@
       </p:sp>
       <p:sp>
         <p:nvSpPr>
-          <p:cNvPr id="33" name="Rectangle 32"/>
-          <p:cNvSpPr/>
-          <p:nvPr/>
-        </p:nvSpPr>
-        <p:spPr>
-          <a:xfrm>
-            <a:off x="3200400" y="2450592"/>
-            <a:ext cx="2172315" cy="128016"/>
+          <p:cNvPr id="60" name="Rectangle 59"/>
+          <p:cNvSpPr/>
+          <p:nvPr/>
+        </p:nvSpPr>
+        <p:spPr>
+          <a:xfrm>
+            <a:off x="3017520" y="2450592"/>
+            <a:ext cx="1701039" cy="128016"/>
           </a:xfrm>
           <a:prstGeom prst="rect">
             <a:avLst/>
@@ -12991,14 +17708,14 @@
       </p:sp>
       <p:sp>
         <p:nvSpPr>
-          <p:cNvPr id="34" name="TextBox 33"/>
+          <p:cNvPr id="61" name="TextBox 60"/>
           <p:cNvSpPr txBox="1"/>
           <p:nvPr/>
         </p:nvSpPr>
         <p:spPr>
           <a:xfrm>
-            <a:off x="5418435" y="2414016"/>
-            <a:ext cx="640080" cy="210312"/>
+            <a:off x="6035040" y="2414016"/>
+            <a:ext cx="1280160" cy="210312"/>
           </a:xfrm>
           <a:prstGeom prst="rect">
             <a:avLst/>
@@ -13016,25 +17733,25 @@
             <a:r>
               <a:rPr sz="650" b="0" i="0">
                 <a:solidFill>
-                  <a:srgbClr val="888888"/>
-                </a:solidFill>
-                <a:latin typeface="Arial"/>
+                  <a:srgbClr val="222222"/>
+                </a:solidFill>
+                <a:latin typeface="Courier New"/>
               </a:rPr>
-              <a:t>+0.70</a:t>
-            </a:r>
-          </a:p>
-        </p:txBody>
-      </p:sp>
-      <p:sp>
-        <p:nvSpPr>
-          <p:cNvPr id="35" name="TextBox 34"/>
+              <a:t>+0.70   P=0.10 ·</a:t>
+            </a:r>
+          </a:p>
+        </p:txBody>
+      </p:sp>
+      <p:sp>
+        <p:nvSpPr>
+          <p:cNvPr id="62" name="TextBox 61"/>
           <p:cNvSpPr txBox="1"/>
           <p:nvPr/>
         </p:nvSpPr>
         <p:spPr>
           <a:xfrm>
-            <a:off x="548640" y="2587751"/>
-            <a:ext cx="2468880" cy="210312"/>
+            <a:off x="457200" y="2587751"/>
+            <a:ext cx="2377440" cy="210312"/>
           </a:xfrm>
           <a:prstGeom prst="rect">
             <a:avLst/>
@@ -13063,14 +17780,14 @@
       </p:sp>
       <p:sp>
         <p:nvSpPr>
-          <p:cNvPr id="36" name="Rectangle 35"/>
-          <p:cNvSpPr/>
-          <p:nvPr/>
-        </p:nvSpPr>
-        <p:spPr>
-          <a:xfrm>
-            <a:off x="3200400" y="2624327"/>
-            <a:ext cx="1897615" cy="128016"/>
+          <p:cNvPr id="63" name="Rectangle 62"/>
+          <p:cNvSpPr/>
+          <p:nvPr/>
+        </p:nvSpPr>
+        <p:spPr>
+          <a:xfrm>
+            <a:off x="3017520" y="2624327"/>
+            <a:ext cx="1485934" cy="128016"/>
           </a:xfrm>
           <a:prstGeom prst="rect">
             <a:avLst/>
@@ -13109,14 +17826,14 @@
       </p:sp>
       <p:sp>
         <p:nvSpPr>
-          <p:cNvPr id="37" name="TextBox 36"/>
+          <p:cNvPr id="64" name="TextBox 63"/>
           <p:cNvSpPr txBox="1"/>
           <p:nvPr/>
         </p:nvSpPr>
         <p:spPr>
           <a:xfrm>
-            <a:off x="5143735" y="2587751"/>
-            <a:ext cx="640080" cy="210312"/>
+            <a:off x="6035040" y="2587751"/>
+            <a:ext cx="1280160" cy="210312"/>
           </a:xfrm>
           <a:prstGeom prst="rect">
             <a:avLst/>
@@ -13134,25 +17851,25 @@
             <a:r>
               <a:rPr sz="650" b="0" i="0">
                 <a:solidFill>
-                  <a:srgbClr val="888888"/>
-                </a:solidFill>
-                <a:latin typeface="Arial"/>
+                  <a:srgbClr val="222222"/>
+                </a:solidFill>
+                <a:latin typeface="Courier New"/>
               </a:rPr>
-              <a:t>+0.61</a:t>
-            </a:r>
-          </a:p>
-        </p:txBody>
-      </p:sp>
-      <p:sp>
-        <p:nvSpPr>
-          <p:cNvPr id="38" name="TextBox 37"/>
+              <a:t>+0.61   P=0.10 ·</a:t>
+            </a:r>
+          </a:p>
+        </p:txBody>
+      </p:sp>
+      <p:sp>
+        <p:nvSpPr>
+          <p:cNvPr id="65" name="TextBox 64"/>
           <p:cNvSpPr txBox="1"/>
           <p:nvPr/>
         </p:nvSpPr>
         <p:spPr>
           <a:xfrm>
-            <a:off x="548640" y="2761488"/>
-            <a:ext cx="2468880" cy="210312"/>
+            <a:off x="457200" y="2761488"/>
+            <a:ext cx="2377440" cy="210312"/>
           </a:xfrm>
           <a:prstGeom prst="rect">
             <a:avLst/>
@@ -13181,14 +17898,14 @@
       </p:sp>
       <p:sp>
         <p:nvSpPr>
-          <p:cNvPr id="39" name="Rectangle 38"/>
-          <p:cNvSpPr/>
-          <p:nvPr/>
-        </p:nvSpPr>
-        <p:spPr>
-          <a:xfrm>
-            <a:off x="3200400" y="2798064"/>
-            <a:ext cx="1693223" cy="128016"/>
+          <p:cNvPr id="66" name="Rectangle 65"/>
+          <p:cNvSpPr/>
+          <p:nvPr/>
+        </p:nvSpPr>
+        <p:spPr>
+          <a:xfrm>
+            <a:off x="3017520" y="2798064"/>
+            <a:ext cx="1325884" cy="128016"/>
           </a:xfrm>
           <a:prstGeom prst="rect">
             <a:avLst/>
@@ -13227,14 +17944,14 @@
       </p:sp>
       <p:sp>
         <p:nvSpPr>
-          <p:cNvPr id="40" name="TextBox 39"/>
+          <p:cNvPr id="67" name="TextBox 66"/>
           <p:cNvSpPr txBox="1"/>
           <p:nvPr/>
         </p:nvSpPr>
         <p:spPr>
           <a:xfrm>
-            <a:off x="4939343" y="2761488"/>
-            <a:ext cx="640080" cy="210312"/>
+            <a:off x="6035040" y="2761488"/>
+            <a:ext cx="1280160" cy="210312"/>
           </a:xfrm>
           <a:prstGeom prst="rect">
             <a:avLst/>
@@ -13254,23 +17971,23 @@
                 <a:solidFill>
                   <a:srgbClr val="888888"/>
                 </a:solidFill>
-                <a:latin typeface="Arial"/>
+                <a:latin typeface="Courier New"/>
               </a:rPr>
-              <a:t>+0.54</a:t>
-            </a:r>
-          </a:p>
-        </p:txBody>
-      </p:sp>
-      <p:sp>
-        <p:nvSpPr>
-          <p:cNvPr id="41" name="TextBox 40"/>
+              <a:t>+0.54   P=0.20</a:t>
+            </a:r>
+          </a:p>
+        </p:txBody>
+      </p:sp>
+      <p:sp>
+        <p:nvSpPr>
+          <p:cNvPr id="68" name="TextBox 67"/>
           <p:cNvSpPr txBox="1"/>
           <p:nvPr/>
         </p:nvSpPr>
         <p:spPr>
           <a:xfrm>
-            <a:off x="548640" y="2935224"/>
-            <a:ext cx="2468880" cy="210312"/>
+            <a:off x="457200" y="2935224"/>
+            <a:ext cx="2377440" cy="210312"/>
           </a:xfrm>
           <a:prstGeom prst="rect">
             <a:avLst/>
@@ -13299,14 +18016,14 @@
       </p:sp>
       <p:sp>
         <p:nvSpPr>
-          <p:cNvPr id="42" name="Rectangle 41"/>
-          <p:cNvSpPr/>
-          <p:nvPr/>
-        </p:nvSpPr>
-        <p:spPr>
-          <a:xfrm>
-            <a:off x="3200400" y="2971800"/>
-            <a:ext cx="2333282" cy="128016"/>
+          <p:cNvPr id="69" name="Rectangle 68"/>
+          <p:cNvSpPr/>
+          <p:nvPr/>
+        </p:nvSpPr>
+        <p:spPr>
+          <a:xfrm>
+            <a:off x="3017520" y="2971800"/>
+            <a:ext cx="1827084" cy="128016"/>
           </a:xfrm>
           <a:prstGeom prst="rect">
             <a:avLst/>
@@ -13345,14 +18062,14 @@
       </p:sp>
       <p:sp>
         <p:nvSpPr>
-          <p:cNvPr id="43" name="TextBox 42"/>
+          <p:cNvPr id="70" name="TextBox 69"/>
           <p:cNvSpPr txBox="1"/>
           <p:nvPr/>
         </p:nvSpPr>
         <p:spPr>
           <a:xfrm>
-            <a:off x="5579402" y="2935224"/>
-            <a:ext cx="640080" cy="210312"/>
+            <a:off x="6035040" y="2935224"/>
+            <a:ext cx="1280160" cy="210312"/>
           </a:xfrm>
           <a:prstGeom prst="rect">
             <a:avLst/>
@@ -13372,23 +18089,23 @@
                 <a:solidFill>
                   <a:srgbClr val="888888"/>
                 </a:solidFill>
-                <a:latin typeface="Arial"/>
+                <a:latin typeface="Courier New"/>
               </a:rPr>
-              <a:t>+0.75</a:t>
-            </a:r>
-          </a:p>
-        </p:txBody>
-      </p:sp>
-      <p:sp>
-        <p:nvSpPr>
-          <p:cNvPr id="44" name="TextBox 43"/>
+              <a:t>+0.75   P=0.20</a:t>
+            </a:r>
+          </a:p>
+        </p:txBody>
+      </p:sp>
+      <p:sp>
+        <p:nvSpPr>
+          <p:cNvPr id="71" name="TextBox 70"/>
           <p:cNvSpPr txBox="1"/>
           <p:nvPr/>
         </p:nvSpPr>
         <p:spPr>
           <a:xfrm>
-            <a:off x="548640" y="3108960"/>
-            <a:ext cx="2468880" cy="210312"/>
+            <a:off x="457200" y="3108960"/>
+            <a:ext cx="2377440" cy="210312"/>
           </a:xfrm>
           <a:prstGeom prst="rect">
             <a:avLst/>
@@ -13417,14 +18134,14 @@
       </p:sp>
       <p:sp>
         <p:nvSpPr>
-          <p:cNvPr id="45" name="Rectangle 44"/>
-          <p:cNvSpPr/>
-          <p:nvPr/>
-        </p:nvSpPr>
-        <p:spPr>
-          <a:xfrm>
-            <a:off x="3200400" y="3145536"/>
-            <a:ext cx="3657600" cy="128016"/>
+          <p:cNvPr id="72" name="Rectangle 71"/>
+          <p:cNvSpPr/>
+          <p:nvPr/>
+        </p:nvSpPr>
+        <p:spPr>
+          <a:xfrm>
+            <a:off x="3017520" y="3145536"/>
+            <a:ext cx="2864096" cy="128016"/>
           </a:xfrm>
           <a:prstGeom prst="rect">
             <a:avLst/>
@@ -13463,14 +18180,14 @@
       </p:sp>
       <p:sp>
         <p:nvSpPr>
-          <p:cNvPr id="46" name="TextBox 45"/>
+          <p:cNvPr id="73" name="TextBox 72"/>
           <p:cNvSpPr txBox="1"/>
           <p:nvPr/>
         </p:nvSpPr>
         <p:spPr>
           <a:xfrm>
-            <a:off x="6903720" y="3108960"/>
-            <a:ext cx="640080" cy="210312"/>
+            <a:off x="6035040" y="3108960"/>
+            <a:ext cx="1280160" cy="210312"/>
           </a:xfrm>
           <a:prstGeom prst="rect">
             <a:avLst/>
@@ -13490,23 +18207,23 @@
                 <a:solidFill>
                   <a:srgbClr val="888888"/>
                 </a:solidFill>
-                <a:latin typeface="Arial"/>
+                <a:latin typeface="Courier New"/>
               </a:rPr>
-              <a:t>+1.17</a:t>
-            </a:r>
-          </a:p>
-        </p:txBody>
-      </p:sp>
-      <p:sp>
-        <p:nvSpPr>
-          <p:cNvPr id="47" name="TextBox 46"/>
+              <a:t>+1.17   P=0.20</a:t>
+            </a:r>
+          </a:p>
+        </p:txBody>
+      </p:sp>
+      <p:sp>
+        <p:nvSpPr>
+          <p:cNvPr id="74" name="TextBox 73"/>
           <p:cNvSpPr txBox="1"/>
           <p:nvPr/>
         </p:nvSpPr>
         <p:spPr>
           <a:xfrm>
-            <a:off x="548640" y="3282696"/>
-            <a:ext cx="2468880" cy="210312"/>
+            <a:off x="457200" y="3282696"/>
+            <a:ext cx="2377440" cy="210312"/>
           </a:xfrm>
           <a:prstGeom prst="rect">
             <a:avLst/>
@@ -13535,14 +18252,14 @@
       </p:sp>
       <p:sp>
         <p:nvSpPr>
-          <p:cNvPr id="48" name="Rectangle 47"/>
-          <p:cNvSpPr/>
-          <p:nvPr/>
-        </p:nvSpPr>
-        <p:spPr>
-          <a:xfrm>
-            <a:off x="3200400" y="3319272"/>
-            <a:ext cx="1347336" cy="128016"/>
+          <p:cNvPr id="75" name="Rectangle 74"/>
+          <p:cNvSpPr/>
+          <p:nvPr/>
+        </p:nvSpPr>
+        <p:spPr>
+          <a:xfrm>
+            <a:off x="3017520" y="3319272"/>
+            <a:ext cx="1055036" cy="128016"/>
           </a:xfrm>
           <a:prstGeom prst="rect">
             <a:avLst/>
@@ -13581,14 +18298,14 @@
       </p:sp>
       <p:sp>
         <p:nvSpPr>
-          <p:cNvPr id="49" name="TextBox 48"/>
+          <p:cNvPr id="76" name="TextBox 75"/>
           <p:cNvSpPr txBox="1"/>
           <p:nvPr/>
         </p:nvSpPr>
         <p:spPr>
           <a:xfrm>
-            <a:off x="4593456" y="3282696"/>
-            <a:ext cx="640080" cy="210312"/>
+            <a:off x="6035040" y="3282696"/>
+            <a:ext cx="1280160" cy="210312"/>
           </a:xfrm>
           <a:prstGeom prst="rect">
             <a:avLst/>
@@ -13608,23 +18325,23 @@
                 <a:solidFill>
                   <a:srgbClr val="888888"/>
                 </a:solidFill>
-                <a:latin typeface="Arial"/>
+                <a:latin typeface="Courier New"/>
               </a:rPr>
-              <a:t>+0.43</a:t>
-            </a:r>
-          </a:p>
-        </p:txBody>
-      </p:sp>
-      <p:sp>
-        <p:nvSpPr>
-          <p:cNvPr id="50" name="TextBox 49"/>
+              <a:t>+0.43   P=0.20</a:t>
+            </a:r>
+          </a:p>
+        </p:txBody>
+      </p:sp>
+      <p:sp>
+        <p:nvSpPr>
+          <p:cNvPr id="77" name="TextBox 76"/>
           <p:cNvSpPr txBox="1"/>
           <p:nvPr/>
         </p:nvSpPr>
         <p:spPr>
           <a:xfrm>
-            <a:off x="548640" y="3456432"/>
-            <a:ext cx="2468880" cy="210312"/>
+            <a:off x="457200" y="3456432"/>
+            <a:ext cx="2377440" cy="210312"/>
           </a:xfrm>
           <a:prstGeom prst="rect">
             <a:avLst/>
@@ -13653,14 +18370,14 @@
       </p:sp>
       <p:sp>
         <p:nvSpPr>
-          <p:cNvPr id="51" name="Rectangle 50"/>
-          <p:cNvSpPr/>
-          <p:nvPr/>
-        </p:nvSpPr>
-        <p:spPr>
-          <a:xfrm>
-            <a:off x="3200400" y="3493008"/>
-            <a:ext cx="1299862" cy="128016"/>
+          <p:cNvPr id="78" name="Rectangle 77"/>
+          <p:cNvSpPr/>
+          <p:nvPr/>
+        </p:nvSpPr>
+        <p:spPr>
+          <a:xfrm>
+            <a:off x="3017520" y="3493008"/>
+            <a:ext cx="1017861" cy="128016"/>
           </a:xfrm>
           <a:prstGeom prst="rect">
             <a:avLst/>
@@ -13699,14 +18416,14 @@
       </p:sp>
       <p:sp>
         <p:nvSpPr>
-          <p:cNvPr id="52" name="TextBox 51"/>
+          <p:cNvPr id="79" name="TextBox 78"/>
           <p:cNvSpPr txBox="1"/>
           <p:nvPr/>
         </p:nvSpPr>
         <p:spPr>
           <a:xfrm>
-            <a:off x="4545982" y="3456432"/>
-            <a:ext cx="640080" cy="210312"/>
+            <a:off x="6035040" y="3456432"/>
+            <a:ext cx="1280160" cy="210312"/>
           </a:xfrm>
           <a:prstGeom prst="rect">
             <a:avLst/>
@@ -13726,23 +18443,23 @@
                 <a:solidFill>
                   <a:srgbClr val="888888"/>
                 </a:solidFill>
-                <a:latin typeface="Arial"/>
+                <a:latin typeface="Courier New"/>
               </a:rPr>
-              <a:t>+0.42</a:t>
-            </a:r>
-          </a:p>
-        </p:txBody>
-      </p:sp>
-      <p:sp>
-        <p:nvSpPr>
-          <p:cNvPr id="53" name="TextBox 52"/>
+              <a:t>+0.42   P=0.20</a:t>
+            </a:r>
+          </a:p>
+        </p:txBody>
+      </p:sp>
+      <p:sp>
+        <p:nvSpPr>
+          <p:cNvPr id="80" name="TextBox 79"/>
           <p:cNvSpPr txBox="1"/>
           <p:nvPr/>
         </p:nvSpPr>
         <p:spPr>
           <a:xfrm>
-            <a:off x="548640" y="3630168"/>
-            <a:ext cx="2468880" cy="210312"/>
+            <a:off x="457200" y="3630168"/>
+            <a:ext cx="2377440" cy="210312"/>
           </a:xfrm>
           <a:prstGeom prst="rect">
             <a:avLst/>
@@ -13771,14 +18488,14 @@
       </p:sp>
       <p:sp>
         <p:nvSpPr>
-          <p:cNvPr id="54" name="Rectangle 53"/>
-          <p:cNvSpPr/>
-          <p:nvPr/>
-        </p:nvSpPr>
-        <p:spPr>
-          <a:xfrm>
-            <a:off x="3200400" y="3666744"/>
-            <a:ext cx="469980" cy="128016"/>
+          <p:cNvPr id="81" name="Rectangle 80"/>
+          <p:cNvSpPr/>
+          <p:nvPr/>
+        </p:nvSpPr>
+        <p:spPr>
+          <a:xfrm>
+            <a:off x="3017520" y="3666744"/>
+            <a:ext cx="368020" cy="128016"/>
           </a:xfrm>
           <a:prstGeom prst="rect">
             <a:avLst/>
@@ -13817,14 +18534,14 @@
       </p:sp>
       <p:sp>
         <p:nvSpPr>
-          <p:cNvPr id="55" name="TextBox 54"/>
+          <p:cNvPr id="82" name="TextBox 81"/>
           <p:cNvSpPr txBox="1"/>
           <p:nvPr/>
         </p:nvSpPr>
         <p:spPr>
           <a:xfrm>
-            <a:off x="3716100" y="3630168"/>
-            <a:ext cx="640080" cy="210312"/>
+            <a:off x="6035040" y="3630168"/>
+            <a:ext cx="1280160" cy="210312"/>
           </a:xfrm>
           <a:prstGeom prst="rect">
             <a:avLst/>
@@ -13844,23 +18561,23 @@
                 <a:solidFill>
                   <a:srgbClr val="888888"/>
                 </a:solidFill>
-                <a:latin typeface="Arial"/>
+                <a:latin typeface="Courier New"/>
               </a:rPr>
-              <a:t>+0.15</a:t>
-            </a:r>
-          </a:p>
-        </p:txBody>
-      </p:sp>
-      <p:sp>
-        <p:nvSpPr>
-          <p:cNvPr id="56" name="TextBox 55"/>
+              <a:t>+0.15   P=0.20</a:t>
+            </a:r>
+          </a:p>
+        </p:txBody>
+      </p:sp>
+      <p:sp>
+        <p:nvSpPr>
+          <p:cNvPr id="83" name="TextBox 82"/>
           <p:cNvSpPr txBox="1"/>
           <p:nvPr/>
         </p:nvSpPr>
         <p:spPr>
           <a:xfrm>
-            <a:off x="548640" y="3803904"/>
-            <a:ext cx="2468880" cy="210312"/>
+            <a:off x="457200" y="3803904"/>
+            <a:ext cx="2377440" cy="210312"/>
           </a:xfrm>
           <a:prstGeom prst="rect">
             <a:avLst/>
@@ -13889,14 +18606,14 @@
       </p:sp>
       <p:sp>
         <p:nvSpPr>
-          <p:cNvPr id="57" name="Rectangle 56"/>
-          <p:cNvSpPr/>
-          <p:nvPr/>
-        </p:nvSpPr>
-        <p:spPr>
-          <a:xfrm>
-            <a:off x="3200400" y="3840479"/>
-            <a:ext cx="1582269" cy="128016"/>
+          <p:cNvPr id="84" name="Rectangle 83"/>
+          <p:cNvSpPr/>
+          <p:nvPr/>
+        </p:nvSpPr>
+        <p:spPr>
+          <a:xfrm>
+            <a:off x="3017520" y="3840479"/>
+            <a:ext cx="1239001" cy="128016"/>
           </a:xfrm>
           <a:prstGeom prst="rect">
             <a:avLst/>
@@ -13935,14 +18652,14 @@
       </p:sp>
       <p:sp>
         <p:nvSpPr>
-          <p:cNvPr id="58" name="TextBox 57"/>
+          <p:cNvPr id="85" name="TextBox 84"/>
           <p:cNvSpPr txBox="1"/>
           <p:nvPr/>
         </p:nvSpPr>
         <p:spPr>
           <a:xfrm>
-            <a:off x="4828389" y="3803904"/>
-            <a:ext cx="640080" cy="210312"/>
+            <a:off x="6035040" y="3803904"/>
+            <a:ext cx="1280160" cy="210312"/>
           </a:xfrm>
           <a:prstGeom prst="rect">
             <a:avLst/>
@@ -13962,23 +18679,23 @@
                 <a:solidFill>
                   <a:srgbClr val="888888"/>
                 </a:solidFill>
-                <a:latin typeface="Arial"/>
+                <a:latin typeface="Courier New"/>
               </a:rPr>
-              <a:t>+0.51</a:t>
-            </a:r>
-          </a:p>
-        </p:txBody>
-      </p:sp>
-      <p:sp>
-        <p:nvSpPr>
-          <p:cNvPr id="59" name="TextBox 58"/>
+              <a:t>+0.51   P=0.20</a:t>
+            </a:r>
+          </a:p>
+        </p:txBody>
+      </p:sp>
+      <p:sp>
+        <p:nvSpPr>
+          <p:cNvPr id="86" name="TextBox 85"/>
           <p:cNvSpPr txBox="1"/>
           <p:nvPr/>
         </p:nvSpPr>
         <p:spPr>
           <a:xfrm>
-            <a:off x="548640" y="3977640"/>
-            <a:ext cx="2468880" cy="210312"/>
+            <a:off x="457200" y="3977640"/>
+            <a:ext cx="2377440" cy="210312"/>
           </a:xfrm>
           <a:prstGeom prst="rect">
             <a:avLst/>
@@ -14007,14 +18724,14 @@
       </p:sp>
       <p:sp>
         <p:nvSpPr>
-          <p:cNvPr id="60" name="Rectangle 59"/>
-          <p:cNvSpPr/>
-          <p:nvPr/>
-        </p:nvSpPr>
-        <p:spPr>
-          <a:xfrm>
-            <a:off x="3200400" y="4014215"/>
-            <a:ext cx="1217331" cy="128016"/>
+          <p:cNvPr id="87" name="Rectangle 86"/>
+          <p:cNvSpPr/>
+          <p:nvPr/>
+        </p:nvSpPr>
+        <p:spPr>
+          <a:xfrm>
+            <a:off x="3017520" y="4014215"/>
+            <a:ext cx="953235" cy="128016"/>
           </a:xfrm>
           <a:prstGeom prst="rect">
             <a:avLst/>
@@ -14053,14 +18770,14 @@
       </p:sp>
       <p:sp>
         <p:nvSpPr>
-          <p:cNvPr id="61" name="TextBox 60"/>
+          <p:cNvPr id="88" name="TextBox 87"/>
           <p:cNvSpPr txBox="1"/>
           <p:nvPr/>
         </p:nvSpPr>
         <p:spPr>
           <a:xfrm>
-            <a:off x="4463451" y="3977640"/>
-            <a:ext cx="640080" cy="210312"/>
+            <a:off x="6035040" y="3977640"/>
+            <a:ext cx="1280160" cy="210312"/>
           </a:xfrm>
           <a:prstGeom prst="rect">
             <a:avLst/>
@@ -14080,23 +18797,23 @@
                 <a:solidFill>
                   <a:srgbClr val="888888"/>
                 </a:solidFill>
-                <a:latin typeface="Arial"/>
+                <a:latin typeface="Courier New"/>
               </a:rPr>
-              <a:t>+0.39</a:t>
-            </a:r>
-          </a:p>
-        </p:txBody>
-      </p:sp>
-      <p:sp>
-        <p:nvSpPr>
-          <p:cNvPr id="62" name="TextBox 61"/>
+              <a:t>+0.39   P=0.35</a:t>
+            </a:r>
+          </a:p>
+        </p:txBody>
+      </p:sp>
+      <p:sp>
+        <p:nvSpPr>
+          <p:cNvPr id="89" name="TextBox 88"/>
           <p:cNvSpPr txBox="1"/>
           <p:nvPr/>
         </p:nvSpPr>
         <p:spPr>
           <a:xfrm>
-            <a:off x="548640" y="4151376"/>
-            <a:ext cx="2468880" cy="210312"/>
+            <a:off x="457200" y="4151376"/>
+            <a:ext cx="2377440" cy="210312"/>
           </a:xfrm>
           <a:prstGeom prst="rect">
             <a:avLst/>
@@ -14125,14 +18842,14 @@
       </p:sp>
       <p:sp>
         <p:nvSpPr>
-          <p:cNvPr id="63" name="Rectangle 62"/>
-          <p:cNvSpPr/>
-          <p:nvPr/>
-        </p:nvSpPr>
-        <p:spPr>
-          <a:xfrm>
-            <a:off x="3200400" y="4187951"/>
-            <a:ext cx="2216480" cy="128016"/>
+          <p:cNvPr id="90" name="Rectangle 89"/>
+          <p:cNvSpPr/>
+          <p:nvPr/>
+        </p:nvSpPr>
+        <p:spPr>
+          <a:xfrm>
+            <a:off x="3017520" y="4187951"/>
+            <a:ext cx="1735622" cy="128016"/>
           </a:xfrm>
           <a:prstGeom prst="rect">
             <a:avLst/>
@@ -14171,14 +18888,14 @@
       </p:sp>
       <p:sp>
         <p:nvSpPr>
-          <p:cNvPr id="64" name="TextBox 63"/>
+          <p:cNvPr id="91" name="TextBox 90"/>
           <p:cNvSpPr txBox="1"/>
           <p:nvPr/>
         </p:nvSpPr>
         <p:spPr>
           <a:xfrm>
-            <a:off x="5462600" y="4151376"/>
-            <a:ext cx="640080" cy="210312"/>
+            <a:off x="6035040" y="4151376"/>
+            <a:ext cx="1280160" cy="210312"/>
           </a:xfrm>
           <a:prstGeom prst="rect">
             <a:avLst/>
@@ -14198,23 +18915,23 @@
                 <a:solidFill>
                   <a:srgbClr val="888888"/>
                 </a:solidFill>
-                <a:latin typeface="Arial"/>
+                <a:latin typeface="Courier New"/>
               </a:rPr>
-              <a:t>+0.71</a:t>
-            </a:r>
-          </a:p>
-        </p:txBody>
-      </p:sp>
-      <p:sp>
-        <p:nvSpPr>
-          <p:cNvPr id="65" name="TextBox 64"/>
+              <a:t>+0.71   P=0.35</a:t>
+            </a:r>
+          </a:p>
+        </p:txBody>
+      </p:sp>
+      <p:sp>
+        <p:nvSpPr>
+          <p:cNvPr id="92" name="TextBox 91"/>
           <p:cNvSpPr txBox="1"/>
           <p:nvPr/>
         </p:nvSpPr>
         <p:spPr>
           <a:xfrm>
-            <a:off x="548640" y="4325112"/>
-            <a:ext cx="2468880" cy="210312"/>
+            <a:off x="457200" y="4325112"/>
+            <a:ext cx="2377440" cy="210312"/>
           </a:xfrm>
           <a:prstGeom prst="rect">
             <a:avLst/>
@@ -14243,14 +18960,14 @@
       </p:sp>
       <p:sp>
         <p:nvSpPr>
-          <p:cNvPr id="66" name="Rectangle 65"/>
-          <p:cNvSpPr/>
-          <p:nvPr/>
-        </p:nvSpPr>
-        <p:spPr>
-          <a:xfrm>
-            <a:off x="3200400" y="4361688"/>
-            <a:ext cx="738133" cy="128016"/>
+          <p:cNvPr id="93" name="Rectangle 92"/>
+          <p:cNvSpPr/>
+          <p:nvPr/>
+        </p:nvSpPr>
+        <p:spPr>
+          <a:xfrm>
+            <a:off x="3017520" y="4361688"/>
+            <a:ext cx="577998" cy="128016"/>
           </a:xfrm>
           <a:prstGeom prst="rect">
             <a:avLst/>
@@ -14289,14 +19006,14 @@
       </p:sp>
       <p:sp>
         <p:nvSpPr>
-          <p:cNvPr id="67" name="TextBox 66"/>
+          <p:cNvPr id="94" name="TextBox 93"/>
           <p:cNvSpPr txBox="1"/>
           <p:nvPr/>
         </p:nvSpPr>
         <p:spPr>
           <a:xfrm>
-            <a:off x="3984253" y="4325112"/>
-            <a:ext cx="640080" cy="210312"/>
+            <a:off x="6035040" y="4325112"/>
+            <a:ext cx="1280160" cy="210312"/>
           </a:xfrm>
           <a:prstGeom prst="rect">
             <a:avLst/>
@@ -14316,23 +19033,23 @@
                 <a:solidFill>
                   <a:srgbClr val="888888"/>
                 </a:solidFill>
-                <a:latin typeface="Arial"/>
+                <a:latin typeface="Courier New"/>
               </a:rPr>
-              <a:t>+0.24</a:t>
-            </a:r>
-          </a:p>
-        </p:txBody>
-      </p:sp>
-      <p:sp>
-        <p:nvSpPr>
-          <p:cNvPr id="68" name="TextBox 67"/>
+              <a:t>+0.24   P=0.35</a:t>
+            </a:r>
+          </a:p>
+        </p:txBody>
+      </p:sp>
+      <p:sp>
+        <p:nvSpPr>
+          <p:cNvPr id="95" name="TextBox 94"/>
           <p:cNvSpPr txBox="1"/>
           <p:nvPr/>
         </p:nvSpPr>
         <p:spPr>
           <a:xfrm>
-            <a:off x="548640" y="4498848"/>
-            <a:ext cx="2468880" cy="210312"/>
+            <a:off x="457200" y="4498848"/>
+            <a:ext cx="2377440" cy="210312"/>
           </a:xfrm>
           <a:prstGeom prst="rect">
             <a:avLst/>
@@ -14361,14 +19078,14 @@
       </p:sp>
       <p:sp>
         <p:nvSpPr>
-          <p:cNvPr id="69" name="Rectangle 68"/>
-          <p:cNvSpPr/>
-          <p:nvPr/>
-        </p:nvSpPr>
-        <p:spPr>
-          <a:xfrm>
-            <a:off x="3200400" y="4535424"/>
-            <a:ext cx="1017764" cy="128016"/>
+          <p:cNvPr id="96" name="Rectangle 95"/>
+          <p:cNvSpPr/>
+          <p:nvPr/>
+        </p:nvSpPr>
+        <p:spPr>
+          <a:xfrm>
+            <a:off x="3017520" y="4535424"/>
+            <a:ext cx="796963" cy="128016"/>
           </a:xfrm>
           <a:prstGeom prst="rect">
             <a:avLst/>
@@ -14407,14 +19124,14 @@
       </p:sp>
       <p:sp>
         <p:nvSpPr>
-          <p:cNvPr id="70" name="TextBox 69"/>
+          <p:cNvPr id="97" name="TextBox 96"/>
           <p:cNvSpPr txBox="1"/>
           <p:nvPr/>
         </p:nvSpPr>
         <p:spPr>
           <a:xfrm>
-            <a:off x="4263884" y="4498848"/>
-            <a:ext cx="640080" cy="210312"/>
+            <a:off x="6035040" y="4498848"/>
+            <a:ext cx="1280160" cy="210312"/>
           </a:xfrm>
           <a:prstGeom prst="rect">
             <a:avLst/>
@@ -14434,23 +19151,23 @@
                 <a:solidFill>
                   <a:srgbClr val="888888"/>
                 </a:solidFill>
-                <a:latin typeface="Arial"/>
+                <a:latin typeface="Courier New"/>
               </a:rPr>
-              <a:t>+0.33</a:t>
-            </a:r>
-          </a:p>
-        </p:txBody>
-      </p:sp>
-      <p:sp>
-        <p:nvSpPr>
-          <p:cNvPr id="71" name="TextBox 70"/>
+              <a:t>+0.33   P=0.35</a:t>
+            </a:r>
+          </a:p>
+        </p:txBody>
+      </p:sp>
+      <p:sp>
+        <p:nvSpPr>
+          <p:cNvPr id="98" name="TextBox 97"/>
           <p:cNvSpPr txBox="1"/>
           <p:nvPr/>
         </p:nvSpPr>
         <p:spPr>
           <a:xfrm>
-            <a:off x="548640" y="4672584"/>
-            <a:ext cx="2468880" cy="210312"/>
+            <a:off x="457200" y="4672584"/>
+            <a:ext cx="2377440" cy="210312"/>
           </a:xfrm>
           <a:prstGeom prst="rect">
             <a:avLst/>
@@ -14479,14 +19196,14 @@
       </p:sp>
       <p:sp>
         <p:nvSpPr>
-          <p:cNvPr id="72" name="Rectangle 71"/>
-          <p:cNvSpPr/>
-          <p:nvPr/>
-        </p:nvSpPr>
-        <p:spPr>
-          <a:xfrm>
-            <a:off x="3200400" y="4709159"/>
-            <a:ext cx="1331682" cy="128016"/>
+          <p:cNvPr id="99" name="Rectangle 98"/>
+          <p:cNvSpPr/>
+          <p:nvPr/>
+        </p:nvSpPr>
+        <p:spPr>
+          <a:xfrm>
+            <a:off x="3017520" y="4709159"/>
+            <a:ext cx="1042778" cy="128016"/>
           </a:xfrm>
           <a:prstGeom prst="rect">
             <a:avLst/>
@@ -14525,14 +19242,14 @@
       </p:sp>
       <p:sp>
         <p:nvSpPr>
-          <p:cNvPr id="73" name="TextBox 72"/>
+          <p:cNvPr id="100" name="TextBox 99"/>
           <p:cNvSpPr txBox="1"/>
           <p:nvPr/>
         </p:nvSpPr>
         <p:spPr>
           <a:xfrm>
-            <a:off x="4577802" y="4672584"/>
-            <a:ext cx="640080" cy="210312"/>
+            <a:off x="6035040" y="4672584"/>
+            <a:ext cx="1280160" cy="210312"/>
           </a:xfrm>
           <a:prstGeom prst="rect">
             <a:avLst/>
@@ -14552,23 +19269,23 @@
                 <a:solidFill>
                   <a:srgbClr val="888888"/>
                 </a:solidFill>
-                <a:latin typeface="Arial"/>
+                <a:latin typeface="Courier New"/>
               </a:rPr>
-              <a:t>+0.43</a:t>
-            </a:r>
-          </a:p>
-        </p:txBody>
-      </p:sp>
-      <p:sp>
-        <p:nvSpPr>
-          <p:cNvPr id="74" name="TextBox 73"/>
+              <a:t>+0.43   P=0.50</a:t>
+            </a:r>
+          </a:p>
+        </p:txBody>
+      </p:sp>
+      <p:sp>
+        <p:nvSpPr>
+          <p:cNvPr id="101" name="TextBox 100"/>
           <p:cNvSpPr txBox="1"/>
           <p:nvPr/>
         </p:nvSpPr>
         <p:spPr>
           <a:xfrm>
-            <a:off x="1371600" y="4956048"/>
-            <a:ext cx="3657600" cy="228600"/>
+            <a:off x="1005839" y="5166360"/>
+            <a:ext cx="2194560" cy="201168"/>
           </a:xfrm>
           <a:prstGeom prst="rect">
             <a:avLst/>
@@ -14597,14 +19314,14 @@
       </p:sp>
       <p:sp>
         <p:nvSpPr>
-          <p:cNvPr id="75" name="TextBox 74"/>
+          <p:cNvPr id="102" name="TextBox 101"/>
           <p:cNvSpPr txBox="1"/>
           <p:nvPr/>
         </p:nvSpPr>
         <p:spPr>
           <a:xfrm>
-            <a:off x="1371600" y="5230368"/>
-            <a:ext cx="3657600" cy="228600"/>
+            <a:off x="457200" y="5440680"/>
+            <a:ext cx="8229600" cy="182880"/>
           </a:xfrm>
           <a:prstGeom prst="rect">
             <a:avLst/>
@@ -14622,11 +19339,11 @@
             <a:r>
               <a:rPr sz="750" b="0" i="1">
                 <a:solidFill>
-                  <a:srgbClr val="D4A300"/>
+                  <a:srgbClr val="888888"/>
                 </a:solidFill>
                 <a:latin typeface="Arial"/>
               </a:rPr>
-              <a:t>★ = one-sided MW P ≤ 0.05 (ceiling)</a:t>
+              <a:t>★ = one-sided MW P ≤ 0.05 (3-vs-3 ceiling) · · = P ≤ 0.10 · P-values tabulated per composite in Courier at right of each bar.</a:t>
             </a:r>
           </a:p>
         </p:txBody>
